--- a/public/documents/countries/soudan-sud.pptx
+++ b/public/documents/countries/soudan-sud.pptx
@@ -120,7 +120,7 @@
 </p:presentation>
 </file>
 
-<file path=ppt/charts/chart10.xml><?xml version="1.0" encoding="utf-8"?>
+<file path=ppt/charts/chart17.xml><?xml version="1.0" encoding="utf-8"?>
 <c:chartSpace xmlns:c="http://schemas.openxmlformats.org/drawingml/2006/chart" xmlns:a="http://schemas.openxmlformats.org/drawingml/2006/main" xmlns:r="http://schemas.openxmlformats.org/officeDocument/2006/relationships">
   <c:date1904 val="0"/>
   <c:roundedCorners val="1"/>
@@ -377,7 +377,7 @@
 </c:chartSpace>
 </file>
 
-<file path=ppt/charts/chart11.xml><?xml version="1.0" encoding="utf-8"?>
+<file path=ppt/charts/chart18.xml><?xml version="1.0" encoding="utf-8"?>
 <c:chartSpace xmlns:c="http://schemas.openxmlformats.org/drawingml/2006/chart" xmlns:a="http://schemas.openxmlformats.org/drawingml/2006/main" xmlns:r="http://schemas.openxmlformats.org/officeDocument/2006/relationships">
   <c:date1904 val="0"/>
   <c:roundedCorners val="1"/>
@@ -668,7 +668,7 @@
 </c:chartSpace>
 </file>
 
-<file path=ppt/charts/chart12.xml><?xml version="1.0" encoding="utf-8"?>
+<file path=ppt/charts/chart19.xml><?xml version="1.0" encoding="utf-8"?>
 <c:chartSpace xmlns:c="http://schemas.openxmlformats.org/drawingml/2006/chart" xmlns:a="http://schemas.openxmlformats.org/drawingml/2006/main" xmlns:r="http://schemas.openxmlformats.org/officeDocument/2006/relationships">
   <c:date1904 val="0"/>
   <c:roundedCorners val="1"/>
@@ -3018,7 +3018,7 @@
       </p:sp>
       <p:pic>
         <p:nvPicPr>
-          <p:cNvPr id="5" name="Image 1" descr="C:\Users\Utilisateur\dev\gsw-dossiers\public\images\logo-icon.png">    </p:cNvPr>
+          <p:cNvPr id="5" name="Image 1" descr="C:\Users\Utilisateur\dev\green-solutions-web\public\images\logo-icon.png">    </p:cNvPr>
           <p:cNvPicPr>
             <a:picLocks noChangeAspect="1"/>
           </p:cNvPicPr>
@@ -3042,7 +3042,7 @@
       </p:pic>
       <p:pic>
         <p:nvPicPr>
-          <p:cNvPr id="6" name="Image 2" descr="C:\Users\Utilisateur\dev\gsw-dossiers\scripts\dossiers\drapeaux\soudan-sud.png">    </p:cNvPr>
+          <p:cNvPr id="6" name="Image 2" descr="C:\Users\Utilisateur\dev\green-solutions-web\scripts\dossiers\drapeaux\soudan-sud.png">    </p:cNvPr>
           <p:cNvPicPr>
             <a:picLocks noChangeAspect="1"/>
           </p:cNvPicPr>
@@ -6214,7 +6214,7 @@
       </p:sp>
       <p:pic>
         <p:nvPicPr>
-          <p:cNvPr id="6" name="Image 1" descr="C:\Users\Utilisateur\dev\gsw-dossiers\scripts\dossiers\sceau-aim-clair.png">    </p:cNvPr>
+          <p:cNvPr id="6" name="Image 1" descr="C:\Users\Utilisateur\dev\green-solutions-web\scripts\dossiers\sceau-aim-clair.png">    </p:cNvPr>
           <p:cNvPicPr>
             <a:picLocks noChangeAspect="1"/>
           </p:cNvPicPr>

--- a/public/documents/countries/soudan-sud.pptx
+++ b/public/documents/countries/soudan-sud.pptx
@@ -19,9 +19,11 @@
     <p:sldId id="267" r:id="rId13"/>
     <p:sldId id="268" r:id="rId14"/>
     <p:sldId id="269" r:id="rId15"/>
+    <p:sldId id="270" r:id="rId16"/>
+    <p:sldId id="271" r:id="rId17"/>
   </p:sldIdLst>
   <p:notesMasterIdLst>
-    <p:notesMasterId r:id="rId16"/>
+    <p:notesMasterId r:id="rId18"/>
   </p:notesMasterIdLst>
   <p:sldSz cx="12192000" cy="6858000"/>
   <p:notesSz cx="6858000" cy="12192000"/>
@@ -120,7 +122,266 @@
 </p:presentation>
 </file>
 
-<file path=ppt/charts/chart17.xml><?xml version="1.0" encoding="utf-8"?>
+<file path=ppt/charts/chart84.xml><?xml version="1.0" encoding="utf-8"?>
+<c:chartSpace xmlns:c="http://schemas.openxmlformats.org/drawingml/2006/chart" xmlns:a="http://schemas.openxmlformats.org/drawingml/2006/main" xmlns:r="http://schemas.openxmlformats.org/officeDocument/2006/relationships">
+  <c:date1904 val="0"/>
+  <c:roundedCorners val="1"/>
+  <c:chart>
+    <c:autoTitleDeleted val="1"/>
+    <c:plotArea>
+      <c:layout/>
+      <c:barChart>
+        <c:barDir val="col"/>
+        <c:grouping val="clustered"/>
+        <c:varyColors val="0"/>
+        <c:ser>
+          <c:idx val="0"/>
+          <c:order val="0"/>
+          <c:tx>
+            <c:strRef>
+              <c:f>Sheet1!$B$1</c:f>
+              <c:strCache>
+                <c:ptCount val="1"/>
+                <c:pt idx="0">
+                  <c:v>Global index of drought number and duration</c:v>
+                </c:pt>
+              </c:strCache>
+            </c:strRef>
+          </c:tx>
+          <c:spPr>
+            <a:solidFill>
+              <a:srgbClr val="1C5A73"/>
+            </a:solidFill>
+            <a:effectLst/>
+          </c:spPr>
+          <c:invertIfNegative val="0"/>
+          <c:dLbls>
+            <c:numFmt formatCode="[$-409]0" sourceLinked="0"/>
+            <c:txPr>
+              <a:bodyPr/>
+              <a:lstStyle/>
+              <a:p>
+                <a:pPr>
+                  <a:defRPr b="0" i="0" strike="noStrike" sz="1100" u="none">
+                    <a:solidFill>
+                      <a:srgbClr val="0E3546"/>
+                    </a:solidFill>
+                    <a:latin typeface="Calibri"/>
+                  </a:defRPr>
+                </a:pPr>
+              </a:p>
+            </c:txPr>
+            <c:showLegendKey val="0"/>
+            <c:showVal val="1"/>
+            <c:showCatName val="0"/>
+            <c:showSerName val="0"/>
+            <c:showPercent val="0"/>
+            <c:showBubbleSize val="0"/>
+            <c:showLeaderLines val="0"/>
+          </c:dLbls>
+          <c:dPt>
+            <c:idx val="0"/>
+            <c:invertIfNegative val="0"/>
+            <c:bubble3D val="0"/>
+            <c:spPr>
+              <a:solidFill>
+                <a:srgbClr val="1C5A73"/>
+              </a:solidFill>
+              <a:effectLst/>
+            </c:spPr>
+          </c:dPt>
+          <c:dPt>
+            <c:idx val="1"/>
+            <c:invertIfNegative val="0"/>
+            <c:bubble3D val="0"/>
+            <c:spPr>
+              <a:solidFill>
+                <a:srgbClr val="E0A33E"/>
+              </a:solidFill>
+              <a:effectLst/>
+            </c:spPr>
+          </c:dPt>
+          <c:cat>
+            <c:multiLvlStrRef>
+              <c:f>Sheet1!$A$2:$A$3</c:f>
+              <c:multiLvlStrCache>
+                <c:ptCount val="2"/>
+                <c:lvl>
+                  <c:pt idx="0">
+                    <c:v>1980–1999</c:v>
+                  </c:pt>
+                  <c:pt idx="1">
+                    <c:v>Since 2000</c:v>
+                  </c:pt>
+                </c:lvl>
+              </c:multiLvlStrCache>
+            </c:multiLvlStrRef>
+          </c:cat>
+          <c:val>
+            <c:numRef>
+              <c:f>Sheet1!$B$2:$B$3</c:f>
+              <c:numCache>
+                <c:formatCode>General</c:formatCode>
+                <c:ptCount val="2"/>
+                <c:pt idx="0">
+                  <c:v>100</c:v>
+                </c:pt>
+                <c:pt idx="1">
+                  <c:v>129</c:v>
+                </c:pt>
+              </c:numCache>
+            </c:numRef>
+          </c:val>
+        </c:ser>
+        <c:dLbls>
+          <c:numFmt formatCode="[$-409]0" sourceLinked="0"/>
+          <c:txPr>
+            <a:bodyPr/>
+            <a:lstStyle/>
+            <a:p>
+              <a:pPr>
+                <a:defRPr b="0" i="0" strike="noStrike" sz="1100" u="none">
+                  <a:solidFill>
+                    <a:srgbClr val="0E3546"/>
+                  </a:solidFill>
+                  <a:latin typeface="Calibri"/>
+                </a:defRPr>
+              </a:pPr>
+            </a:p>
+          </c:txPr>
+          <c:showLegendKey val="0"/>
+          <c:showVal val="1"/>
+          <c:showCatName val="0"/>
+          <c:showSerName val="0"/>
+          <c:showPercent val="0"/>
+          <c:showBubbleSize val="0"/>
+          <c:showLeaderLines val="0"/>
+        </c:dLbls>
+        <c:gapWidth val="150"/>
+        <c:overlap val="0"/>
+        <c:axId val="2094734554"/>
+        <c:axId val="2094734552"/>
+        <c:axId val="2094734556"/>
+      </c:barChart>
+      <c:catAx>
+        <c:axId val="2094734554"/>
+        <c:scaling>
+          <c:orientation val="minMax"/>
+        </c:scaling>
+        <c:delete val="0"/>
+        <c:axPos val="b"/>
+        <c:numFmt formatCode="General" sourceLinked="1"/>
+        <c:majorTickMark val="out"/>
+        <c:minorTickMark val="none"/>
+        <c:tickLblPos val="low"/>
+        <c:spPr>
+          <a:ln w="12700" cap="flat">
+            <a:solidFill>
+              <a:srgbClr val="888888"/>
+            </a:solidFill>
+            <a:prstDash val="solid"/>
+            <a:round/>
+          </a:ln>
+        </c:spPr>
+        <c:txPr>
+          <a:bodyPr/>
+          <a:lstStyle/>
+          <a:p>
+            <a:pPr>
+              <a:defRPr sz="1100" b="0" i="0" u="none" strike="noStrike">
+                <a:solidFill>
+                  <a:srgbClr val="6C8089"/>
+                </a:solidFill>
+                <a:latin typeface="Calibri"/>
+              </a:defRPr>
+            </a:pPr>
+            <a:endParaRPr lang="en-US"/>
+          </a:p>
+        </c:txPr>
+        <c:crossAx val="2094734552"/>
+        <c:crosses val="autoZero"/>
+        <c:auto val="1"/>
+        <c:lblAlgn val="ctr"/>
+        <c:noMultiLvlLbl val="1"/>
+      </c:catAx>
+      <c:valAx>
+        <c:axId val="2094734552"/>
+        <c:scaling>
+          <c:orientation val="minMax"/>
+          <c:max val="140"/>
+          <c:min val="0"/>
+        </c:scaling>
+        <c:delete val="0"/>
+        <c:axPos val="l"/>
+        <c:majorGridlines>
+          <c:spPr>
+            <a:ln w="9525" cap="flat">
+              <a:solidFill>
+                <a:srgbClr val="D6E2E7"/>
+              </a:solidFill>
+              <a:prstDash val="solid"/>
+              <a:round/>
+            </a:ln>
+          </c:spPr>
+        </c:majorGridlines>
+        <c:numFmt formatCode="General" sourceLinked="0"/>
+        <c:majorTickMark val="out"/>
+        <c:minorTickMark val="none"/>
+        <c:tickLblPos val="nextTo"/>
+        <c:spPr>
+          <a:ln w="12700" cap="flat">
+            <a:solidFill>
+              <a:srgbClr val="888888"/>
+            </a:solidFill>
+            <a:prstDash val="solid"/>
+            <a:round/>
+          </a:ln>
+        </c:spPr>
+        <c:txPr>
+          <a:bodyPr/>
+          <a:lstStyle/>
+          <a:p>
+            <a:pPr>
+              <a:defRPr sz="1100" b="0" i="0" u="none" strike="noStrike">
+                <a:solidFill>
+                  <a:srgbClr val="6C8089"/>
+                </a:solidFill>
+                <a:latin typeface="Calibri"/>
+              </a:defRPr>
+            </a:pPr>
+            <a:endParaRPr lang="en-US"/>
+          </a:p>
+        </c:txPr>
+        <c:crossAx val="2094734554"/>
+        <c:crosses val="autoZero"/>
+        <c:crossBetween val="between"/>
+        <c:majorUnit val="20"/>
+      </c:valAx>
+      <c:spPr>
+        <a:noFill/>
+        <a:ln>
+          <a:noFill/>
+        </a:ln>
+        <a:effectLst/>
+      </c:spPr>
+    </c:plotArea>
+    <c:plotVisOnly val="1"/>
+    <c:dispBlanksAs val="span"/>
+  </c:chart>
+  <c:spPr>
+    <a:noFill/>
+    <a:ln>
+      <a:noFill/>
+    </a:ln>
+    <a:effectLst/>
+  </c:spPr>
+  <c:externalData r:id="rId1">
+    <c:autoUpdate val="0"/>
+  </c:externalData>
+</c:chartSpace>
+</file>
+
+<file path=ppt/charts/chart85.xml><?xml version="1.0" encoding="utf-8"?>
 <c:chartSpace xmlns:c="http://schemas.openxmlformats.org/drawingml/2006/chart" xmlns:a="http://schemas.openxmlformats.org/drawingml/2006/main" xmlns:r="http://schemas.openxmlformats.org/officeDocument/2006/relationships">
   <c:date1904 val="0"/>
   <c:roundedCorners val="1"/>
@@ -377,7 +638,7 @@
 </c:chartSpace>
 </file>
 
-<file path=ppt/charts/chart18.xml><?xml version="1.0" encoding="utf-8"?>
+<file path=ppt/charts/chart86.xml><?xml version="1.0" encoding="utf-8"?>
 <c:chartSpace xmlns:c="http://schemas.openxmlformats.org/drawingml/2006/chart" xmlns:a="http://schemas.openxmlformats.org/drawingml/2006/main" xmlns:r="http://schemas.openxmlformats.org/officeDocument/2006/relationships">
   <c:date1904 val="0"/>
   <c:roundedCorners val="1"/>
@@ -668,7 +929,7 @@
 </c:chartSpace>
 </file>
 
-<file path=ppt/charts/chart19.xml><?xml version="1.0" encoding="utf-8"?>
+<file path=ppt/charts/chart87.xml><?xml version="1.0" encoding="utf-8"?>
 <c:chartSpace xmlns:c="http://schemas.openxmlformats.org/drawingml/2006/chart" xmlns:a="http://schemas.openxmlformats.org/drawingml/2006/main" xmlns:r="http://schemas.openxmlformats.org/officeDocument/2006/relationships">
   <c:date1904 val="0"/>
   <c:roundedCorners val="1"/>
@@ -1880,6 +2141,182 @@
             <a:fld id="{F7021451-1387-4CA6-816F-3879F97B5CBC}" type="slidenum">
               <a:rPr lang="en-US"/>
               <a:t>14</a:t>
+            </a:fld>
+            <a:endParaRPr lang="en-US"/>
+          </a:p>
+        </p:txBody>
+      </p:sp>
+    </p:spTree>
+    <p:extLst>
+      <p:ext uri="{BB962C8B-B14F-4D97-AF65-F5344CB8AC3E}">
+        <p14:creationId xmlns:p14="http://schemas.microsoft.com/office/powerpoint/2010/main" val="1024086991"/>
+      </p:ext>
+    </p:extLst>
+  </p:cSld>
+  <p:clrMapOvr>
+    <a:masterClrMapping/>
+  </p:clrMapOvr>
+</p:notes>
+</file>
+
+<file path=ppt/notesSlides/notesSlide15.xml><?xml version="1.0" encoding="utf-8"?>
+<p:notes xmlns:a="http://schemas.openxmlformats.org/drawingml/2006/main" xmlns:r="http://schemas.openxmlformats.org/officeDocument/2006/relationships" xmlns:p="http://schemas.openxmlformats.org/presentationml/2006/main">
+  <p:cSld>
+    <p:spTree>
+      <p:nvGrpSpPr>
+        <p:cNvPr id="1" name=""/>
+        <p:cNvGrpSpPr/>
+        <p:nvPr/>
+      </p:nvGrpSpPr>
+      <p:grpSpPr>
+        <a:xfrm>
+          <a:off x="0" y="0"/>
+          <a:ext cx="0" cy="0"/>
+          <a:chOff x="0" y="0"/>
+          <a:chExt cx="0" cy="0"/>
+        </a:xfrm>
+      </p:grpSpPr>
+      <p:sp>
+        <p:nvSpPr>
+          <p:cNvPr id="2" name="Slide Image Placeholder 1"/>
+          <p:cNvSpPr>
+            <a:spLocks noGrp="1" noRot="1" noChangeAspect="1"/>
+          </p:cNvSpPr>
+          <p:nvPr>
+            <p:ph type="sldImg"/>
+          </p:nvPr>
+        </p:nvSpPr>
+        <p:spPr/>
+      </p:sp>
+      <p:sp>
+        <p:nvSpPr>
+          <p:cNvPr id="3" name="Notes Placeholder 2"/>
+          <p:cNvSpPr>
+            <a:spLocks noGrp="1"/>
+          </p:cNvSpPr>
+          <p:nvPr>
+            <p:ph type="body" idx="1"/>
+          </p:nvPr>
+        </p:nvSpPr>
+        <p:spPr/>
+        <p:txBody>
+          <a:bodyPr/>
+          <a:lstStyle/>
+          <a:p>
+            <a:r>
+              <a:rPr lang="en-US" dirty="0"/>
+              <a:t/>
+            </a:r>
+            <a:endParaRPr lang="en-US" dirty="0"/>
+          </a:p>
+        </p:txBody>
+      </p:sp>
+      <p:sp>
+        <p:nvSpPr>
+          <p:cNvPr id="4" name="Slide Number Placeholder 3"/>
+          <p:cNvSpPr>
+            <a:spLocks noGrp="1"/>
+          </p:cNvSpPr>
+          <p:nvPr>
+            <p:ph type="sldNum" sz="quarter" idx="10"/>
+          </p:nvPr>
+        </p:nvSpPr>
+        <p:spPr/>
+        <p:txBody>
+          <a:bodyPr/>
+          <a:lstStyle/>
+          <a:p>
+            <a:fld id="{F7021451-1387-4CA6-816F-3879F97B5CBC}" type="slidenum">
+              <a:rPr lang="en-US"/>
+              <a:t>15</a:t>
+            </a:fld>
+            <a:endParaRPr lang="en-US"/>
+          </a:p>
+        </p:txBody>
+      </p:sp>
+    </p:spTree>
+    <p:extLst>
+      <p:ext uri="{BB962C8B-B14F-4D97-AF65-F5344CB8AC3E}">
+        <p14:creationId xmlns:p14="http://schemas.microsoft.com/office/powerpoint/2010/main" val="1024086991"/>
+      </p:ext>
+    </p:extLst>
+  </p:cSld>
+  <p:clrMapOvr>
+    <a:masterClrMapping/>
+  </p:clrMapOvr>
+</p:notes>
+</file>
+
+<file path=ppt/notesSlides/notesSlide16.xml><?xml version="1.0" encoding="utf-8"?>
+<p:notes xmlns:a="http://schemas.openxmlformats.org/drawingml/2006/main" xmlns:r="http://schemas.openxmlformats.org/officeDocument/2006/relationships" xmlns:p="http://schemas.openxmlformats.org/presentationml/2006/main">
+  <p:cSld>
+    <p:spTree>
+      <p:nvGrpSpPr>
+        <p:cNvPr id="1" name=""/>
+        <p:cNvGrpSpPr/>
+        <p:nvPr/>
+      </p:nvGrpSpPr>
+      <p:grpSpPr>
+        <a:xfrm>
+          <a:off x="0" y="0"/>
+          <a:ext cx="0" cy="0"/>
+          <a:chOff x="0" y="0"/>
+          <a:chExt cx="0" cy="0"/>
+        </a:xfrm>
+      </p:grpSpPr>
+      <p:sp>
+        <p:nvSpPr>
+          <p:cNvPr id="2" name="Slide Image Placeholder 1"/>
+          <p:cNvSpPr>
+            <a:spLocks noGrp="1" noRot="1" noChangeAspect="1"/>
+          </p:cNvSpPr>
+          <p:nvPr>
+            <p:ph type="sldImg"/>
+          </p:nvPr>
+        </p:nvSpPr>
+        <p:spPr/>
+      </p:sp>
+      <p:sp>
+        <p:nvSpPr>
+          <p:cNvPr id="3" name="Notes Placeholder 2"/>
+          <p:cNvSpPr>
+            <a:spLocks noGrp="1"/>
+          </p:cNvSpPr>
+          <p:nvPr>
+            <p:ph type="body" idx="1"/>
+          </p:nvPr>
+        </p:nvSpPr>
+        <p:spPr/>
+        <p:txBody>
+          <a:bodyPr/>
+          <a:lstStyle/>
+          <a:p>
+            <a:r>
+              <a:rPr lang="en-US" dirty="0"/>
+              <a:t/>
+            </a:r>
+            <a:endParaRPr lang="en-US" dirty="0"/>
+          </a:p>
+        </p:txBody>
+      </p:sp>
+      <p:sp>
+        <p:nvSpPr>
+          <p:cNvPr id="4" name="Slide Number Placeholder 3"/>
+          <p:cNvSpPr>
+            <a:spLocks noGrp="1"/>
+          </p:cNvSpPr>
+          <p:nvPr>
+            <p:ph type="sldNum" sz="quarter" idx="10"/>
+          </p:nvPr>
+        </p:nvSpPr>
+        <p:spPr/>
+        <p:txBody>
+          <a:bodyPr/>
+          <a:lstStyle/>
+          <a:p>
+            <a:fld id="{F7021451-1387-4CA6-816F-3879F97B5CBC}" type="slidenum">
+              <a:rPr lang="en-US"/>
+              <a:t>16</a:t>
             </a:fld>
             <a:endParaRPr lang="en-US"/>
           </a:p>
@@ -3018,7 +3455,7 @@
       </p:sp>
       <p:pic>
         <p:nvPicPr>
-          <p:cNvPr id="5" name="Image 1" descr="C:\Users\Utilisateur\dev\green-solutions-web\public\images\logo-icon.png">    </p:cNvPr>
+          <p:cNvPr id="5" name="Image 1" descr="/workspace/scratch/50eb4f7d8e13/green-solutions-web/public/images/logo-icon.png">    </p:cNvPr>
           <p:cNvPicPr>
             <a:picLocks noChangeAspect="1"/>
           </p:cNvPicPr>
@@ -3042,7 +3479,7 @@
       </p:pic>
       <p:pic>
         <p:nvPicPr>
-          <p:cNvPr id="6" name="Image 2" descr="C:\Users\Utilisateur\dev\green-solutions-web\scripts\dossiers\drapeaux\soudan-sud.png">    </p:cNvPr>
+          <p:cNvPr id="6" name="Image 2" descr="/workspace/scratch/50eb4f7d8e13/green-solutions-web/scripts/dossiers/drapeaux/soudan-sud.png">    </p:cNvPr>
           <p:cNvPicPr>
             <a:picLocks noChangeAspect="1"/>
           </p:cNvPicPr>
@@ -3392,7 +3829,7 @@
                 <a:ea typeface="Calibri" pitchFamily="34" charset="-122"/>
                 <a:cs typeface="Calibri" pitchFamily="34" charset="-120"/>
               </a:rPr>
-              <a:t>ORDERS OF MAGNITUDE</a:t>
+              <a:t>The rest of the range</a:t>
             </a:r>
             <a:endParaRPr lang="en-US" sz="1150" dirty="0"/>
           </a:p>
@@ -3431,42 +3868,340 @@
                 <a:ea typeface="Cambria" pitchFamily="34" charset="-122"/>
                 <a:cs typeface="Cambria" pitchFamily="34" charset="-120"/>
               </a:rPr>
-              <a:t>Expected water saving by irrigation method</a:t>
+              <a:t>Protecting crops, holding soils</a:t>
             </a:r>
             <a:endParaRPr lang="en-US" sz="3000" dirty="0"/>
           </a:p>
         </p:txBody>
       </p:sp>
-      <p:graphicFrame>
-        <p:nvGraphicFramePr>
-          <p:cNvPr id="4" name="Chart 0" descr=""/>
-          <p:cNvGraphicFramePr/>
-          <p:nvPr/>
-        </p:nvGraphicFramePr>
-        <p:xfrm>
-          <a:off x="594360" y="1783080"/>
-          <a:ext cx="7360920" cy="3977640"/>
-        </p:xfrm>
-        <a:graphic xmlns:a="http://schemas.openxmlformats.org/drawingml/2006/main">
-          <a:graphicData uri="http://schemas.openxmlformats.org/drawingml/2006/chart">
-            <c:chart xmlns:c="http://schemas.openxmlformats.org/drawingml/2006/chart" r:id="rId1"/>
-          </a:graphicData>
-        </a:graphic>
-      </p:graphicFrame>
-      <p:sp>
-        <p:nvSpPr>
-          <p:cNvPr id="5" name="Shape 2"/>
+      <p:sp>
+        <p:nvSpPr>
+          <p:cNvPr id="4" name="Text 2"/>
+          <p:cNvSpPr txBox="1"/>
+          <p:nvPr/>
+        </p:nvSpPr>
+        <p:spPr>
+          <a:xfrm>
+            <a:off x="594360" y="1783080"/>
+            <a:ext cx="5227168" cy="411480"/>
+          </a:xfrm>
+          <a:prstGeom prst="rect">
+            <a:avLst/>
+          </a:prstGeom>
+          <a:noFill/>
+          <a:ln/>
+        </p:spPr>
+        <p:txBody>
+          <a:bodyPr wrap="square" lIns="0" tIns="0" rIns="0" bIns="0" rtlCol="0" anchor="ctr"/>
+          <a:lstStyle/>
+          <a:p>
+            <a:pPr algn="l" indent="0" marL="0">
+              <a:buNone/>
+            </a:pPr>
+            <a:r>
+              <a:rPr lang="en-US" sz="1600" b="1" dirty="0">
+                <a:solidFill>
+                  <a:srgbClr val="1C5A73"/>
+                </a:solidFill>
+                <a:latin typeface="Cambria" pitchFamily="34" charset="0"/>
+                <a:ea typeface="Cambria" pitchFamily="34" charset="-122"/>
+                <a:cs typeface="Cambria" pitchFamily="34" charset="-120"/>
+              </a:rPr>
+              <a:t>NAPEMA® — protection without residue</a:t>
+            </a:r>
+            <a:endParaRPr lang="en-US" sz="1600" dirty="0"/>
+          </a:p>
+        </p:txBody>
+      </p:sp>
+      <p:sp>
+        <p:nvSpPr>
+          <p:cNvPr id="5" name="Text 3"/>
+          <p:cNvSpPr txBox="1"/>
+          <p:nvPr/>
+        </p:nvSpPr>
+        <p:spPr>
+          <a:xfrm>
+            <a:off x="594360" y="2286000"/>
+            <a:ext cx="5227168" cy="2468880"/>
+          </a:xfrm>
+          <a:prstGeom prst="rect">
+            <a:avLst/>
+          </a:prstGeom>
+          <a:noFill/>
+          <a:ln/>
+        </p:spPr>
+        <p:txBody>
+          <a:bodyPr wrap="square" lIns="0" tIns="0" rIns="0" bIns="0" rtlCol="0" anchor="t"/>
+          <a:lstStyle/>
+          <a:p>
+            <a:pPr algn="l" marL="342900" indent="-342900">
+              <a:lnSpc>
+                <a:spcPct val="122000"/>
+              </a:lnSpc>
+              <a:spcAft>
+                <a:spcPts val="1000"/>
+              </a:spcAft>
+              <a:buSzPct val="100000"/>
+              <a:buChar char="•"/>
+            </a:pPr>
+            <a:r>
+              <a:rPr lang="en-US" sz="1350" dirty="0">
+                <a:solidFill>
+                  <a:srgbClr val="31424A"/>
+                </a:solidFill>
+                <a:latin typeface="Calibri" pitchFamily="34" charset="0"/>
+                <a:ea typeface="Calibri" pitchFamily="34" charset="-122"/>
+                <a:cs typeface="Calibri" pitchFamily="34" charset="-120"/>
+              </a:rPr>
+              <a:t>Controls diseases, parasites, fungi and pests, with no synthetic molecule.</a:t>
+            </a:r>
+            <a:endParaRPr lang="en-US" sz="1350" dirty="0"/>
+          </a:p>
+          <a:p>
+            <a:pPr algn="l" marL="342900" indent="-342900">
+              <a:lnSpc>
+                <a:spcPct val="122000"/>
+              </a:lnSpc>
+              <a:spcAft>
+                <a:spcPts val="1000"/>
+              </a:spcAft>
+              <a:buSzPct val="100000"/>
+              <a:buChar char="•"/>
+            </a:pPr>
+            <a:r>
+              <a:rPr lang="en-US" sz="1350" dirty="0">
+                <a:solidFill>
+                  <a:srgbClr val="31424A"/>
+                </a:solidFill>
+                <a:latin typeface="Calibri" pitchFamily="34" charset="0"/>
+                <a:ea typeface="Calibri" pitchFamily="34" charset="-122"/>
+                <a:cs typeface="Calibri" pitchFamily="34" charset="-120"/>
+              </a:rPr>
+              <a:t>Foliar and root spraying, working both preventively and curatively.</a:t>
+            </a:r>
+            <a:endParaRPr lang="en-US" sz="1350" dirty="0"/>
+          </a:p>
+          <a:p>
+            <a:pPr algn="l" marL="342900" indent="-342900">
+              <a:lnSpc>
+                <a:spcPct val="122000"/>
+              </a:lnSpc>
+              <a:spcAft>
+                <a:spcPts val="1000"/>
+              </a:spcAft>
+              <a:buSzPct val="100000"/>
+              <a:buChar char="•"/>
+            </a:pPr>
+            <a:r>
+              <a:rPr lang="en-US" sz="1350" dirty="0">
+                <a:solidFill>
+                  <a:srgbClr val="31424A"/>
+                </a:solidFill>
+                <a:latin typeface="Calibri" pitchFamily="34" charset="0"/>
+                <a:ea typeface="Calibri" pitchFamily="34" charset="-122"/>
+                <a:cs typeface="Calibri" pitchFamily="34" charset="-120"/>
+              </a:rPr>
+              <a:t>No residue in soil, plant or air: pollinators and beneficial insects are spared.</a:t>
+            </a:r>
+            <a:endParaRPr lang="en-US" sz="1350" dirty="0"/>
+          </a:p>
+          <a:p>
+            <a:pPr algn="l" marL="342900" indent="-342900">
+              <a:lnSpc>
+                <a:spcPct val="122000"/>
+              </a:lnSpc>
+              <a:spcAft>
+                <a:spcPts val="1000"/>
+              </a:spcAft>
+              <a:buSzPct val="100000"/>
+              <a:buChar char="•"/>
+            </a:pPr>
+            <a:r>
+              <a:rPr lang="en-US" sz="1350" dirty="0">
+                <a:solidFill>
+                  <a:srgbClr val="31424A"/>
+                </a:solidFill>
+                <a:latin typeface="Calibri" pitchFamily="34" charset="0"/>
+                <a:ea typeface="Calibri" pitchFamily="34" charset="-122"/>
+                <a:cs typeface="Calibri" pitchFamily="34" charset="-120"/>
+              </a:rPr>
+              <a:t>Formulated for one precise problem: mealybug, citrus greening (HLB), nematodes.</a:t>
+            </a:r>
+            <a:endParaRPr lang="en-US" sz="1350" dirty="0"/>
+          </a:p>
+        </p:txBody>
+      </p:sp>
+      <p:sp>
+        <p:nvSpPr>
+          <p:cNvPr id="6" name="Text 4"/>
+          <p:cNvSpPr txBox="1"/>
+          <p:nvPr/>
+        </p:nvSpPr>
+        <p:spPr>
+          <a:xfrm>
+            <a:off x="6370168" y="1783080"/>
+            <a:ext cx="5227168" cy="411480"/>
+          </a:xfrm>
+          <a:prstGeom prst="rect">
+            <a:avLst/>
+          </a:prstGeom>
+          <a:noFill/>
+          <a:ln/>
+        </p:spPr>
+        <p:txBody>
+          <a:bodyPr wrap="square" lIns="0" tIns="0" rIns="0" bIns="0" rtlCol="0" anchor="ctr"/>
+          <a:lstStyle/>
+          <a:p>
+            <a:pPr algn="l" indent="0" marL="0">
+              <a:buNone/>
+            </a:pPr>
+            <a:r>
+              <a:rPr lang="en-US" sz="1600" b="1" dirty="0">
+                <a:solidFill>
+                  <a:srgbClr val="1C5A73"/>
+                </a:solidFill>
+                <a:latin typeface="Cambria" pitchFamily="34" charset="0"/>
+                <a:ea typeface="Cambria" pitchFamily="34" charset="-122"/>
+                <a:cs typeface="Cambria" pitchFamily="34" charset="-120"/>
+              </a:rPr>
+              <a:t>Paulownia ALTIFOLIA® — the tree for hot regions</a:t>
+            </a:r>
+            <a:endParaRPr lang="en-US" sz="1600" dirty="0"/>
+          </a:p>
+        </p:txBody>
+      </p:sp>
+      <p:sp>
+        <p:nvSpPr>
+          <p:cNvPr id="7" name="Text 5"/>
+          <p:cNvSpPr txBox="1"/>
+          <p:nvPr/>
+        </p:nvSpPr>
+        <p:spPr>
+          <a:xfrm>
+            <a:off x="6370168" y="2286000"/>
+            <a:ext cx="5227168" cy="2468880"/>
+          </a:xfrm>
+          <a:prstGeom prst="rect">
+            <a:avLst/>
+          </a:prstGeom>
+          <a:noFill/>
+          <a:ln/>
+        </p:spPr>
+        <p:txBody>
+          <a:bodyPr wrap="square" lIns="0" tIns="0" rIns="0" bIns="0" rtlCol="0" anchor="t"/>
+          <a:lstStyle/>
+          <a:p>
+            <a:pPr algn="l" marL="342900" indent="-342900">
+              <a:lnSpc>
+                <a:spcPct val="122000"/>
+              </a:lnSpc>
+              <a:spcAft>
+                <a:spcPts val="1000"/>
+              </a:spcAft>
+              <a:buSzPct val="100000"/>
+              <a:buChar char="•"/>
+            </a:pPr>
+            <a:r>
+              <a:rPr lang="en-US" sz="1350" dirty="0">
+                <a:solidFill>
+                  <a:srgbClr val="31424A"/>
+                </a:solidFill>
+                <a:latin typeface="Calibri" pitchFamily="34" charset="0"/>
+                <a:ea typeface="Calibri" pitchFamily="34" charset="-122"/>
+                <a:cs typeface="Calibri" pitchFamily="34" charset="-120"/>
+              </a:rPr>
+              <a:t>13 to 15 m in six to eight years, with a wide trunk.</a:t>
+            </a:r>
+            <a:endParaRPr lang="en-US" sz="1350" dirty="0"/>
+          </a:p>
+          <a:p>
+            <a:pPr algn="l" marL="342900" indent="-342900">
+              <a:lnSpc>
+                <a:spcPct val="122000"/>
+              </a:lnSpc>
+              <a:spcAft>
+                <a:spcPts val="1000"/>
+              </a:spcAft>
+              <a:buSzPct val="100000"/>
+              <a:buChar char="•"/>
+            </a:pPr>
+            <a:r>
+              <a:rPr lang="en-US" sz="1350" dirty="0">
+                <a:solidFill>
+                  <a:srgbClr val="31424A"/>
+                </a:solidFill>
+                <a:latin typeface="Calibri" pitchFamily="34" charset="0"/>
+                <a:ea typeface="Calibri" pitchFamily="34" charset="-122"/>
+                <a:cs typeface="Calibri" pitchFamily="34" charset="-120"/>
+              </a:rPr>
+              <a:t>Combined with 100 g of EVERGREEN® per plant, irrigation needs drop by 50%.</a:t>
+            </a:r>
+            <a:endParaRPr lang="en-US" sz="1350" dirty="0"/>
+          </a:p>
+          <a:p>
+            <a:pPr algn="l" marL="342900" indent="-342900">
+              <a:lnSpc>
+                <a:spcPct val="122000"/>
+              </a:lnSpc>
+              <a:spcAft>
+                <a:spcPts val="1000"/>
+              </a:spcAft>
+              <a:buSzPct val="100000"/>
+              <a:buChar char="•"/>
+            </a:pPr>
+            <a:r>
+              <a:rPr lang="en-US" sz="1350" dirty="0">
+                <a:solidFill>
+                  <a:srgbClr val="31424A"/>
+                </a:solidFill>
+                <a:latin typeface="Calibri" pitchFamily="34" charset="0"/>
+                <a:ea typeface="Calibri" pitchFamily="34" charset="-122"/>
+                <a:cs typeface="Calibri" pitchFamily="34" charset="-120"/>
+              </a:rPr>
+              <a:t>Withstands −25 °C to +45 °C; the wood only ignites above 426 °C.</a:t>
+            </a:r>
+            <a:endParaRPr lang="en-US" sz="1350" dirty="0"/>
+          </a:p>
+          <a:p>
+            <a:pPr algn="l" marL="342900" indent="-342900">
+              <a:lnSpc>
+                <a:spcPct val="122000"/>
+              </a:lnSpc>
+              <a:spcAft>
+                <a:spcPts val="1000"/>
+              </a:spcAft>
+              <a:buSzPct val="100000"/>
+              <a:buChar char="•"/>
+            </a:pPr>
+            <a:r>
+              <a:rPr lang="en-US" sz="1350" dirty="0">
+                <a:solidFill>
+                  <a:srgbClr val="31424A"/>
+                </a:solidFill>
+                <a:latin typeface="Calibri" pitchFamily="34" charset="0"/>
+                <a:ea typeface="Calibri" pitchFamily="34" charset="-122"/>
+                <a:cs typeface="Calibri" pitchFamily="34" charset="-120"/>
+              </a:rPr>
+              <a:t>Windbreak, protection against soil erosion, 400 to 700 kg of honey per hectare.</a:t>
+            </a:r>
+            <a:endParaRPr lang="en-US" sz="1350" dirty="0"/>
+          </a:p>
+        </p:txBody>
+      </p:sp>
+      <p:sp>
+        <p:nvSpPr>
+          <p:cNvPr id="8" name="Shape 6"/>
           <p:cNvSpPr/>
           <p:nvPr/>
         </p:nvSpPr>
         <p:spPr>
           <a:xfrm>
-            <a:off x="8275320" y="1783080"/>
-            <a:ext cx="3291840" cy="3977640"/>
+            <a:off x="594360" y="4846320"/>
+            <a:ext cx="11002975" cy="960120"/>
           </a:xfrm>
           <a:prstGeom prst="roundRect">
             <a:avLst>
-              <a:gd name="adj" fmla="val 2778"/>
+              <a:gd name="adj" fmla="val 7619"/>
             </a:avLst>
           </a:prstGeom>
           <a:solidFill>
@@ -3482,53 +4217,14 @@
       </p:sp>
       <p:sp>
         <p:nvSpPr>
-          <p:cNvPr id="6" name="Text 3"/>
-          <p:cNvSpPr txBox="1"/>
-          <p:nvPr/>
-        </p:nvSpPr>
-        <p:spPr>
-          <a:xfrm>
-            <a:off x="8503920" y="2011680"/>
-            <a:ext cx="2834640" cy="457200"/>
-          </a:xfrm>
-          <a:prstGeom prst="rect">
-            <a:avLst/>
-          </a:prstGeom>
-          <a:noFill/>
-          <a:ln/>
-        </p:spPr>
-        <p:txBody>
-          <a:bodyPr wrap="square" lIns="0" tIns="0" rIns="0" bIns="0" rtlCol="0" anchor="ctr"/>
-          <a:lstStyle/>
-          <a:p>
-            <a:pPr algn="l" indent="0" marL="0">
-              <a:buNone/>
-            </a:pPr>
-            <a:r>
-              <a:rPr lang="en-US" sz="1300" b="1" dirty="0">
-                <a:solidFill>
-                  <a:srgbClr val="1C5A73"/>
-                </a:solidFill>
-                <a:latin typeface="Cambria" pitchFamily="34" charset="0"/>
-                <a:ea typeface="Cambria" pitchFamily="34" charset="-122"/>
-                <a:cs typeface="Cambria" pitchFamily="34" charset="-120"/>
-              </a:rPr>
-              <a:t>Read with caution</a:t>
-            </a:r>
-            <a:endParaRPr lang="en-US" sz="1300" dirty="0"/>
-          </a:p>
-        </p:txBody>
-      </p:sp>
-      <p:sp>
-        <p:nvSpPr>
-          <p:cNvPr id="7" name="Text 4"/>
-          <p:cNvSpPr txBox="1"/>
-          <p:nvPr/>
-        </p:nvSpPr>
-        <p:spPr>
-          <a:xfrm>
-            <a:off x="8503920" y="2560320"/>
-            <a:ext cx="2834640" cy="3017520"/>
+          <p:cNvPr id="9" name="Text 7"/>
+          <p:cNvSpPr txBox="1"/>
+          <p:nvPr/>
+        </p:nvSpPr>
+        <p:spPr>
+          <a:xfrm>
+            <a:off x="822960" y="4983480"/>
+            <a:ext cx="10545775" cy="713232"/>
           </a:xfrm>
           <a:prstGeom prst="rect">
             <a:avLst/>
@@ -3542,57 +4238,28 @@
           <a:p>
             <a:pPr algn="l" indent="0" marL="0">
               <a:lnSpc>
-                <a:spcPct val="125000"/>
+                <a:spcPct val="118000"/>
               </a:lnSpc>
               <a:buNone/>
             </a:pPr>
             <a:r>
-              <a:rPr lang="en-US" sz="1200" dirty="0">
-                <a:solidFill>
-                  <a:srgbClr val="31424A"/>
-                </a:solidFill>
-                <a:latin typeface="Calibri" pitchFamily="34" charset="0"/>
-                <a:ea typeface="Calibri" pitchFamily="34" charset="-122"/>
-                <a:cs typeface="Calibri" pitchFamily="34" charset="-120"/>
-              </a:rPr>
-              <a:t>These ranges are indicative and based on the savings documented for our hydro-retainers.</a:t>
-            </a:r>
-            <a:endParaRPr lang="en-US" sz="1200" dirty="0"/>
-          </a:p>
-          <a:p>
-            <a:pPr algn="l" indent="0" marL="0">
-              <a:lnSpc>
-                <a:spcPct val="125000"/>
-              </a:lnSpc>
-              <a:buNone/>
-            </a:pPr>
-            <a:endParaRPr lang="en-US" sz="1200" dirty="0"/>
-          </a:p>
-          <a:p>
-            <a:pPr algn="l" indent="0" marL="0">
-              <a:lnSpc>
-                <a:spcPct val="125000"/>
-              </a:lnSpc>
-              <a:buNone/>
-            </a:pPr>
-            <a:r>
-              <a:rPr lang="en-US" sz="1200" dirty="0">
-                <a:solidFill>
-                  <a:srgbClr val="31424A"/>
-                </a:solidFill>
-                <a:latin typeface="Calibri" pitchFamily="34" charset="0"/>
-                <a:ea typeface="Calibri" pitchFamily="34" charset="-122"/>
-                <a:cs typeface="Calibri" pitchFamily="34" charset="-120"/>
-              </a:rPr>
-              <a:t>The actual result depends on the soil, the climate and the crop. They give an order of magnitude and are in no case a guaranteed, contractual or absolute value.</a:t>
-            </a:r>
-            <a:endParaRPr lang="en-US" sz="1200" dirty="0"/>
-          </a:p>
-        </p:txBody>
-      </p:sp>
-      <p:sp>
-        <p:nvSpPr>
-          <p:cNvPr id="8" name="Text 5"/>
+              <a:rPr lang="en-US" sz="1100" dirty="0">
+                <a:solidFill>
+                  <a:srgbClr val="6C8089"/>
+                </a:solidFill>
+                <a:latin typeface="Calibri" pitchFamily="34" charset="0"/>
+                <a:ea typeface="Calibri" pitchFamily="34" charset="-122"/>
+                <a:cs typeface="Calibri" pitchFamily="34" charset="-120"/>
+              </a:rPr>
+              <a:t>Plants delivered potted (25 to 30 cm), certified disease-free and replaced under warranty in case of loss. First harvest at the end of year six, with wood valued at around €400 to €450 per m³.</a:t>
+            </a:r>
+            <a:endParaRPr lang="en-US" sz="1100" dirty="0"/>
+          </a:p>
+        </p:txBody>
+      </p:sp>
+      <p:sp>
+        <p:nvSpPr>
+          <p:cNvPr id="10" name="Text 8"/>
           <p:cNvSpPr txBox="1"/>
           <p:nvPr/>
         </p:nvSpPr>
@@ -3633,7 +4300,7 @@
       </p:sp>
       <p:sp>
         <p:nvSpPr>
-          <p:cNvPr id="9" name="Text 6"/>
+          <p:cNvPr id="11" name="Text 9"/>
           <p:cNvSpPr txBox="1"/>
           <p:nvPr/>
         </p:nvSpPr>
@@ -3737,7 +4404,7 @@
                 <a:ea typeface="Calibri" pitchFamily="34" charset="-122"/>
                 <a:cs typeface="Calibri" pitchFamily="34" charset="-120"/>
               </a:rPr>
-              <a:t>THREE PRIORITY AREAS</a:t>
+              <a:t>ORDERS OF MAGNITUDE</a:t>
             </a:r>
             <a:endParaRPr lang="en-US" sz="1150" dirty="0"/>
           </a:p>
@@ -3776,26 +4443,42 @@
                 <a:ea typeface="Cambria" pitchFamily="34" charset="-122"/>
                 <a:cs typeface="Cambria" pitchFamily="34" charset="-120"/>
               </a:rPr>
-              <a:t>Where to run the first trials</a:t>
+              <a:t>Expected water saving by irrigation method</a:t>
             </a:r>
             <a:endParaRPr lang="en-US" sz="3000" dirty="0"/>
           </a:p>
         </p:txBody>
       </p:sp>
-      <p:sp>
-        <p:nvSpPr>
-          <p:cNvPr id="4" name="Shape 2"/>
+      <p:graphicFrame>
+        <p:nvGraphicFramePr>
+          <p:cNvPr id="4" name="Chart 0" descr=""/>
+          <p:cNvGraphicFramePr/>
+          <p:nvPr/>
+        </p:nvGraphicFramePr>
+        <p:xfrm>
+          <a:off x="594360" y="1783080"/>
+          <a:ext cx="7360920" cy="3977640"/>
+        </p:xfrm>
+        <a:graphic xmlns:a="http://schemas.openxmlformats.org/drawingml/2006/main">
+          <a:graphicData uri="http://schemas.openxmlformats.org/drawingml/2006/chart">
+            <c:chart xmlns:c="http://schemas.openxmlformats.org/drawingml/2006/chart" r:id="rId1"/>
+          </a:graphicData>
+        </a:graphic>
+      </p:graphicFrame>
+      <p:sp>
+        <p:nvSpPr>
+          <p:cNvPr id="5" name="Shape 2"/>
           <p:cNvSpPr/>
           <p:nvPr/>
         </p:nvSpPr>
         <p:spPr>
           <a:xfrm>
-            <a:off x="594360" y="1783080"/>
-            <a:ext cx="3472586" cy="4069080"/>
+            <a:off x="8275320" y="1783080"/>
+            <a:ext cx="3291840" cy="3977640"/>
           </a:xfrm>
           <a:prstGeom prst="roundRect">
             <a:avLst>
-              <a:gd name="adj" fmla="val 2633"/>
+              <a:gd name="adj" fmla="val 2778"/>
             </a:avLst>
           </a:prstGeom>
           <a:solidFill>
@@ -3809,30 +4492,6 @@
           </a:ln>
         </p:spPr>
       </p:sp>
-      <p:pic>
-        <p:nvPicPr>
-          <p:cNvPr id="5" name="Image 0" descr="preencoded.png">    </p:cNvPr>
-          <p:cNvPicPr>
-            <a:picLocks noChangeAspect="1"/>
-          </p:cNvPicPr>
-          <p:nvPr/>
-        </p:nvPicPr>
-        <p:blipFill>
-          <a:blip r:embed="rId1"/>
-          <a:stretch>
-            <a:fillRect/>
-          </a:stretch>
-        </p:blipFill>
-        <p:spPr>
-          <a:xfrm>
-            <a:off x="594360" y="1783080"/>
-            <a:ext cx="3472586" cy="1691640"/>
-          </a:xfrm>
-          <a:prstGeom prst="rect">
-            <a:avLst/>
-          </a:prstGeom>
-        </p:spPr>
-      </p:pic>
       <p:sp>
         <p:nvSpPr>
           <p:cNvPr id="6" name="Text 3"/>
@@ -3841,8 +4500,8 @@
         </p:nvSpPr>
         <p:spPr>
           <a:xfrm>
-            <a:off x="795528" y="3639312"/>
-            <a:ext cx="3070250" cy="384048"/>
+            <a:off x="8503920" y="2011680"/>
+            <a:ext cx="2834640" cy="457200"/>
           </a:xfrm>
           <a:prstGeom prst="rect">
             <a:avLst/>
@@ -3858,7 +4517,7 @@
               <a:buNone/>
             </a:pPr>
             <a:r>
-              <a:rPr lang="en-US" sz="1500" b="1" dirty="0">
+              <a:rPr lang="en-US" sz="1300" b="1" dirty="0">
                 <a:solidFill>
                   <a:srgbClr val="1C5A73"/>
                 </a:solidFill>
@@ -3866,9 +4525,9 @@
                 <a:ea typeface="Cambria" pitchFamily="34" charset="-122"/>
                 <a:cs typeface="Cambria" pitchFamily="34" charset="-120"/>
               </a:rPr>
-              <a:t>Western Equatoria</a:t>
-            </a:r>
-            <a:endParaRPr lang="en-US" sz="1500" dirty="0"/>
+              <a:t>Read with caution</a:t>
+            </a:r>
+            <a:endParaRPr lang="en-US" sz="1300" dirty="0"/>
           </a:p>
         </p:txBody>
       </p:sp>
@@ -3880,580 +4539,72 @@
         </p:nvSpPr>
         <p:spPr>
           <a:xfrm>
-            <a:off x="795528" y="4041648"/>
-            <a:ext cx="3070250" cy="329184"/>
-          </a:xfrm>
-          <a:prstGeom prst="rect">
-            <a:avLst/>
-          </a:prstGeom>
-          <a:noFill/>
-          <a:ln/>
-        </p:spPr>
-        <p:txBody>
-          <a:bodyPr wrap="square" lIns="0" tIns="0" rIns="0" bIns="0" rtlCol="0" anchor="ctr"/>
+            <a:off x="8503920" y="2560320"/>
+            <a:ext cx="2834640" cy="3017520"/>
+          </a:xfrm>
+          <a:prstGeom prst="rect">
+            <a:avLst/>
+          </a:prstGeom>
+          <a:noFill/>
+          <a:ln/>
+        </p:spPr>
+        <p:txBody>
+          <a:bodyPr wrap="square" lIns="0" tIns="0" rIns="0" bIns="0" rtlCol="0" anchor="t"/>
           <a:lstStyle/>
           <a:p>
             <a:pPr algn="l" indent="0" marL="0">
-              <a:buNone/>
-            </a:pPr>
-            <a:r>
-              <a:rPr lang="en-US" sz="1250" b="1" dirty="0">
-                <a:solidFill>
-                  <a:srgbClr val="A3701A"/>
-                </a:solidFill>
-                <a:latin typeface="Calibri" pitchFamily="34" charset="0"/>
-                <a:ea typeface="Calibri" pitchFamily="34" charset="-122"/>
-                <a:cs typeface="Calibri" pitchFamily="34" charset="-120"/>
-              </a:rPr>
-              <a:t>The Greenbelt</a:t>
-            </a:r>
-            <a:endParaRPr lang="en-US" sz="1250" dirty="0"/>
+              <a:lnSpc>
+                <a:spcPct val="125000"/>
+              </a:lnSpc>
+              <a:buNone/>
+            </a:pPr>
+            <a:r>
+              <a:rPr lang="en-US" sz="1200" dirty="0">
+                <a:solidFill>
+                  <a:srgbClr val="31424A"/>
+                </a:solidFill>
+                <a:latin typeface="Calibri" pitchFamily="34" charset="0"/>
+                <a:ea typeface="Calibri" pitchFamily="34" charset="-122"/>
+                <a:cs typeface="Calibri" pitchFamily="34" charset="-120"/>
+              </a:rPr>
+              <a:t>These ranges are indicative and based on the savings documented for our hydro-retainers.</a:t>
+            </a:r>
+            <a:endParaRPr lang="en-US" sz="1200" dirty="0"/>
+          </a:p>
+          <a:p>
+            <a:pPr algn="l" indent="0" marL="0">
+              <a:lnSpc>
+                <a:spcPct val="125000"/>
+              </a:lnSpc>
+              <a:buNone/>
+            </a:pPr>
+            <a:endParaRPr lang="en-US" sz="1200" dirty="0"/>
+          </a:p>
+          <a:p>
+            <a:pPr algn="l" indent="0" marL="0">
+              <a:lnSpc>
+                <a:spcPct val="125000"/>
+              </a:lnSpc>
+              <a:buNone/>
+            </a:pPr>
+            <a:r>
+              <a:rPr lang="en-US" sz="1200" dirty="0">
+                <a:solidFill>
+                  <a:srgbClr val="31424A"/>
+                </a:solidFill>
+                <a:latin typeface="Calibri" pitchFamily="34" charset="0"/>
+                <a:ea typeface="Calibri" pitchFamily="34" charset="-122"/>
+                <a:cs typeface="Calibri" pitchFamily="34" charset="-120"/>
+              </a:rPr>
+              <a:t>The actual result depends on the soil, the climate and the crop. They give an order of magnitude and are in no case a guaranteed, contractual or absolute value.</a:t>
+            </a:r>
+            <a:endParaRPr lang="en-US" sz="1200" dirty="0"/>
           </a:p>
         </p:txBody>
       </p:sp>
       <p:sp>
         <p:nvSpPr>
           <p:cNvPr id="8" name="Text 5"/>
-          <p:cNvSpPr txBox="1"/>
-          <p:nvPr/>
-        </p:nvSpPr>
-        <p:spPr>
-          <a:xfrm>
-            <a:off x="795528" y="4407408"/>
-            <a:ext cx="3070250" cy="1280160"/>
-          </a:xfrm>
-          <a:prstGeom prst="rect">
-            <a:avLst/>
-          </a:prstGeom>
-          <a:noFill/>
-          <a:ln/>
-        </p:spPr>
-        <p:txBody>
-          <a:bodyPr wrap="square" lIns="0" tIns="0" rIns="0" bIns="0" rtlCol="0" anchor="t"/>
-          <a:lstStyle/>
-          <a:p>
-            <a:pPr algn="l" marL="342900" indent="-342900">
-              <a:lnSpc>
-                <a:spcPct val="116000"/>
-              </a:lnSpc>
-              <a:spcAft>
-                <a:spcPts val="700"/>
-              </a:spcAft>
-              <a:buSzPct val="100000"/>
-              <a:buChar char="•"/>
-            </a:pPr>
-            <a:r>
-              <a:rPr lang="en-US" sz="1150" dirty="0">
-                <a:solidFill>
-                  <a:srgbClr val="31424A"/>
-                </a:solidFill>
-                <a:latin typeface="Calibri" pitchFamily="34" charset="0"/>
-                <a:ea typeface="Calibri" pitchFamily="34" charset="-122"/>
-                <a:cs typeface="Calibri" pitchFamily="34" charset="-120"/>
-              </a:rPr>
-              <a:t>Maize, cassava, groundnut and vegetables under a long rainy season.</a:t>
-            </a:r>
-            <a:endParaRPr lang="en-US" sz="1150" dirty="0"/>
-          </a:p>
-          <a:p>
-            <a:pPr algn="l" marL="342900" indent="-342900">
-              <a:lnSpc>
-                <a:spcPct val="116000"/>
-              </a:lnSpc>
-              <a:spcAft>
-                <a:spcPts val="700"/>
-              </a:spcAft>
-              <a:buSzPct val="100000"/>
-              <a:buChar char="•"/>
-            </a:pPr>
-            <a:r>
-              <a:rPr lang="en-US" sz="1150" dirty="0">
-                <a:solidFill>
-                  <a:srgbClr val="31424A"/>
-                </a:solidFill>
-                <a:latin typeface="Calibri" pitchFamily="34" charset="0"/>
-                <a:ea typeface="Calibri" pitchFamily="34" charset="-122"/>
-                <a:cs typeface="Calibri" pitchFamily="34" charset="-120"/>
-              </a:rPr>
-              <a:t>Trials near Yambio and Nzara reached 4.7 t/ha of maize with fertiliser, against 2.9 t/ha on control plots.</a:t>
-            </a:r>
-            <a:endParaRPr lang="en-US" sz="1150" dirty="0"/>
-          </a:p>
-          <a:p>
-            <a:pPr algn="l" marL="342900" indent="-342900">
-              <a:lnSpc>
-                <a:spcPct val="116000"/>
-              </a:lnSpc>
-              <a:spcAft>
-                <a:spcPts val="700"/>
-              </a:spcAft>
-              <a:buSzPct val="100000"/>
-              <a:buChar char="•"/>
-            </a:pPr>
-            <a:r>
-              <a:rPr lang="en-US" sz="1150" dirty="0">
-                <a:solidFill>
-                  <a:srgbClr val="31424A"/>
-                </a:solidFill>
-                <a:latin typeface="Calibri" pitchFamily="34" charset="0"/>
-                <a:ea typeface="Calibri" pitchFamily="34" charset="-122"/>
-                <a:cs typeface="Calibri" pitchFamily="34" charset="-120"/>
-              </a:rPr>
-              <a:t>Better access and security than most regions for a monitored pilot.</a:t>
-            </a:r>
-            <a:endParaRPr lang="en-US" sz="1150" dirty="0"/>
-          </a:p>
-        </p:txBody>
-      </p:sp>
-      <p:sp>
-        <p:nvSpPr>
-          <p:cNvPr id="9" name="Shape 6"/>
-          <p:cNvSpPr/>
-          <p:nvPr/>
-        </p:nvSpPr>
-        <p:spPr>
-          <a:xfrm>
-            <a:off x="4359554" y="1783080"/>
-            <a:ext cx="3472586" cy="4069080"/>
-          </a:xfrm>
-          <a:prstGeom prst="roundRect">
-            <a:avLst>
-              <a:gd name="adj" fmla="val 2633"/>
-            </a:avLst>
-          </a:prstGeom>
-          <a:solidFill>
-            <a:srgbClr val="EDF3F5"/>
-          </a:solidFill>
-          <a:ln w="9525">
-            <a:solidFill>
-              <a:srgbClr val="D6E2E7"/>
-            </a:solidFill>
-            <a:prstDash val="solid"/>
-          </a:ln>
-        </p:spPr>
-      </p:sp>
-      <p:pic>
-        <p:nvPicPr>
-          <p:cNvPr id="10" name="Image 1" descr="preencoded.png">    </p:cNvPr>
-          <p:cNvPicPr>
-            <a:picLocks noChangeAspect="1"/>
-          </p:cNvPicPr>
-          <p:nvPr/>
-        </p:nvPicPr>
-        <p:blipFill>
-          <a:blip r:embed="rId2"/>
-          <a:stretch>
-            <a:fillRect/>
-          </a:stretch>
-        </p:blipFill>
-        <p:spPr>
-          <a:xfrm>
-            <a:off x="4359554" y="1783080"/>
-            <a:ext cx="3472586" cy="1691640"/>
-          </a:xfrm>
-          <a:prstGeom prst="rect">
-            <a:avLst/>
-          </a:prstGeom>
-        </p:spPr>
-      </p:pic>
-      <p:sp>
-        <p:nvSpPr>
-          <p:cNvPr id="11" name="Text 7"/>
-          <p:cNvSpPr txBox="1"/>
-          <p:nvPr/>
-        </p:nvSpPr>
-        <p:spPr>
-          <a:xfrm>
-            <a:off x="4560722" y="3639312"/>
-            <a:ext cx="3070250" cy="384048"/>
-          </a:xfrm>
-          <a:prstGeom prst="rect">
-            <a:avLst/>
-          </a:prstGeom>
-          <a:noFill/>
-          <a:ln/>
-        </p:spPr>
-        <p:txBody>
-          <a:bodyPr wrap="square" lIns="0" tIns="0" rIns="0" bIns="0" rtlCol="0" anchor="ctr"/>
-          <a:lstStyle/>
-          <a:p>
-            <a:pPr algn="l" indent="0" marL="0">
-              <a:buNone/>
-            </a:pPr>
-            <a:r>
-              <a:rPr lang="en-US" sz="1500" b="1" dirty="0">
-                <a:solidFill>
-                  <a:srgbClr val="1C5A73"/>
-                </a:solidFill>
-                <a:latin typeface="Cambria" pitchFamily="34" charset="0"/>
-                <a:ea typeface="Cambria" pitchFamily="34" charset="-122"/>
-                <a:cs typeface="Cambria" pitchFamily="34" charset="-120"/>
-              </a:rPr>
-              <a:t>Central Equatoria — Juba</a:t>
-            </a:r>
-            <a:endParaRPr lang="en-US" sz="1500" dirty="0"/>
-          </a:p>
-        </p:txBody>
-      </p:sp>
-      <p:sp>
-        <p:nvSpPr>
-          <p:cNvPr id="12" name="Text 8"/>
-          <p:cNvSpPr txBox="1"/>
-          <p:nvPr/>
-        </p:nvSpPr>
-        <p:spPr>
-          <a:xfrm>
-            <a:off x="4560722" y="4041648"/>
-            <a:ext cx="3070250" cy="329184"/>
-          </a:xfrm>
-          <a:prstGeom prst="rect">
-            <a:avLst/>
-          </a:prstGeom>
-          <a:noFill/>
-          <a:ln/>
-        </p:spPr>
-        <p:txBody>
-          <a:bodyPr wrap="square" lIns="0" tIns="0" rIns="0" bIns="0" rtlCol="0" anchor="ctr"/>
-          <a:lstStyle/>
-          <a:p>
-            <a:pPr algn="l" indent="0" marL="0">
-              <a:buNone/>
-            </a:pPr>
-            <a:r>
-              <a:rPr lang="en-US" sz="1250" b="1" dirty="0">
-                <a:solidFill>
-                  <a:srgbClr val="A3701A"/>
-                </a:solidFill>
-                <a:latin typeface="Calibri" pitchFamily="34" charset="0"/>
-                <a:ea typeface="Calibri" pitchFamily="34" charset="-122"/>
-                <a:cs typeface="Calibri" pitchFamily="34" charset="-120"/>
-              </a:rPr>
-              <a:t>Peri-urban vegetables</a:t>
-            </a:r>
-            <a:endParaRPr lang="en-US" sz="1250" dirty="0"/>
-          </a:p>
-        </p:txBody>
-      </p:sp>
-      <p:sp>
-        <p:nvSpPr>
-          <p:cNvPr id="13" name="Text 9"/>
-          <p:cNvSpPr txBox="1"/>
-          <p:nvPr/>
-        </p:nvSpPr>
-        <p:spPr>
-          <a:xfrm>
-            <a:off x="4560722" y="4407408"/>
-            <a:ext cx="3070250" cy="1280160"/>
-          </a:xfrm>
-          <a:prstGeom prst="rect">
-            <a:avLst/>
-          </a:prstGeom>
-          <a:noFill/>
-          <a:ln/>
-        </p:spPr>
-        <p:txBody>
-          <a:bodyPr wrap="square" lIns="0" tIns="0" rIns="0" bIns="0" rtlCol="0" anchor="t"/>
-          <a:lstStyle/>
-          <a:p>
-            <a:pPr algn="l" marL="342900" indent="-342900">
-              <a:lnSpc>
-                <a:spcPct val="116000"/>
-              </a:lnSpc>
-              <a:spcAft>
-                <a:spcPts val="700"/>
-              </a:spcAft>
-              <a:buSzPct val="100000"/>
-              <a:buChar char="•"/>
-            </a:pPr>
-            <a:r>
-              <a:rPr lang="en-US" sz="1150" dirty="0">
-                <a:solidFill>
-                  <a:srgbClr val="31424A"/>
-                </a:solidFill>
-                <a:latin typeface="Calibri" pitchFamily="34" charset="0"/>
-                <a:ea typeface="Calibri" pitchFamily="34" charset="-122"/>
-                <a:cs typeface="Calibri" pitchFamily="34" charset="-120"/>
-              </a:rPr>
-              <a:t>Tomato, onion, okra and leafy vegetables for a city that imports much of its food.</a:t>
-            </a:r>
-            <a:endParaRPr lang="en-US" sz="1150" dirty="0"/>
-          </a:p>
-          <a:p>
-            <a:pPr algn="l" marL="342900" indent="-342900">
-              <a:lnSpc>
-                <a:spcPct val="116000"/>
-              </a:lnSpc>
-              <a:spcAft>
-                <a:spcPts val="700"/>
-              </a:spcAft>
-              <a:buSzPct val="100000"/>
-              <a:buChar char="•"/>
-            </a:pPr>
-            <a:r>
-              <a:rPr lang="en-US" sz="1150" dirty="0">
-                <a:solidFill>
-                  <a:srgbClr val="31424A"/>
-                </a:solidFill>
-                <a:latin typeface="Calibri" pitchFamily="34" charset="0"/>
-                <a:ea typeface="Calibri" pitchFamily="34" charset="-122"/>
-                <a:cs typeface="Calibri" pitchFamily="34" charset="-120"/>
-              </a:rPr>
-              <a:t>Hand watering and dry-season irrigation from wells and the Nile.</a:t>
-            </a:r>
-            <a:endParaRPr lang="en-US" sz="1150" dirty="0"/>
-          </a:p>
-          <a:p>
-            <a:pPr algn="l" marL="342900" indent="-342900">
-              <a:lnSpc>
-                <a:spcPct val="116000"/>
-              </a:lnSpc>
-              <a:spcAft>
-                <a:spcPts val="700"/>
-              </a:spcAft>
-              <a:buSzPct val="100000"/>
-              <a:buChar char="•"/>
-            </a:pPr>
-            <a:r>
-              <a:rPr lang="en-US" sz="1150" dirty="0">
-                <a:solidFill>
-                  <a:srgbClr val="31424A"/>
-                </a:solidFill>
-                <a:latin typeface="Calibri" pitchFamily="34" charset="0"/>
-                <a:ea typeface="Calibri" pitchFamily="34" charset="-122"/>
-                <a:cs typeface="Calibri" pitchFamily="34" charset="-120"/>
-              </a:rPr>
-              <a:t>Short cycles and a cash market: a trial shows results in one season.</a:t>
-            </a:r>
-            <a:endParaRPr lang="en-US" sz="1150" dirty="0"/>
-          </a:p>
-        </p:txBody>
-      </p:sp>
-      <p:sp>
-        <p:nvSpPr>
-          <p:cNvPr id="14" name="Shape 10"/>
-          <p:cNvSpPr/>
-          <p:nvPr/>
-        </p:nvSpPr>
-        <p:spPr>
-          <a:xfrm>
-            <a:off x="8124749" y="1783080"/>
-            <a:ext cx="3472586" cy="4069080"/>
-          </a:xfrm>
-          <a:prstGeom prst="roundRect">
-            <a:avLst>
-              <a:gd name="adj" fmla="val 2633"/>
-            </a:avLst>
-          </a:prstGeom>
-          <a:solidFill>
-            <a:srgbClr val="EDF3F5"/>
-          </a:solidFill>
-          <a:ln w="9525">
-            <a:solidFill>
-              <a:srgbClr val="D6E2E7"/>
-            </a:solidFill>
-            <a:prstDash val="solid"/>
-          </a:ln>
-        </p:spPr>
-      </p:sp>
-      <p:pic>
-        <p:nvPicPr>
-          <p:cNvPr id="15" name="Image 2" descr="preencoded.png">    </p:cNvPr>
-          <p:cNvPicPr>
-            <a:picLocks noChangeAspect="1"/>
-          </p:cNvPicPr>
-          <p:nvPr/>
-        </p:nvPicPr>
-        <p:blipFill>
-          <a:blip r:embed="rId3"/>
-          <a:stretch>
-            <a:fillRect/>
-          </a:stretch>
-        </p:blipFill>
-        <p:spPr>
-          <a:xfrm>
-            <a:off x="8124749" y="1783080"/>
-            <a:ext cx="3472586" cy="1691640"/>
-          </a:xfrm>
-          <a:prstGeom prst="rect">
-            <a:avLst/>
-          </a:prstGeom>
-        </p:spPr>
-      </p:pic>
-      <p:sp>
-        <p:nvSpPr>
-          <p:cNvPr id="16" name="Text 11"/>
-          <p:cNvSpPr txBox="1"/>
-          <p:nvPr/>
-        </p:nvSpPr>
-        <p:spPr>
-          <a:xfrm>
-            <a:off x="8325917" y="3639312"/>
-            <a:ext cx="3070250" cy="384048"/>
-          </a:xfrm>
-          <a:prstGeom prst="rect">
-            <a:avLst/>
-          </a:prstGeom>
-          <a:noFill/>
-          <a:ln/>
-        </p:spPr>
-        <p:txBody>
-          <a:bodyPr wrap="square" lIns="0" tIns="0" rIns="0" bIns="0" rtlCol="0" anchor="ctr"/>
-          <a:lstStyle/>
-          <a:p>
-            <a:pPr algn="l" indent="0" marL="0">
-              <a:buNone/>
-            </a:pPr>
-            <a:r>
-              <a:rPr lang="en-US" sz="1500" b="1" dirty="0">
-                <a:solidFill>
-                  <a:srgbClr val="1C5A73"/>
-                </a:solidFill>
-                <a:latin typeface="Cambria" pitchFamily="34" charset="0"/>
-                <a:ea typeface="Cambria" pitchFamily="34" charset="-122"/>
-                <a:cs typeface="Cambria" pitchFamily="34" charset="-120"/>
-              </a:rPr>
-              <a:t>Northern Bahr el Ghazal</a:t>
-            </a:r>
-            <a:endParaRPr lang="en-US" sz="1500" dirty="0"/>
-          </a:p>
-        </p:txBody>
-      </p:sp>
-      <p:sp>
-        <p:nvSpPr>
-          <p:cNvPr id="17" name="Text 12"/>
-          <p:cNvSpPr txBox="1"/>
-          <p:nvPr/>
-        </p:nvSpPr>
-        <p:spPr>
-          <a:xfrm>
-            <a:off x="8325917" y="4041648"/>
-            <a:ext cx="3070250" cy="329184"/>
-          </a:xfrm>
-          <a:prstGeom prst="rect">
-            <a:avLst/>
-          </a:prstGeom>
-          <a:noFill/>
-          <a:ln/>
-        </p:spPr>
-        <p:txBody>
-          <a:bodyPr wrap="square" lIns="0" tIns="0" rIns="0" bIns="0" rtlCol="0" anchor="ctr"/>
-          <a:lstStyle/>
-          <a:p>
-            <a:pPr algn="l" indent="0" marL="0">
-              <a:buNone/>
-            </a:pPr>
-            <a:r>
-              <a:rPr lang="en-US" sz="1250" b="1" dirty="0">
-                <a:solidFill>
-                  <a:srgbClr val="A3701A"/>
-                </a:solidFill>
-                <a:latin typeface="Calibri" pitchFamily="34" charset="0"/>
-                <a:ea typeface="Calibri" pitchFamily="34" charset="-122"/>
-                <a:cs typeface="Calibri" pitchFamily="34" charset="-120"/>
-              </a:rPr>
-              <a:t>Sorghum and rice</a:t>
-            </a:r>
-            <a:endParaRPr lang="en-US" sz="1250" dirty="0"/>
-          </a:p>
-        </p:txBody>
-      </p:sp>
-      <p:sp>
-        <p:nvSpPr>
-          <p:cNvPr id="18" name="Text 13"/>
-          <p:cNvSpPr txBox="1"/>
-          <p:nvPr/>
-        </p:nvSpPr>
-        <p:spPr>
-          <a:xfrm>
-            <a:off x="8325917" y="4407408"/>
-            <a:ext cx="3070250" cy="1280160"/>
-          </a:xfrm>
-          <a:prstGeom prst="rect">
-            <a:avLst/>
-          </a:prstGeom>
-          <a:noFill/>
-          <a:ln/>
-        </p:spPr>
-        <p:txBody>
-          <a:bodyPr wrap="square" lIns="0" tIns="0" rIns="0" bIns="0" rtlCol="0" anchor="t"/>
-          <a:lstStyle/>
-          <a:p>
-            <a:pPr algn="l" marL="342900" indent="-342900">
-              <a:lnSpc>
-                <a:spcPct val="116000"/>
-              </a:lnSpc>
-              <a:spcAft>
-                <a:spcPts val="700"/>
-              </a:spcAft>
-              <a:buSzPct val="100000"/>
-              <a:buChar char="•"/>
-            </a:pPr>
-            <a:r>
-              <a:rPr lang="en-US" sz="1150" dirty="0">
-                <a:solidFill>
-                  <a:srgbClr val="31424A"/>
-                </a:solidFill>
-                <a:latin typeface="Calibri" pitchFamily="34" charset="0"/>
-                <a:ea typeface="Calibri" pitchFamily="34" charset="-122"/>
-                <a:cs typeface="Calibri" pitchFamily="34" charset="-120"/>
-              </a:rPr>
-              <a:t>Rain-fed sorghum, and irrigated rice on the Aweil scheme.</a:t>
-            </a:r>
-            <a:endParaRPr lang="en-US" sz="1150" dirty="0"/>
-          </a:p>
-          <a:p>
-            <a:pPr algn="l" marL="342900" indent="-342900">
-              <a:lnSpc>
-                <a:spcPct val="116000"/>
-              </a:lnSpc>
-              <a:spcAft>
-                <a:spcPts val="700"/>
-              </a:spcAft>
-              <a:buSzPct val="100000"/>
-              <a:buChar char="•"/>
-            </a:pPr>
-            <a:r>
-              <a:rPr lang="en-US" sz="1150" dirty="0">
-                <a:solidFill>
-                  <a:srgbClr val="31424A"/>
-                </a:solidFill>
-                <a:latin typeface="Calibri" pitchFamily="34" charset="0"/>
-                <a:ea typeface="Calibri" pitchFamily="34" charset="-122"/>
-                <a:cs typeface="Calibri" pitchFamily="34" charset="-120"/>
-              </a:rPr>
-              <a:t>Dry spells early in the season, floods late: plots must be selected with care.</a:t>
-            </a:r>
-            <a:endParaRPr lang="en-US" sz="1150" dirty="0"/>
-          </a:p>
-          <a:p>
-            <a:pPr algn="l" marL="342900" indent="-342900">
-              <a:lnSpc>
-                <a:spcPct val="116000"/>
-              </a:lnSpc>
-              <a:spcAft>
-                <a:spcPts val="700"/>
-              </a:spcAft>
-              <a:buSzPct val="100000"/>
-              <a:buChar char="•"/>
-            </a:pPr>
-            <a:r>
-              <a:rPr lang="en-US" sz="1150" dirty="0">
-                <a:solidFill>
-                  <a:srgbClr val="31424A"/>
-                </a:solidFill>
-                <a:latin typeface="Calibri" pitchFamily="34" charset="0"/>
-                <a:ea typeface="Calibri" pitchFamily="34" charset="-122"/>
-                <a:cs typeface="Calibri" pitchFamily="34" charset="-120"/>
-              </a:rPr>
-              <a:t>Farmer groups already supported by FAO and NGO programmes.</a:t>
-            </a:r>
-            <a:endParaRPr lang="en-US" sz="1150" dirty="0"/>
-          </a:p>
-        </p:txBody>
-      </p:sp>
-      <p:sp>
-        <p:nvSpPr>
-          <p:cNvPr id="19" name="Text 14"/>
           <p:cNvSpPr txBox="1"/>
           <p:nvPr/>
         </p:nvSpPr>
@@ -4494,7 +4645,7 @@
       </p:sp>
       <p:sp>
         <p:nvSpPr>
-          <p:cNvPr id="20" name="Text 15"/>
+          <p:cNvPr id="9" name="Text 6"/>
           <p:cNvSpPr txBox="1"/>
           <p:nvPr/>
         </p:nvSpPr>
@@ -4598,7 +4749,7 @@
                 <a:ea typeface="Calibri" pitchFamily="34" charset="-122"/>
                 <a:cs typeface="Calibri" pitchFamily="34" charset="-120"/>
               </a:rPr>
-              <a:t>HOW WE WORK</a:t>
+              <a:t>THREE PRIORITY AREAS</a:t>
             </a:r>
             <a:endParaRPr lang="en-US" sz="1150" dirty="0"/>
           </a:p>
@@ -4637,7 +4788,7 @@
                 <a:ea typeface="Cambria" pitchFamily="34" charset="-122"/>
                 <a:cs typeface="Cambria" pitchFamily="34" charset="-120"/>
               </a:rPr>
-              <a:t>A staged rollout, measured at every step</a:t>
+              <a:t>Where to run the first trials</a:t>
             </a:r>
             <a:endParaRPr lang="en-US" sz="3000" dirty="0"/>
           </a:p>
@@ -4651,12 +4802,12 @@
         </p:nvSpPr>
         <p:spPr>
           <a:xfrm>
-            <a:off x="594360" y="1874520"/>
-            <a:ext cx="2545004" cy="2834640"/>
+            <a:off x="594360" y="1783080"/>
+            <a:ext cx="3472586" cy="4069080"/>
           </a:xfrm>
           <a:prstGeom prst="roundRect">
             <a:avLst>
-              <a:gd name="adj" fmla="val 3593"/>
+              <a:gd name="adj" fmla="val 2633"/>
             </a:avLst>
           </a:prstGeom>
           <a:solidFill>
@@ -4670,36 +4821,40 @@
           </a:ln>
         </p:spPr>
       </p:sp>
-      <p:sp>
-        <p:nvSpPr>
-          <p:cNvPr id="5" name="Shape 3"/>
-          <p:cNvSpPr/>
-          <p:nvPr/>
-        </p:nvSpPr>
-        <p:spPr>
-          <a:xfrm>
-            <a:off x="822960" y="2103120"/>
-            <a:ext cx="566928" cy="566928"/>
-          </a:xfrm>
-          <a:prstGeom prst="ellipse">
-            <a:avLst/>
-          </a:prstGeom>
-          <a:solidFill>
-            <a:srgbClr val="1C5A73"/>
-          </a:solidFill>
-          <a:ln/>
-        </p:spPr>
-      </p:sp>
-      <p:sp>
-        <p:nvSpPr>
-          <p:cNvPr id="6" name="Text 4"/>
-          <p:cNvSpPr txBox="1"/>
-          <p:nvPr/>
-        </p:nvSpPr>
-        <p:spPr>
-          <a:xfrm>
-            <a:off x="822960" y="2103120"/>
-            <a:ext cx="566928" cy="566928"/>
+      <p:pic>
+        <p:nvPicPr>
+          <p:cNvPr id="5" name="Image 0" descr="preencoded.png">    </p:cNvPr>
+          <p:cNvPicPr>
+            <a:picLocks noChangeAspect="1"/>
+          </p:cNvPicPr>
+          <p:nvPr/>
+        </p:nvPicPr>
+        <p:blipFill>
+          <a:blip r:embed="rId1"/>
+          <a:stretch>
+            <a:fillRect/>
+          </a:stretch>
+        </p:blipFill>
+        <p:spPr>
+          <a:xfrm>
+            <a:off x="594360" y="1783080"/>
+            <a:ext cx="3472586" cy="1691640"/>
+          </a:xfrm>
+          <a:prstGeom prst="rect">
+            <a:avLst/>
+          </a:prstGeom>
+        </p:spPr>
+      </p:pic>
+      <p:sp>
+        <p:nvSpPr>
+          <p:cNvPr id="6" name="Text 3"/>
+          <p:cNvSpPr txBox="1"/>
+          <p:nvPr/>
+        </p:nvSpPr>
+        <p:spPr>
+          <a:xfrm>
+            <a:off x="795528" y="3639312"/>
+            <a:ext cx="3070250" cy="384048"/>
           </a:xfrm>
           <a:prstGeom prst="rect">
             <a:avLst/>
@@ -4711,34 +4866,34 @@
           <a:bodyPr wrap="square" lIns="0" tIns="0" rIns="0" bIns="0" rtlCol="0" anchor="ctr"/>
           <a:lstStyle/>
           <a:p>
-            <a:pPr algn="ctr" indent="0" marL="0">
-              <a:buNone/>
-            </a:pPr>
-            <a:r>
-              <a:rPr lang="en-US" sz="1600" b="1" dirty="0">
-                <a:solidFill>
-                  <a:srgbClr val="FFFFFF"/>
+            <a:pPr algn="l" indent="0" marL="0">
+              <a:buNone/>
+            </a:pPr>
+            <a:r>
+              <a:rPr lang="en-US" sz="1500" b="1" dirty="0">
+                <a:solidFill>
+                  <a:srgbClr val="1C5A73"/>
                 </a:solidFill>
                 <a:latin typeface="Cambria" pitchFamily="34" charset="0"/>
                 <a:ea typeface="Cambria" pitchFamily="34" charset="-122"/>
                 <a:cs typeface="Cambria" pitchFamily="34" charset="-120"/>
               </a:rPr>
-              <a:t>1</a:t>
-            </a:r>
-            <a:endParaRPr lang="en-US" sz="1600" dirty="0"/>
-          </a:p>
-        </p:txBody>
-      </p:sp>
-      <p:sp>
-        <p:nvSpPr>
-          <p:cNvPr id="7" name="Text 5"/>
-          <p:cNvSpPr txBox="1"/>
-          <p:nvPr/>
-        </p:nvSpPr>
-        <p:spPr>
-          <a:xfrm>
-            <a:off x="822960" y="2788920"/>
-            <a:ext cx="2087804" cy="457200"/>
+              <a:t>Western Equatoria</a:t>
+            </a:r>
+            <a:endParaRPr lang="en-US" sz="1500" dirty="0"/>
+          </a:p>
+        </p:txBody>
+      </p:sp>
+      <p:sp>
+        <p:nvSpPr>
+          <p:cNvPr id="7" name="Text 4"/>
+          <p:cNvSpPr txBox="1"/>
+          <p:nvPr/>
+        </p:nvSpPr>
+        <p:spPr>
+          <a:xfrm>
+            <a:off x="795528" y="4041648"/>
+            <a:ext cx="3070250" cy="329184"/>
           </a:xfrm>
           <a:prstGeom prst="rect">
             <a:avLst/>
@@ -4754,30 +4909,30 @@
               <a:buNone/>
             </a:pPr>
             <a:r>
-              <a:rPr lang="en-US" sz="1400" b="1" dirty="0">
-                <a:solidFill>
-                  <a:srgbClr val="1C5A73"/>
-                </a:solidFill>
-                <a:latin typeface="Cambria" pitchFamily="34" charset="0"/>
-                <a:ea typeface="Cambria" pitchFamily="34" charset="-122"/>
-                <a:cs typeface="Cambria" pitchFamily="34" charset="-120"/>
-              </a:rPr>
-              <a:t>Site assessment</a:t>
-            </a:r>
-            <a:endParaRPr lang="en-US" sz="1400" dirty="0"/>
-          </a:p>
-        </p:txBody>
-      </p:sp>
-      <p:sp>
-        <p:nvSpPr>
-          <p:cNvPr id="8" name="Text 6"/>
-          <p:cNvSpPr txBox="1"/>
-          <p:nvPr/>
-        </p:nvSpPr>
-        <p:spPr>
-          <a:xfrm>
-            <a:off x="822960" y="3291840"/>
-            <a:ext cx="2087804" cy="1234440"/>
+              <a:rPr lang="en-US" sz="1250" b="1" dirty="0">
+                <a:solidFill>
+                  <a:srgbClr val="A3701A"/>
+                </a:solidFill>
+                <a:latin typeface="Calibri" pitchFamily="34" charset="0"/>
+                <a:ea typeface="Calibri" pitchFamily="34" charset="-122"/>
+                <a:cs typeface="Calibri" pitchFamily="34" charset="-120"/>
+              </a:rPr>
+              <a:t>The Greenbelt</a:t>
+            </a:r>
+            <a:endParaRPr lang="en-US" sz="1250" dirty="0"/>
+          </a:p>
+        </p:txBody>
+      </p:sp>
+      <p:sp>
+        <p:nvSpPr>
+          <p:cNvPr id="8" name="Text 5"/>
+          <p:cNvSpPr txBox="1"/>
+          <p:nvPr/>
+        </p:nvSpPr>
+        <p:spPr>
+          <a:xfrm>
+            <a:off x="795528" y="4407408"/>
+            <a:ext cx="3070250" cy="1280160"/>
           </a:xfrm>
           <a:prstGeom prst="rect">
             <a:avLst/>
@@ -4789,14 +4944,18 @@
           <a:bodyPr wrap="square" lIns="0" tIns="0" rIns="0" bIns="0" rtlCol="0" anchor="t"/>
           <a:lstStyle/>
           <a:p>
-            <a:pPr algn="l" indent="0" marL="0">
+            <a:pPr algn="l" marL="342900" indent="-342900">
               <a:lnSpc>
-                <a:spcPct val="120000"/>
+                <a:spcPct val="116000"/>
               </a:lnSpc>
-              <a:buNone/>
-            </a:pPr>
-            <a:r>
-              <a:rPr lang="en-US" sz="1200" dirty="0">
+              <a:spcAft>
+                <a:spcPts val="700"/>
+              </a:spcAft>
+              <a:buSzPct val="100000"/>
+              <a:buChar char="•"/>
+            </a:pPr>
+            <a:r>
+              <a:rPr lang="en-US" sz="1150" dirty="0">
                 <a:solidFill>
                   <a:srgbClr val="31424A"/>
                 </a:solidFill>
@@ -4804,26 +4963,74 @@
                 <a:ea typeface="Calibri" pitchFamily="34" charset="-122"/>
                 <a:cs typeface="Calibri" pitchFamily="34" charset="-120"/>
               </a:rPr>
-              <a:t>Drainage, soil, crop and access are reviewed. No commitment at this stage.</a:t>
-            </a:r>
-            <a:endParaRPr lang="en-US" sz="1200" dirty="0"/>
-          </a:p>
-        </p:txBody>
-      </p:sp>
-      <p:sp>
-        <p:nvSpPr>
-          <p:cNvPr id="9" name="Shape 7"/>
+              <a:t>Maize, cassava, groundnut and vegetables under a long rainy season.</a:t>
+            </a:r>
+            <a:endParaRPr lang="en-US" sz="1150" dirty="0"/>
+          </a:p>
+          <a:p>
+            <a:pPr algn="l" marL="342900" indent="-342900">
+              <a:lnSpc>
+                <a:spcPct val="116000"/>
+              </a:lnSpc>
+              <a:spcAft>
+                <a:spcPts val="700"/>
+              </a:spcAft>
+              <a:buSzPct val="100000"/>
+              <a:buChar char="•"/>
+            </a:pPr>
+            <a:r>
+              <a:rPr lang="en-US" sz="1150" dirty="0">
+                <a:solidFill>
+                  <a:srgbClr val="31424A"/>
+                </a:solidFill>
+                <a:latin typeface="Calibri" pitchFamily="34" charset="0"/>
+                <a:ea typeface="Calibri" pitchFamily="34" charset="-122"/>
+                <a:cs typeface="Calibri" pitchFamily="34" charset="-120"/>
+              </a:rPr>
+              <a:t>Trials near Yambio and Nzara reached 4.7 t/ha of maize with fertiliser, against 2.9 t/ha on control plots.</a:t>
+            </a:r>
+            <a:endParaRPr lang="en-US" sz="1150" dirty="0"/>
+          </a:p>
+          <a:p>
+            <a:pPr algn="l" marL="342900" indent="-342900">
+              <a:lnSpc>
+                <a:spcPct val="116000"/>
+              </a:lnSpc>
+              <a:spcAft>
+                <a:spcPts val="700"/>
+              </a:spcAft>
+              <a:buSzPct val="100000"/>
+              <a:buChar char="•"/>
+            </a:pPr>
+            <a:r>
+              <a:rPr lang="en-US" sz="1150" dirty="0">
+                <a:solidFill>
+                  <a:srgbClr val="31424A"/>
+                </a:solidFill>
+                <a:latin typeface="Calibri" pitchFamily="34" charset="0"/>
+                <a:ea typeface="Calibri" pitchFamily="34" charset="-122"/>
+                <a:cs typeface="Calibri" pitchFamily="34" charset="-120"/>
+              </a:rPr>
+              <a:t>Better access and security than most regions for a monitored pilot.</a:t>
+            </a:r>
+            <a:endParaRPr lang="en-US" sz="1150" dirty="0"/>
+          </a:p>
+        </p:txBody>
+      </p:sp>
+      <p:sp>
+        <p:nvSpPr>
+          <p:cNvPr id="9" name="Shape 6"/>
           <p:cNvSpPr/>
           <p:nvPr/>
         </p:nvSpPr>
         <p:spPr>
           <a:xfrm>
-            <a:off x="3413684" y="1874520"/>
-            <a:ext cx="2545004" cy="2834640"/>
+            <a:off x="4359554" y="1783080"/>
+            <a:ext cx="3472586" cy="4069080"/>
           </a:xfrm>
           <a:prstGeom prst="roundRect">
             <a:avLst>
-              <a:gd name="adj" fmla="val 3593"/>
+              <a:gd name="adj" fmla="val 2633"/>
             </a:avLst>
           </a:prstGeom>
           <a:solidFill>
@@ -4837,36 +5044,40 @@
           </a:ln>
         </p:spPr>
       </p:sp>
-      <p:sp>
-        <p:nvSpPr>
-          <p:cNvPr id="10" name="Shape 8"/>
-          <p:cNvSpPr/>
-          <p:nvPr/>
-        </p:nvSpPr>
-        <p:spPr>
-          <a:xfrm>
-            <a:off x="3642284" y="2103120"/>
-            <a:ext cx="566928" cy="566928"/>
-          </a:xfrm>
-          <a:prstGeom prst="ellipse">
-            <a:avLst/>
-          </a:prstGeom>
-          <a:solidFill>
-            <a:srgbClr val="1C5A73"/>
-          </a:solidFill>
-          <a:ln/>
-        </p:spPr>
-      </p:sp>
-      <p:sp>
-        <p:nvSpPr>
-          <p:cNvPr id="11" name="Text 9"/>
-          <p:cNvSpPr txBox="1"/>
-          <p:nvPr/>
-        </p:nvSpPr>
-        <p:spPr>
-          <a:xfrm>
-            <a:off x="3642284" y="2103120"/>
-            <a:ext cx="566928" cy="566928"/>
+      <p:pic>
+        <p:nvPicPr>
+          <p:cNvPr id="10" name="Image 1" descr="preencoded.png">    </p:cNvPr>
+          <p:cNvPicPr>
+            <a:picLocks noChangeAspect="1"/>
+          </p:cNvPicPr>
+          <p:nvPr/>
+        </p:nvPicPr>
+        <p:blipFill>
+          <a:blip r:embed="rId2"/>
+          <a:stretch>
+            <a:fillRect/>
+          </a:stretch>
+        </p:blipFill>
+        <p:spPr>
+          <a:xfrm>
+            <a:off x="4359554" y="1783080"/>
+            <a:ext cx="3472586" cy="1691640"/>
+          </a:xfrm>
+          <a:prstGeom prst="rect">
+            <a:avLst/>
+          </a:prstGeom>
+        </p:spPr>
+      </p:pic>
+      <p:sp>
+        <p:nvSpPr>
+          <p:cNvPr id="11" name="Text 7"/>
+          <p:cNvSpPr txBox="1"/>
+          <p:nvPr/>
+        </p:nvSpPr>
+        <p:spPr>
+          <a:xfrm>
+            <a:off x="4560722" y="3639312"/>
+            <a:ext cx="3070250" cy="384048"/>
           </a:xfrm>
           <a:prstGeom prst="rect">
             <a:avLst/>
@@ -4878,34 +5089,34 @@
           <a:bodyPr wrap="square" lIns="0" tIns="0" rIns="0" bIns="0" rtlCol="0" anchor="ctr"/>
           <a:lstStyle/>
           <a:p>
-            <a:pPr algn="ctr" indent="0" marL="0">
-              <a:buNone/>
-            </a:pPr>
-            <a:r>
-              <a:rPr lang="en-US" sz="1600" b="1" dirty="0">
-                <a:solidFill>
-                  <a:srgbClr val="FFFFFF"/>
+            <a:pPr algn="l" indent="0" marL="0">
+              <a:buNone/>
+            </a:pPr>
+            <a:r>
+              <a:rPr lang="en-US" sz="1500" b="1" dirty="0">
+                <a:solidFill>
+                  <a:srgbClr val="1C5A73"/>
                 </a:solidFill>
                 <a:latin typeface="Cambria" pitchFamily="34" charset="0"/>
                 <a:ea typeface="Cambria" pitchFamily="34" charset="-122"/>
                 <a:cs typeface="Cambria" pitchFamily="34" charset="-120"/>
               </a:rPr>
-              <a:t>2</a:t>
-            </a:r>
-            <a:endParaRPr lang="en-US" sz="1600" dirty="0"/>
-          </a:p>
-        </p:txBody>
-      </p:sp>
-      <p:sp>
-        <p:nvSpPr>
-          <p:cNvPr id="12" name="Text 10"/>
-          <p:cNvSpPr txBox="1"/>
-          <p:nvPr/>
-        </p:nvSpPr>
-        <p:spPr>
-          <a:xfrm>
-            <a:off x="3642284" y="2788920"/>
-            <a:ext cx="2087804" cy="457200"/>
+              <a:t>Central Equatoria — Juba</a:t>
+            </a:r>
+            <a:endParaRPr lang="en-US" sz="1500" dirty="0"/>
+          </a:p>
+        </p:txBody>
+      </p:sp>
+      <p:sp>
+        <p:nvSpPr>
+          <p:cNvPr id="12" name="Text 8"/>
+          <p:cNvSpPr txBox="1"/>
+          <p:nvPr/>
+        </p:nvSpPr>
+        <p:spPr>
+          <a:xfrm>
+            <a:off x="4560722" y="4041648"/>
+            <a:ext cx="3070250" cy="329184"/>
           </a:xfrm>
           <a:prstGeom prst="rect">
             <a:avLst/>
@@ -4921,30 +5132,30 @@
               <a:buNone/>
             </a:pPr>
             <a:r>
-              <a:rPr lang="en-US" sz="1400" b="1" dirty="0">
-                <a:solidFill>
-                  <a:srgbClr val="1C5A73"/>
-                </a:solidFill>
-                <a:latin typeface="Cambria" pitchFamily="34" charset="0"/>
-                <a:ea typeface="Cambria" pitchFamily="34" charset="-122"/>
-                <a:cs typeface="Cambria" pitchFamily="34" charset="-120"/>
-              </a:rPr>
-              <a:t>Trial plot</a:t>
-            </a:r>
-            <a:endParaRPr lang="en-US" sz="1400" dirty="0"/>
-          </a:p>
-        </p:txBody>
-      </p:sp>
-      <p:sp>
-        <p:nvSpPr>
-          <p:cNvPr id="13" name="Text 11"/>
-          <p:cNvSpPr txBox="1"/>
-          <p:nvPr/>
-        </p:nvSpPr>
-        <p:spPr>
-          <a:xfrm>
-            <a:off x="3642284" y="3291840"/>
-            <a:ext cx="2087804" cy="1234440"/>
+              <a:rPr lang="en-US" sz="1250" b="1" dirty="0">
+                <a:solidFill>
+                  <a:srgbClr val="A3701A"/>
+                </a:solidFill>
+                <a:latin typeface="Calibri" pitchFamily="34" charset="0"/>
+                <a:ea typeface="Calibri" pitchFamily="34" charset="-122"/>
+                <a:cs typeface="Calibri" pitchFamily="34" charset="-120"/>
+              </a:rPr>
+              <a:t>Peri-urban vegetables</a:t>
+            </a:r>
+            <a:endParaRPr lang="en-US" sz="1250" dirty="0"/>
+          </a:p>
+        </p:txBody>
+      </p:sp>
+      <p:sp>
+        <p:nvSpPr>
+          <p:cNvPr id="13" name="Text 9"/>
+          <p:cNvSpPr txBox="1"/>
+          <p:nvPr/>
+        </p:nvSpPr>
+        <p:spPr>
+          <a:xfrm>
+            <a:off x="4560722" y="4407408"/>
+            <a:ext cx="3070250" cy="1280160"/>
           </a:xfrm>
           <a:prstGeom prst="rect">
             <a:avLst/>
@@ -4956,14 +5167,18 @@
           <a:bodyPr wrap="square" lIns="0" tIns="0" rIns="0" bIns="0" rtlCol="0" anchor="t"/>
           <a:lstStyle/>
           <a:p>
-            <a:pPr algn="l" indent="0" marL="0">
+            <a:pPr algn="l" marL="342900" indent="-342900">
               <a:lnSpc>
-                <a:spcPct val="120000"/>
+                <a:spcPct val="116000"/>
               </a:lnSpc>
-              <a:buNone/>
-            </a:pPr>
-            <a:r>
-              <a:rPr lang="en-US" sz="1200" dirty="0">
+              <a:spcAft>
+                <a:spcPts val="700"/>
+              </a:spcAft>
+              <a:buSzPct val="100000"/>
+              <a:buChar char="•"/>
+            </a:pPr>
+            <a:r>
+              <a:rPr lang="en-US" sz="1150" dirty="0">
                 <a:solidFill>
                   <a:srgbClr val="31424A"/>
                 </a:solidFill>
@@ -4971,26 +5186,74 @@
                 <a:ea typeface="Calibri" pitchFamily="34" charset="-122"/>
                 <a:cs typeface="Calibri" pitchFamily="34" charset="-120"/>
               </a:rPr>
-              <a:t>One comparative plot on drained land, against a control plot managed identically.</a:t>
-            </a:r>
-            <a:endParaRPr lang="en-US" sz="1200" dirty="0"/>
-          </a:p>
-        </p:txBody>
-      </p:sp>
-      <p:sp>
-        <p:nvSpPr>
-          <p:cNvPr id="14" name="Shape 12"/>
+              <a:t>Tomato, onion, okra and leafy vegetables for a city that imports much of its food.</a:t>
+            </a:r>
+            <a:endParaRPr lang="en-US" sz="1150" dirty="0"/>
+          </a:p>
+          <a:p>
+            <a:pPr algn="l" marL="342900" indent="-342900">
+              <a:lnSpc>
+                <a:spcPct val="116000"/>
+              </a:lnSpc>
+              <a:spcAft>
+                <a:spcPts val="700"/>
+              </a:spcAft>
+              <a:buSzPct val="100000"/>
+              <a:buChar char="•"/>
+            </a:pPr>
+            <a:r>
+              <a:rPr lang="en-US" sz="1150" dirty="0">
+                <a:solidFill>
+                  <a:srgbClr val="31424A"/>
+                </a:solidFill>
+                <a:latin typeface="Calibri" pitchFamily="34" charset="0"/>
+                <a:ea typeface="Calibri" pitchFamily="34" charset="-122"/>
+                <a:cs typeface="Calibri" pitchFamily="34" charset="-120"/>
+              </a:rPr>
+              <a:t>Hand watering and dry-season irrigation from wells and the Nile.</a:t>
+            </a:r>
+            <a:endParaRPr lang="en-US" sz="1150" dirty="0"/>
+          </a:p>
+          <a:p>
+            <a:pPr algn="l" marL="342900" indent="-342900">
+              <a:lnSpc>
+                <a:spcPct val="116000"/>
+              </a:lnSpc>
+              <a:spcAft>
+                <a:spcPts val="700"/>
+              </a:spcAft>
+              <a:buSzPct val="100000"/>
+              <a:buChar char="•"/>
+            </a:pPr>
+            <a:r>
+              <a:rPr lang="en-US" sz="1150" dirty="0">
+                <a:solidFill>
+                  <a:srgbClr val="31424A"/>
+                </a:solidFill>
+                <a:latin typeface="Calibri" pitchFamily="34" charset="0"/>
+                <a:ea typeface="Calibri" pitchFamily="34" charset="-122"/>
+                <a:cs typeface="Calibri" pitchFamily="34" charset="-120"/>
+              </a:rPr>
+              <a:t>Short cycles and a cash market: a trial shows results in one season.</a:t>
+            </a:r>
+            <a:endParaRPr lang="en-US" sz="1150" dirty="0"/>
+          </a:p>
+        </p:txBody>
+      </p:sp>
+      <p:sp>
+        <p:nvSpPr>
+          <p:cNvPr id="14" name="Shape 10"/>
           <p:cNvSpPr/>
           <p:nvPr/>
         </p:nvSpPr>
         <p:spPr>
           <a:xfrm>
-            <a:off x="6233008" y="1874520"/>
-            <a:ext cx="2545004" cy="2834640"/>
+            <a:off x="8124749" y="1783080"/>
+            <a:ext cx="3472586" cy="4069080"/>
           </a:xfrm>
           <a:prstGeom prst="roundRect">
             <a:avLst>
-              <a:gd name="adj" fmla="val 3593"/>
+              <a:gd name="adj" fmla="val 2633"/>
             </a:avLst>
           </a:prstGeom>
           <a:solidFill>
@@ -5004,36 +5267,40 @@
           </a:ln>
         </p:spPr>
       </p:sp>
-      <p:sp>
-        <p:nvSpPr>
-          <p:cNvPr id="15" name="Shape 13"/>
-          <p:cNvSpPr/>
-          <p:nvPr/>
-        </p:nvSpPr>
-        <p:spPr>
-          <a:xfrm>
-            <a:off x="6461608" y="2103120"/>
-            <a:ext cx="566928" cy="566928"/>
-          </a:xfrm>
-          <a:prstGeom prst="ellipse">
-            <a:avLst/>
-          </a:prstGeom>
-          <a:solidFill>
-            <a:srgbClr val="1C5A73"/>
-          </a:solidFill>
-          <a:ln/>
-        </p:spPr>
-      </p:sp>
-      <p:sp>
-        <p:nvSpPr>
-          <p:cNvPr id="16" name="Text 14"/>
-          <p:cNvSpPr txBox="1"/>
-          <p:nvPr/>
-        </p:nvSpPr>
-        <p:spPr>
-          <a:xfrm>
-            <a:off x="6461608" y="2103120"/>
-            <a:ext cx="566928" cy="566928"/>
+      <p:pic>
+        <p:nvPicPr>
+          <p:cNvPr id="15" name="Image 2" descr="preencoded.png">    </p:cNvPr>
+          <p:cNvPicPr>
+            <a:picLocks noChangeAspect="1"/>
+          </p:cNvPicPr>
+          <p:nvPr/>
+        </p:nvPicPr>
+        <p:blipFill>
+          <a:blip r:embed="rId3"/>
+          <a:stretch>
+            <a:fillRect/>
+          </a:stretch>
+        </p:blipFill>
+        <p:spPr>
+          <a:xfrm>
+            <a:off x="8124749" y="1783080"/>
+            <a:ext cx="3472586" cy="1691640"/>
+          </a:xfrm>
+          <a:prstGeom prst="rect">
+            <a:avLst/>
+          </a:prstGeom>
+        </p:spPr>
+      </p:pic>
+      <p:sp>
+        <p:nvSpPr>
+          <p:cNvPr id="16" name="Text 11"/>
+          <p:cNvSpPr txBox="1"/>
+          <p:nvPr/>
+        </p:nvSpPr>
+        <p:spPr>
+          <a:xfrm>
+            <a:off x="8325917" y="3639312"/>
+            <a:ext cx="3070250" cy="384048"/>
           </a:xfrm>
           <a:prstGeom prst="rect">
             <a:avLst/>
@@ -5045,34 +5312,34 @@
           <a:bodyPr wrap="square" lIns="0" tIns="0" rIns="0" bIns="0" rtlCol="0" anchor="ctr"/>
           <a:lstStyle/>
           <a:p>
-            <a:pPr algn="ctr" indent="0" marL="0">
-              <a:buNone/>
-            </a:pPr>
-            <a:r>
-              <a:rPr lang="en-US" sz="1600" b="1" dirty="0">
-                <a:solidFill>
-                  <a:srgbClr val="FFFFFF"/>
+            <a:pPr algn="l" indent="0" marL="0">
+              <a:buNone/>
+            </a:pPr>
+            <a:r>
+              <a:rPr lang="en-US" sz="1500" b="1" dirty="0">
+                <a:solidFill>
+                  <a:srgbClr val="1C5A73"/>
                 </a:solidFill>
                 <a:latin typeface="Cambria" pitchFamily="34" charset="0"/>
                 <a:ea typeface="Cambria" pitchFamily="34" charset="-122"/>
                 <a:cs typeface="Cambria" pitchFamily="34" charset="-120"/>
               </a:rPr>
-              <a:t>3</a:t>
-            </a:r>
-            <a:endParaRPr lang="en-US" sz="1600" dirty="0"/>
-          </a:p>
-        </p:txBody>
-      </p:sp>
-      <p:sp>
-        <p:nvSpPr>
-          <p:cNvPr id="17" name="Text 15"/>
-          <p:cNvSpPr txBox="1"/>
-          <p:nvPr/>
-        </p:nvSpPr>
-        <p:spPr>
-          <a:xfrm>
-            <a:off x="6461608" y="2788920"/>
-            <a:ext cx="2087804" cy="457200"/>
+              <a:t>Northern Bahr el Ghazal</a:t>
+            </a:r>
+            <a:endParaRPr lang="en-US" sz="1500" dirty="0"/>
+          </a:p>
+        </p:txBody>
+      </p:sp>
+      <p:sp>
+        <p:nvSpPr>
+          <p:cNvPr id="17" name="Text 12"/>
+          <p:cNvSpPr txBox="1"/>
+          <p:nvPr/>
+        </p:nvSpPr>
+        <p:spPr>
+          <a:xfrm>
+            <a:off x="8325917" y="4041648"/>
+            <a:ext cx="3070250" cy="329184"/>
           </a:xfrm>
           <a:prstGeom prst="rect">
             <a:avLst/>
@@ -5088,30 +5355,30 @@
               <a:buNone/>
             </a:pPr>
             <a:r>
-              <a:rPr lang="en-US" sz="1400" b="1" dirty="0">
-                <a:solidFill>
-                  <a:srgbClr val="1C5A73"/>
-                </a:solidFill>
-                <a:latin typeface="Cambria" pitchFamily="34" charset="0"/>
-                <a:ea typeface="Cambria" pitchFamily="34" charset="-122"/>
-                <a:cs typeface="Cambria" pitchFamily="34" charset="-120"/>
-              </a:rPr>
-              <a:t>Measurement</a:t>
-            </a:r>
-            <a:endParaRPr lang="en-US" sz="1400" dirty="0"/>
-          </a:p>
-        </p:txBody>
-      </p:sp>
-      <p:sp>
-        <p:nvSpPr>
-          <p:cNvPr id="18" name="Text 16"/>
-          <p:cNvSpPr txBox="1"/>
-          <p:nvPr/>
-        </p:nvSpPr>
-        <p:spPr>
-          <a:xfrm>
-            <a:off x="6461608" y="3291840"/>
-            <a:ext cx="2087804" cy="1234440"/>
+              <a:rPr lang="en-US" sz="1250" b="1" dirty="0">
+                <a:solidFill>
+                  <a:srgbClr val="A3701A"/>
+                </a:solidFill>
+                <a:latin typeface="Calibri" pitchFamily="34" charset="0"/>
+                <a:ea typeface="Calibri" pitchFamily="34" charset="-122"/>
+                <a:cs typeface="Calibri" pitchFamily="34" charset="-120"/>
+              </a:rPr>
+              <a:t>Sorghum and rice</a:t>
+            </a:r>
+            <a:endParaRPr lang="en-US" sz="1250" dirty="0"/>
+          </a:p>
+        </p:txBody>
+      </p:sp>
+      <p:sp>
+        <p:nvSpPr>
+          <p:cNvPr id="18" name="Text 13"/>
+          <p:cNvSpPr txBox="1"/>
+          <p:nvPr/>
+        </p:nvSpPr>
+        <p:spPr>
+          <a:xfrm>
+            <a:off x="8325917" y="4407408"/>
+            <a:ext cx="3070250" cy="1280160"/>
           </a:xfrm>
           <a:prstGeom prst="rect">
             <a:avLst/>
@@ -5123,14 +5390,18 @@
           <a:bodyPr wrap="square" lIns="0" tIns="0" rIns="0" bIns="0" rtlCol="0" anchor="t"/>
           <a:lstStyle/>
           <a:p>
-            <a:pPr algn="l" indent="0" marL="0">
+            <a:pPr algn="l" marL="342900" indent="-342900">
               <a:lnSpc>
-                <a:spcPct val="120000"/>
+                <a:spcPct val="116000"/>
               </a:lnSpc>
-              <a:buNone/>
-            </a:pPr>
-            <a:r>
-              <a:rPr lang="en-US" sz="1200" dirty="0">
+              <a:spcAft>
+                <a:spcPts val="700"/>
+              </a:spcAft>
+              <a:buSzPct val="100000"/>
+              <a:buChar char="•"/>
+            </a:pPr>
+            <a:r>
+              <a:rPr lang="en-US" sz="1150" dirty="0">
                 <a:solidFill>
                   <a:srgbClr val="31424A"/>
                 </a:solidFill>
@@ -5138,166 +5409,23 @@
                 <a:ea typeface="Calibri" pitchFamily="34" charset="-122"/>
                 <a:cs typeface="Calibri" pitchFamily="34" charset="-120"/>
               </a:rPr>
-              <a:t>Emergence, water use and yield recorded over a full season.</a:t>
-            </a:r>
-            <a:endParaRPr lang="en-US" sz="1200" dirty="0"/>
-          </a:p>
-        </p:txBody>
-      </p:sp>
-      <p:sp>
-        <p:nvSpPr>
-          <p:cNvPr id="19" name="Shape 17"/>
-          <p:cNvSpPr/>
-          <p:nvPr/>
-        </p:nvSpPr>
-        <p:spPr>
-          <a:xfrm>
-            <a:off x="9052331" y="1874520"/>
-            <a:ext cx="2545004" cy="2834640"/>
-          </a:xfrm>
-          <a:prstGeom prst="roundRect">
-            <a:avLst>
-              <a:gd name="adj" fmla="val 3593"/>
-            </a:avLst>
-          </a:prstGeom>
-          <a:solidFill>
-            <a:srgbClr val="EDF3F5"/>
-          </a:solidFill>
-          <a:ln w="9525">
-            <a:solidFill>
-              <a:srgbClr val="D6E2E7"/>
-            </a:solidFill>
-            <a:prstDash val="solid"/>
-          </a:ln>
-        </p:spPr>
-      </p:sp>
-      <p:sp>
-        <p:nvSpPr>
-          <p:cNvPr id="20" name="Shape 18"/>
-          <p:cNvSpPr/>
-          <p:nvPr/>
-        </p:nvSpPr>
-        <p:spPr>
-          <a:xfrm>
-            <a:off x="9280931" y="2103120"/>
-            <a:ext cx="566928" cy="566928"/>
-          </a:xfrm>
-          <a:prstGeom prst="ellipse">
-            <a:avLst/>
-          </a:prstGeom>
-          <a:solidFill>
-            <a:srgbClr val="1C5A73"/>
-          </a:solidFill>
-          <a:ln/>
-        </p:spPr>
-      </p:sp>
-      <p:sp>
-        <p:nvSpPr>
-          <p:cNvPr id="21" name="Text 19"/>
-          <p:cNvSpPr txBox="1"/>
-          <p:nvPr/>
-        </p:nvSpPr>
-        <p:spPr>
-          <a:xfrm>
-            <a:off x="9280931" y="2103120"/>
-            <a:ext cx="566928" cy="566928"/>
-          </a:xfrm>
-          <a:prstGeom prst="rect">
-            <a:avLst/>
-          </a:prstGeom>
-          <a:noFill/>
-          <a:ln/>
-        </p:spPr>
-        <p:txBody>
-          <a:bodyPr wrap="square" lIns="0" tIns="0" rIns="0" bIns="0" rtlCol="0" anchor="ctr"/>
-          <a:lstStyle/>
-          <a:p>
-            <a:pPr algn="ctr" indent="0" marL="0">
-              <a:buNone/>
-            </a:pPr>
-            <a:r>
-              <a:rPr lang="en-US" sz="1600" b="1" dirty="0">
-                <a:solidFill>
-                  <a:srgbClr val="FFFFFF"/>
-                </a:solidFill>
-                <a:latin typeface="Cambria" pitchFamily="34" charset="0"/>
-                <a:ea typeface="Cambria" pitchFamily="34" charset="-122"/>
-                <a:cs typeface="Cambria" pitchFamily="34" charset="-120"/>
-              </a:rPr>
-              <a:t>4</a:t>
-            </a:r>
-            <a:endParaRPr lang="en-US" sz="1600" dirty="0"/>
-          </a:p>
-        </p:txBody>
-      </p:sp>
-      <p:sp>
-        <p:nvSpPr>
-          <p:cNvPr id="22" name="Text 20"/>
-          <p:cNvSpPr txBox="1"/>
-          <p:nvPr/>
-        </p:nvSpPr>
-        <p:spPr>
-          <a:xfrm>
-            <a:off x="9280931" y="2788920"/>
-            <a:ext cx="2087804" cy="457200"/>
-          </a:xfrm>
-          <a:prstGeom prst="rect">
-            <a:avLst/>
-          </a:prstGeom>
-          <a:noFill/>
-          <a:ln/>
-        </p:spPr>
-        <p:txBody>
-          <a:bodyPr wrap="square" lIns="0" tIns="0" rIns="0" bIns="0" rtlCol="0" anchor="ctr"/>
-          <a:lstStyle/>
-          <a:p>
-            <a:pPr algn="l" indent="0" marL="0">
-              <a:buNone/>
-            </a:pPr>
-            <a:r>
-              <a:rPr lang="en-US" sz="1400" b="1" dirty="0">
-                <a:solidFill>
-                  <a:srgbClr val="1C5A73"/>
-                </a:solidFill>
-                <a:latin typeface="Cambria" pitchFamily="34" charset="0"/>
-                <a:ea typeface="Cambria" pitchFamily="34" charset="-122"/>
-                <a:cs typeface="Cambria" pitchFamily="34" charset="-120"/>
-              </a:rPr>
-              <a:t>Extension</a:t>
-            </a:r>
-            <a:endParaRPr lang="en-US" sz="1400" dirty="0"/>
-          </a:p>
-        </p:txBody>
-      </p:sp>
-      <p:sp>
-        <p:nvSpPr>
-          <p:cNvPr id="23" name="Text 21"/>
-          <p:cNvSpPr txBox="1"/>
-          <p:nvPr/>
-        </p:nvSpPr>
-        <p:spPr>
-          <a:xfrm>
-            <a:off x="9280931" y="3291840"/>
-            <a:ext cx="2087804" cy="1234440"/>
-          </a:xfrm>
-          <a:prstGeom prst="rect">
-            <a:avLst/>
-          </a:prstGeom>
-          <a:noFill/>
-          <a:ln/>
-        </p:spPr>
-        <p:txBody>
-          <a:bodyPr wrap="square" lIns="0" tIns="0" rIns="0" bIns="0" rtlCol="0" anchor="t"/>
-          <a:lstStyle/>
-          <a:p>
-            <a:pPr algn="l" indent="0" marL="0">
+              <a:t>Rain-fed sorghum, and irrigated rice on the Aweil scheme.</a:t>
+            </a:r>
+            <a:endParaRPr lang="en-US" sz="1150" dirty="0"/>
+          </a:p>
+          <a:p>
+            <a:pPr algn="l" marL="342900" indent="-342900">
               <a:lnSpc>
-                <a:spcPct val="120000"/>
+                <a:spcPct val="116000"/>
               </a:lnSpc>
-              <a:buNone/>
-            </a:pPr>
-            <a:r>
-              <a:rPr lang="en-US" sz="1200" dirty="0">
+              <a:spcAft>
+                <a:spcPts val="700"/>
+              </a:spcAft>
+              <a:buSzPct val="100000"/>
+              <a:buChar char="•"/>
+            </a:pPr>
+            <a:r>
+              <a:rPr lang="en-US" sz="1150" dirty="0">
                 <a:solidFill>
                   <a:srgbClr val="31424A"/>
                 </a:solidFill>
@@ -5305,57 +5433,39 @@
                 <a:ea typeface="Calibri" pitchFamily="34" charset="-122"/>
                 <a:cs typeface="Calibri" pitchFamily="34" charset="-120"/>
               </a:rPr>
-              <a:t>Gradual rollout to other plots and sites, on the basis of what was measured.</a:t>
-            </a:r>
-            <a:endParaRPr lang="en-US" sz="1200" dirty="0"/>
-          </a:p>
-        </p:txBody>
-      </p:sp>
-      <p:sp>
-        <p:nvSpPr>
-          <p:cNvPr id="24" name="Text 22"/>
-          <p:cNvSpPr txBox="1"/>
-          <p:nvPr/>
-        </p:nvSpPr>
-        <p:spPr>
-          <a:xfrm>
-            <a:off x="594360" y="4983480"/>
-            <a:ext cx="11002975" cy="822960"/>
-          </a:xfrm>
-          <a:prstGeom prst="rect">
-            <a:avLst/>
-          </a:prstGeom>
-          <a:noFill/>
-          <a:ln/>
-        </p:spPr>
-        <p:txBody>
-          <a:bodyPr wrap="square" lIns="0" tIns="0" rIns="0" bIns="0" rtlCol="0" anchor="t"/>
-          <a:lstStyle/>
-          <a:p>
-            <a:pPr algn="l" indent="0" marL="0">
+              <a:t>Dry spells early in the season, floods late: plots must be selected with care.</a:t>
+            </a:r>
+            <a:endParaRPr lang="en-US" sz="1150" dirty="0"/>
+          </a:p>
+          <a:p>
+            <a:pPr algn="l" marL="342900" indent="-342900">
               <a:lnSpc>
-                <a:spcPct val="125000"/>
+                <a:spcPct val="116000"/>
               </a:lnSpc>
-              <a:buNone/>
-            </a:pPr>
-            <a:r>
-              <a:rPr lang="en-US" sz="1250" i="1" dirty="0">
-                <a:solidFill>
-                  <a:srgbClr val="6C8089"/>
-                </a:solidFill>
-                <a:latin typeface="Calibri" pitchFamily="34" charset="0"/>
-                <a:ea typeface="Calibri" pitchFamily="34" charset="-122"/>
-                <a:cs typeface="Calibri" pitchFamily="34" charset="-120"/>
-              </a:rPr>
-              <a:t>The dosing rule is the same everywhere: 3 grams per litre of useful soil. What changes from one site to the next is the volume of soil the roots actually explore.</a:t>
-            </a:r>
-            <a:endParaRPr lang="en-US" sz="1250" dirty="0"/>
-          </a:p>
-        </p:txBody>
-      </p:sp>
-      <p:sp>
-        <p:nvSpPr>
-          <p:cNvPr id="25" name="Text 23"/>
+              <a:spcAft>
+                <a:spcPts val="700"/>
+              </a:spcAft>
+              <a:buSzPct val="100000"/>
+              <a:buChar char="•"/>
+            </a:pPr>
+            <a:r>
+              <a:rPr lang="en-US" sz="1150" dirty="0">
+                <a:solidFill>
+                  <a:srgbClr val="31424A"/>
+                </a:solidFill>
+                <a:latin typeface="Calibri" pitchFamily="34" charset="0"/>
+                <a:ea typeface="Calibri" pitchFamily="34" charset="-122"/>
+                <a:cs typeface="Calibri" pitchFamily="34" charset="-120"/>
+              </a:rPr>
+              <a:t>Farmer groups already supported by FAO and NGO programmes.</a:t>
+            </a:r>
+            <a:endParaRPr lang="en-US" sz="1150" dirty="0"/>
+          </a:p>
+        </p:txBody>
+      </p:sp>
+      <p:sp>
+        <p:nvSpPr>
+          <p:cNvPr id="19" name="Text 14"/>
           <p:cNvSpPr txBox="1"/>
           <p:nvPr/>
         </p:nvSpPr>
@@ -5396,7 +5506,7 @@
       </p:sp>
       <p:sp>
         <p:nvSpPr>
-          <p:cNvPr id="26" name="Text 24"/>
+          <p:cNvPr id="20" name="Text 15"/>
           <p:cNvSpPr txBox="1"/>
           <p:nvPr/>
         </p:nvSpPr>
@@ -5500,7 +5610,7 @@
                 <a:ea typeface="Calibri" pitchFamily="34" charset="-122"/>
                 <a:cs typeface="Calibri" pitchFamily="34" charset="-120"/>
               </a:rPr>
-              <a:t>WHAT TO ANTICIPATE</a:t>
+              <a:t>HOW WE WORK</a:t>
             </a:r>
             <a:endParaRPr lang="en-US" sz="1150" dirty="0"/>
           </a:p>
@@ -5539,7 +5649,7 @@
                 <a:ea typeface="Cambria" pitchFamily="34" charset="-122"/>
                 <a:cs typeface="Cambria" pitchFamily="34" charset="-120"/>
               </a:rPr>
-              <a:t>Identified risks and our answers</a:t>
+              <a:t>A staged rollout, measured at every step</a:t>
             </a:r>
             <a:endParaRPr lang="en-US" sz="3000" dirty="0"/>
           </a:p>
@@ -5547,332 +5657,18 @@
       </p:sp>
       <p:sp>
         <p:nvSpPr>
-          <p:cNvPr id="4" name="Text 2"/>
-          <p:cNvSpPr txBox="1"/>
-          <p:nvPr/>
-        </p:nvSpPr>
-        <p:spPr>
-          <a:xfrm>
-            <a:off x="594360" y="1783080"/>
-            <a:ext cx="5227168" cy="411480"/>
-          </a:xfrm>
-          <a:prstGeom prst="rect">
-            <a:avLst/>
-          </a:prstGeom>
-          <a:noFill/>
-          <a:ln/>
-        </p:spPr>
-        <p:txBody>
-          <a:bodyPr wrap="square" lIns="0" tIns="0" rIns="0" bIns="0" rtlCol="0" anchor="ctr"/>
-          <a:lstStyle/>
-          <a:p>
-            <a:pPr algn="l" indent="0" marL="0">
-              <a:buNone/>
-            </a:pPr>
-            <a:r>
-              <a:rPr lang="en-US" sz="1600" b="1" dirty="0">
-                <a:solidFill>
-                  <a:srgbClr val="1C5A73"/>
-                </a:solidFill>
-                <a:latin typeface="Cambria" pitchFamily="34" charset="0"/>
-                <a:ea typeface="Cambria" pitchFamily="34" charset="-122"/>
-                <a:cs typeface="Cambria" pitchFamily="34" charset="-120"/>
-              </a:rPr>
-              <a:t>Risks</a:t>
-            </a:r>
-            <a:endParaRPr lang="en-US" sz="1600" dirty="0"/>
-          </a:p>
-        </p:txBody>
-      </p:sp>
-      <p:sp>
-        <p:nvSpPr>
-          <p:cNvPr id="5" name="Text 3"/>
-          <p:cNvSpPr txBox="1"/>
-          <p:nvPr/>
-        </p:nvSpPr>
-        <p:spPr>
-          <a:xfrm>
-            <a:off x="594360" y="2286000"/>
-            <a:ext cx="5227168" cy="2468880"/>
-          </a:xfrm>
-          <a:prstGeom prst="rect">
-            <a:avLst/>
-          </a:prstGeom>
-          <a:noFill/>
-          <a:ln/>
-        </p:spPr>
-        <p:txBody>
-          <a:bodyPr wrap="square" lIns="0" tIns="0" rIns="0" bIns="0" rtlCol="0" anchor="t"/>
-          <a:lstStyle/>
-          <a:p>
-            <a:pPr algn="l" marL="342900" indent="-342900">
-              <a:lnSpc>
-                <a:spcPct val="122000"/>
-              </a:lnSpc>
-              <a:spcAft>
-                <a:spcPts val="1000"/>
-              </a:spcAft>
-              <a:buSzPct val="100000"/>
-              <a:buChar char="•"/>
-            </a:pPr>
-            <a:r>
-              <a:rPr lang="en-US" sz="1350" dirty="0">
-                <a:solidFill>
-                  <a:srgbClr val="31424A"/>
-                </a:solidFill>
-                <a:latin typeface="Calibri" pitchFamily="34" charset="0"/>
-                <a:ea typeface="Calibri" pitchFamily="34" charset="-122"/>
-                <a:cs typeface="Calibri" pitchFamily="34" charset="-120"/>
-              </a:rPr>
-              <a:t>Insecurity and poor roads, which limit access to trial sites and raise transport costs.</a:t>
-            </a:r>
-            <a:endParaRPr lang="en-US" sz="1350" dirty="0"/>
-          </a:p>
-          <a:p>
-            <a:pPr algn="l" marL="342900" indent="-342900">
-              <a:lnSpc>
-                <a:spcPct val="122000"/>
-              </a:lnSpc>
-              <a:spcAft>
-                <a:spcPts val="1000"/>
-              </a:spcAft>
-              <a:buSzPct val="100000"/>
-              <a:buChar char="•"/>
-            </a:pPr>
-            <a:r>
-              <a:rPr lang="en-US" sz="1350" dirty="0">
-                <a:solidFill>
-                  <a:srgbClr val="31424A"/>
-                </a:solidFill>
-                <a:latin typeface="Calibri" pitchFamily="34" charset="0"/>
-                <a:ea typeface="Calibri" pitchFamily="34" charset="-122"/>
-                <a:cs typeface="Calibri" pitchFamily="34" charset="-120"/>
-              </a:rPr>
-              <a:t>Flooding: waterlogged land gains nothing from water retention.</a:t>
-            </a:r>
-            <a:endParaRPr lang="en-US" sz="1350" dirty="0"/>
-          </a:p>
-          <a:p>
-            <a:pPr algn="l" marL="342900" indent="-342900">
-              <a:lnSpc>
-                <a:spcPct val="122000"/>
-              </a:lnSpc>
-              <a:spcAft>
-                <a:spcPts val="1000"/>
-              </a:spcAft>
-              <a:buSzPct val="100000"/>
-              <a:buChar char="•"/>
-            </a:pPr>
-            <a:r>
-              <a:rPr lang="en-US" sz="1350" dirty="0">
-                <a:solidFill>
-                  <a:srgbClr val="31424A"/>
-                </a:solidFill>
-                <a:latin typeface="Calibri" pitchFamily="34" charset="0"/>
-                <a:ea typeface="Calibri" pitchFamily="34" charset="-122"/>
-                <a:cs typeface="Calibri" pitchFamily="34" charset="-120"/>
-              </a:rPr>
-              <a:t>Very little cash among smallholders, and dependence on donor-funded programmes.</a:t>
-            </a:r>
-            <a:endParaRPr lang="en-US" sz="1350" dirty="0"/>
-          </a:p>
-          <a:p>
-            <a:pPr algn="l" marL="342900" indent="-342900">
-              <a:lnSpc>
-                <a:spcPct val="122000"/>
-              </a:lnSpc>
-              <a:spcAft>
-                <a:spcPts val="1000"/>
-              </a:spcAft>
-              <a:buSzPct val="100000"/>
-              <a:buChar char="•"/>
-            </a:pPr>
-            <a:r>
-              <a:rPr lang="en-US" sz="1350" dirty="0">
-                <a:solidFill>
-                  <a:srgbClr val="31424A"/>
-                </a:solidFill>
-                <a:latin typeface="Calibri" pitchFamily="34" charset="0"/>
-                <a:ea typeface="Calibri" pitchFamily="34" charset="-122"/>
-                <a:cs typeface="Calibri" pitchFamily="34" charset="-120"/>
-              </a:rPr>
-              <a:t>Import logistics through Uganda or Kenya, with long lead times.</a:t>
-            </a:r>
-            <a:endParaRPr lang="en-US" sz="1350" dirty="0"/>
-          </a:p>
-        </p:txBody>
-      </p:sp>
-      <p:sp>
-        <p:nvSpPr>
-          <p:cNvPr id="6" name="Text 4"/>
-          <p:cNvSpPr txBox="1"/>
-          <p:nvPr/>
-        </p:nvSpPr>
-        <p:spPr>
-          <a:xfrm>
-            <a:off x="6370168" y="1783080"/>
-            <a:ext cx="5227168" cy="411480"/>
-          </a:xfrm>
-          <a:prstGeom prst="rect">
-            <a:avLst/>
-          </a:prstGeom>
-          <a:noFill/>
-          <a:ln/>
-        </p:spPr>
-        <p:txBody>
-          <a:bodyPr wrap="square" lIns="0" tIns="0" rIns="0" bIns="0" rtlCol="0" anchor="ctr"/>
-          <a:lstStyle/>
-          <a:p>
-            <a:pPr algn="l" indent="0" marL="0">
-              <a:buNone/>
-            </a:pPr>
-            <a:r>
-              <a:rPr lang="en-US" sz="1600" b="1" dirty="0">
-                <a:solidFill>
-                  <a:srgbClr val="1C5A73"/>
-                </a:solidFill>
-                <a:latin typeface="Cambria" pitchFamily="34" charset="0"/>
-                <a:ea typeface="Cambria" pitchFamily="34" charset="-122"/>
-                <a:cs typeface="Cambria" pitchFamily="34" charset="-120"/>
-              </a:rPr>
-              <a:t>Our answers</a:t>
-            </a:r>
-            <a:endParaRPr lang="en-US" sz="1600" dirty="0"/>
-          </a:p>
-        </p:txBody>
-      </p:sp>
-      <p:sp>
-        <p:nvSpPr>
-          <p:cNvPr id="7" name="Text 5"/>
-          <p:cNvSpPr txBox="1"/>
-          <p:nvPr/>
-        </p:nvSpPr>
-        <p:spPr>
-          <a:xfrm>
-            <a:off x="6370168" y="2286000"/>
-            <a:ext cx="5227168" cy="2468880"/>
-          </a:xfrm>
-          <a:prstGeom prst="rect">
-            <a:avLst/>
-          </a:prstGeom>
-          <a:noFill/>
-          <a:ln/>
-        </p:spPr>
-        <p:txBody>
-          <a:bodyPr wrap="square" lIns="0" tIns="0" rIns="0" bIns="0" rtlCol="0" anchor="t"/>
-          <a:lstStyle/>
-          <a:p>
-            <a:pPr algn="l" marL="342900" indent="-342900">
-              <a:lnSpc>
-                <a:spcPct val="122000"/>
-              </a:lnSpc>
-              <a:spcAft>
-                <a:spcPts val="1000"/>
-              </a:spcAft>
-              <a:buSzPct val="100000"/>
-              <a:buChar char="•"/>
-            </a:pPr>
-            <a:r>
-              <a:rPr lang="en-US" sz="1350" dirty="0">
-                <a:solidFill>
-                  <a:srgbClr val="31424A"/>
-                </a:solidFill>
-                <a:latin typeface="Calibri" pitchFamily="34" charset="0"/>
-                <a:ea typeface="Calibri" pitchFamily="34" charset="-122"/>
-                <a:cs typeface="Calibri" pitchFamily="34" charset="-120"/>
-              </a:rPr>
-              <a:t>Start with accessible, secure pilot sites around Juba and in Western Equatoria.</a:t>
-            </a:r>
-            <a:endParaRPr lang="en-US" sz="1350" dirty="0"/>
-          </a:p>
-          <a:p>
-            <a:pPr algn="l" marL="342900" indent="-342900">
-              <a:lnSpc>
-                <a:spcPct val="122000"/>
-              </a:lnSpc>
-              <a:spcAft>
-                <a:spcPts val="1000"/>
-              </a:spcAft>
-              <a:buSzPct val="100000"/>
-              <a:buChar char="•"/>
-            </a:pPr>
-            <a:r>
-              <a:rPr lang="en-US" sz="1350" dirty="0">
-                <a:solidFill>
-                  <a:srgbClr val="31424A"/>
-                </a:solidFill>
-                <a:latin typeface="Calibri" pitchFamily="34" charset="0"/>
-                <a:ea typeface="Calibri" pitchFamily="34" charset="-122"/>
-                <a:cs typeface="Calibri" pitchFamily="34" charset="-120"/>
-              </a:rPr>
-              <a:t>Select only drained, drought-exposed plots, after a site assessment.</a:t>
-            </a:r>
-            <a:endParaRPr lang="en-US" sz="1350" dirty="0"/>
-          </a:p>
-          <a:p>
-            <a:pPr algn="l" marL="342900" indent="-342900">
-              <a:lnSpc>
-                <a:spcPct val="122000"/>
-              </a:lnSpc>
-              <a:spcAft>
-                <a:spcPts val="1000"/>
-              </a:spcAft>
-              <a:buSzPct val="100000"/>
-              <a:buChar char="•"/>
-            </a:pPr>
-            <a:r>
-              <a:rPr lang="en-US" sz="1350" dirty="0">
-                <a:solidFill>
-                  <a:srgbClr val="31424A"/>
-                </a:solidFill>
-                <a:latin typeface="Calibri" pitchFamily="34" charset="0"/>
-                <a:ea typeface="Calibri" pitchFamily="34" charset="-122"/>
-                <a:cs typeface="Calibri" pitchFamily="34" charset="-120"/>
-              </a:rPr>
-              <a:t>Work through FAO, NGOs and donor programmes that already supply inputs to farmers.</a:t>
-            </a:r>
-            <a:endParaRPr lang="en-US" sz="1350" dirty="0"/>
-          </a:p>
-          <a:p>
-            <a:pPr algn="l" marL="342900" indent="-342900">
-              <a:lnSpc>
-                <a:spcPct val="122000"/>
-              </a:lnSpc>
-              <a:spcAft>
-                <a:spcPts val="1000"/>
-              </a:spcAft>
-              <a:buSzPct val="100000"/>
-              <a:buChar char="•"/>
-            </a:pPr>
-            <a:r>
-              <a:rPr lang="en-US" sz="1350" dirty="0">
-                <a:solidFill>
-                  <a:srgbClr val="31424A"/>
-                </a:solidFill>
-                <a:latin typeface="Calibri" pitchFamily="34" charset="0"/>
-                <a:ea typeface="Calibri" pitchFamily="34" charset="-122"/>
-                <a:cs typeface="Calibri" pitchFamily="34" charset="-120"/>
-              </a:rPr>
-              <a:t>Group orders and hold a buffer stock in Juba before the planting season.</a:t>
-            </a:r>
-            <a:endParaRPr lang="en-US" sz="1350" dirty="0"/>
-          </a:p>
-        </p:txBody>
-      </p:sp>
-      <p:sp>
-        <p:nvSpPr>
-          <p:cNvPr id="8" name="Shape 6"/>
+          <p:cNvPr id="4" name="Shape 2"/>
           <p:cNvSpPr/>
           <p:nvPr/>
         </p:nvSpPr>
         <p:spPr>
           <a:xfrm>
-            <a:off x="594360" y="4846320"/>
-            <a:ext cx="11002975" cy="960120"/>
+            <a:off x="594360" y="1874520"/>
+            <a:ext cx="2545004" cy="2834640"/>
           </a:xfrm>
           <a:prstGeom prst="roundRect">
             <a:avLst>
-              <a:gd name="adj" fmla="val 7619"/>
+              <a:gd name="adj" fmla="val 3593"/>
             </a:avLst>
           </a:prstGeom>
           <a:solidFill>
@@ -5888,14 +5684,112 @@
       </p:sp>
       <p:sp>
         <p:nvSpPr>
-          <p:cNvPr id="9" name="Text 7"/>
-          <p:cNvSpPr txBox="1"/>
-          <p:nvPr/>
-        </p:nvSpPr>
-        <p:spPr>
-          <a:xfrm>
-            <a:off x="822960" y="4983480"/>
-            <a:ext cx="10545775" cy="713232"/>
+          <p:cNvPr id="5" name="Shape 3"/>
+          <p:cNvSpPr/>
+          <p:nvPr/>
+        </p:nvSpPr>
+        <p:spPr>
+          <a:xfrm>
+            <a:off x="822960" y="2103120"/>
+            <a:ext cx="566928" cy="566928"/>
+          </a:xfrm>
+          <a:prstGeom prst="ellipse">
+            <a:avLst/>
+          </a:prstGeom>
+          <a:solidFill>
+            <a:srgbClr val="1C5A73"/>
+          </a:solidFill>
+          <a:ln/>
+        </p:spPr>
+      </p:sp>
+      <p:sp>
+        <p:nvSpPr>
+          <p:cNvPr id="6" name="Text 4"/>
+          <p:cNvSpPr txBox="1"/>
+          <p:nvPr/>
+        </p:nvSpPr>
+        <p:spPr>
+          <a:xfrm>
+            <a:off x="822960" y="2103120"/>
+            <a:ext cx="566928" cy="566928"/>
+          </a:xfrm>
+          <a:prstGeom prst="rect">
+            <a:avLst/>
+          </a:prstGeom>
+          <a:noFill/>
+          <a:ln/>
+        </p:spPr>
+        <p:txBody>
+          <a:bodyPr wrap="square" lIns="0" tIns="0" rIns="0" bIns="0" rtlCol="0" anchor="ctr"/>
+          <a:lstStyle/>
+          <a:p>
+            <a:pPr algn="ctr" indent="0" marL="0">
+              <a:buNone/>
+            </a:pPr>
+            <a:r>
+              <a:rPr lang="en-US" sz="1600" b="1" dirty="0">
+                <a:solidFill>
+                  <a:srgbClr val="FFFFFF"/>
+                </a:solidFill>
+                <a:latin typeface="Cambria" pitchFamily="34" charset="0"/>
+                <a:ea typeface="Cambria" pitchFamily="34" charset="-122"/>
+                <a:cs typeface="Cambria" pitchFamily="34" charset="-120"/>
+              </a:rPr>
+              <a:t>1</a:t>
+            </a:r>
+            <a:endParaRPr lang="en-US" sz="1600" dirty="0"/>
+          </a:p>
+        </p:txBody>
+      </p:sp>
+      <p:sp>
+        <p:nvSpPr>
+          <p:cNvPr id="7" name="Text 5"/>
+          <p:cNvSpPr txBox="1"/>
+          <p:nvPr/>
+        </p:nvSpPr>
+        <p:spPr>
+          <a:xfrm>
+            <a:off x="822960" y="2788920"/>
+            <a:ext cx="2087804" cy="457200"/>
+          </a:xfrm>
+          <a:prstGeom prst="rect">
+            <a:avLst/>
+          </a:prstGeom>
+          <a:noFill/>
+          <a:ln/>
+        </p:spPr>
+        <p:txBody>
+          <a:bodyPr wrap="square" lIns="0" tIns="0" rIns="0" bIns="0" rtlCol="0" anchor="ctr"/>
+          <a:lstStyle/>
+          <a:p>
+            <a:pPr algn="l" indent="0" marL="0">
+              <a:buNone/>
+            </a:pPr>
+            <a:r>
+              <a:rPr lang="en-US" sz="1400" b="1" dirty="0">
+                <a:solidFill>
+                  <a:srgbClr val="1C5A73"/>
+                </a:solidFill>
+                <a:latin typeface="Cambria" pitchFamily="34" charset="0"/>
+                <a:ea typeface="Cambria" pitchFamily="34" charset="-122"/>
+                <a:cs typeface="Cambria" pitchFamily="34" charset="-120"/>
+              </a:rPr>
+              <a:t>Site assessment</a:t>
+            </a:r>
+            <a:endParaRPr lang="en-US" sz="1400" dirty="0"/>
+          </a:p>
+        </p:txBody>
+      </p:sp>
+      <p:sp>
+        <p:nvSpPr>
+          <p:cNvPr id="8" name="Text 6"/>
+          <p:cNvSpPr txBox="1"/>
+          <p:nvPr/>
+        </p:nvSpPr>
+        <p:spPr>
+          <a:xfrm>
+            <a:off x="822960" y="3291840"/>
+            <a:ext cx="2087804" cy="1234440"/>
           </a:xfrm>
           <a:prstGeom prst="rect">
             <a:avLst/>
@@ -5909,12 +5803,555 @@
           <a:p>
             <a:pPr algn="l" indent="0" marL="0">
               <a:lnSpc>
-                <a:spcPct val="118000"/>
+                <a:spcPct val="120000"/>
               </a:lnSpc>
               <a:buNone/>
             </a:pPr>
             <a:r>
-              <a:rPr lang="en-US" sz="1100" dirty="0">
+              <a:rPr lang="en-US" sz="1200" dirty="0">
+                <a:solidFill>
+                  <a:srgbClr val="31424A"/>
+                </a:solidFill>
+                <a:latin typeface="Calibri" pitchFamily="34" charset="0"/>
+                <a:ea typeface="Calibri" pitchFamily="34" charset="-122"/>
+                <a:cs typeface="Calibri" pitchFamily="34" charset="-120"/>
+              </a:rPr>
+              <a:t>Drainage, soil, crop and access are reviewed. No commitment at this stage.</a:t>
+            </a:r>
+            <a:endParaRPr lang="en-US" sz="1200" dirty="0"/>
+          </a:p>
+        </p:txBody>
+      </p:sp>
+      <p:sp>
+        <p:nvSpPr>
+          <p:cNvPr id="9" name="Shape 7"/>
+          <p:cNvSpPr/>
+          <p:nvPr/>
+        </p:nvSpPr>
+        <p:spPr>
+          <a:xfrm>
+            <a:off x="3413684" y="1874520"/>
+            <a:ext cx="2545004" cy="2834640"/>
+          </a:xfrm>
+          <a:prstGeom prst="roundRect">
+            <a:avLst>
+              <a:gd name="adj" fmla="val 3593"/>
+            </a:avLst>
+          </a:prstGeom>
+          <a:solidFill>
+            <a:srgbClr val="EDF3F5"/>
+          </a:solidFill>
+          <a:ln w="9525">
+            <a:solidFill>
+              <a:srgbClr val="D6E2E7"/>
+            </a:solidFill>
+            <a:prstDash val="solid"/>
+          </a:ln>
+        </p:spPr>
+      </p:sp>
+      <p:sp>
+        <p:nvSpPr>
+          <p:cNvPr id="10" name="Shape 8"/>
+          <p:cNvSpPr/>
+          <p:nvPr/>
+        </p:nvSpPr>
+        <p:spPr>
+          <a:xfrm>
+            <a:off x="3642284" y="2103120"/>
+            <a:ext cx="566928" cy="566928"/>
+          </a:xfrm>
+          <a:prstGeom prst="ellipse">
+            <a:avLst/>
+          </a:prstGeom>
+          <a:solidFill>
+            <a:srgbClr val="1C5A73"/>
+          </a:solidFill>
+          <a:ln/>
+        </p:spPr>
+      </p:sp>
+      <p:sp>
+        <p:nvSpPr>
+          <p:cNvPr id="11" name="Text 9"/>
+          <p:cNvSpPr txBox="1"/>
+          <p:nvPr/>
+        </p:nvSpPr>
+        <p:spPr>
+          <a:xfrm>
+            <a:off x="3642284" y="2103120"/>
+            <a:ext cx="566928" cy="566928"/>
+          </a:xfrm>
+          <a:prstGeom prst="rect">
+            <a:avLst/>
+          </a:prstGeom>
+          <a:noFill/>
+          <a:ln/>
+        </p:spPr>
+        <p:txBody>
+          <a:bodyPr wrap="square" lIns="0" tIns="0" rIns="0" bIns="0" rtlCol="0" anchor="ctr"/>
+          <a:lstStyle/>
+          <a:p>
+            <a:pPr algn="ctr" indent="0" marL="0">
+              <a:buNone/>
+            </a:pPr>
+            <a:r>
+              <a:rPr lang="en-US" sz="1600" b="1" dirty="0">
+                <a:solidFill>
+                  <a:srgbClr val="FFFFFF"/>
+                </a:solidFill>
+                <a:latin typeface="Cambria" pitchFamily="34" charset="0"/>
+                <a:ea typeface="Cambria" pitchFamily="34" charset="-122"/>
+                <a:cs typeface="Cambria" pitchFamily="34" charset="-120"/>
+              </a:rPr>
+              <a:t>2</a:t>
+            </a:r>
+            <a:endParaRPr lang="en-US" sz="1600" dirty="0"/>
+          </a:p>
+        </p:txBody>
+      </p:sp>
+      <p:sp>
+        <p:nvSpPr>
+          <p:cNvPr id="12" name="Text 10"/>
+          <p:cNvSpPr txBox="1"/>
+          <p:nvPr/>
+        </p:nvSpPr>
+        <p:spPr>
+          <a:xfrm>
+            <a:off x="3642284" y="2788920"/>
+            <a:ext cx="2087804" cy="457200"/>
+          </a:xfrm>
+          <a:prstGeom prst="rect">
+            <a:avLst/>
+          </a:prstGeom>
+          <a:noFill/>
+          <a:ln/>
+        </p:spPr>
+        <p:txBody>
+          <a:bodyPr wrap="square" lIns="0" tIns="0" rIns="0" bIns="0" rtlCol="0" anchor="ctr"/>
+          <a:lstStyle/>
+          <a:p>
+            <a:pPr algn="l" indent="0" marL="0">
+              <a:buNone/>
+            </a:pPr>
+            <a:r>
+              <a:rPr lang="en-US" sz="1400" b="1" dirty="0">
+                <a:solidFill>
+                  <a:srgbClr val="1C5A73"/>
+                </a:solidFill>
+                <a:latin typeface="Cambria" pitchFamily="34" charset="0"/>
+                <a:ea typeface="Cambria" pitchFamily="34" charset="-122"/>
+                <a:cs typeface="Cambria" pitchFamily="34" charset="-120"/>
+              </a:rPr>
+              <a:t>Trial plot</a:t>
+            </a:r>
+            <a:endParaRPr lang="en-US" sz="1400" dirty="0"/>
+          </a:p>
+        </p:txBody>
+      </p:sp>
+      <p:sp>
+        <p:nvSpPr>
+          <p:cNvPr id="13" name="Text 11"/>
+          <p:cNvSpPr txBox="1"/>
+          <p:nvPr/>
+        </p:nvSpPr>
+        <p:spPr>
+          <a:xfrm>
+            <a:off x="3642284" y="3291840"/>
+            <a:ext cx="2087804" cy="1234440"/>
+          </a:xfrm>
+          <a:prstGeom prst="rect">
+            <a:avLst/>
+          </a:prstGeom>
+          <a:noFill/>
+          <a:ln/>
+        </p:spPr>
+        <p:txBody>
+          <a:bodyPr wrap="square" lIns="0" tIns="0" rIns="0" bIns="0" rtlCol="0" anchor="t"/>
+          <a:lstStyle/>
+          <a:p>
+            <a:pPr algn="l" indent="0" marL="0">
+              <a:lnSpc>
+                <a:spcPct val="120000"/>
+              </a:lnSpc>
+              <a:buNone/>
+            </a:pPr>
+            <a:r>
+              <a:rPr lang="en-US" sz="1200" dirty="0">
+                <a:solidFill>
+                  <a:srgbClr val="31424A"/>
+                </a:solidFill>
+                <a:latin typeface="Calibri" pitchFamily="34" charset="0"/>
+                <a:ea typeface="Calibri" pitchFamily="34" charset="-122"/>
+                <a:cs typeface="Calibri" pitchFamily="34" charset="-120"/>
+              </a:rPr>
+              <a:t>One comparative plot on drained land, against a control plot managed identically.</a:t>
+            </a:r>
+            <a:endParaRPr lang="en-US" sz="1200" dirty="0"/>
+          </a:p>
+        </p:txBody>
+      </p:sp>
+      <p:sp>
+        <p:nvSpPr>
+          <p:cNvPr id="14" name="Shape 12"/>
+          <p:cNvSpPr/>
+          <p:nvPr/>
+        </p:nvSpPr>
+        <p:spPr>
+          <a:xfrm>
+            <a:off x="6233008" y="1874520"/>
+            <a:ext cx="2545004" cy="2834640"/>
+          </a:xfrm>
+          <a:prstGeom prst="roundRect">
+            <a:avLst>
+              <a:gd name="adj" fmla="val 3593"/>
+            </a:avLst>
+          </a:prstGeom>
+          <a:solidFill>
+            <a:srgbClr val="EDF3F5"/>
+          </a:solidFill>
+          <a:ln w="9525">
+            <a:solidFill>
+              <a:srgbClr val="D6E2E7"/>
+            </a:solidFill>
+            <a:prstDash val="solid"/>
+          </a:ln>
+        </p:spPr>
+      </p:sp>
+      <p:sp>
+        <p:nvSpPr>
+          <p:cNvPr id="15" name="Shape 13"/>
+          <p:cNvSpPr/>
+          <p:nvPr/>
+        </p:nvSpPr>
+        <p:spPr>
+          <a:xfrm>
+            <a:off x="6461608" y="2103120"/>
+            <a:ext cx="566928" cy="566928"/>
+          </a:xfrm>
+          <a:prstGeom prst="ellipse">
+            <a:avLst/>
+          </a:prstGeom>
+          <a:solidFill>
+            <a:srgbClr val="1C5A73"/>
+          </a:solidFill>
+          <a:ln/>
+        </p:spPr>
+      </p:sp>
+      <p:sp>
+        <p:nvSpPr>
+          <p:cNvPr id="16" name="Text 14"/>
+          <p:cNvSpPr txBox="1"/>
+          <p:nvPr/>
+        </p:nvSpPr>
+        <p:spPr>
+          <a:xfrm>
+            <a:off x="6461608" y="2103120"/>
+            <a:ext cx="566928" cy="566928"/>
+          </a:xfrm>
+          <a:prstGeom prst="rect">
+            <a:avLst/>
+          </a:prstGeom>
+          <a:noFill/>
+          <a:ln/>
+        </p:spPr>
+        <p:txBody>
+          <a:bodyPr wrap="square" lIns="0" tIns="0" rIns="0" bIns="0" rtlCol="0" anchor="ctr"/>
+          <a:lstStyle/>
+          <a:p>
+            <a:pPr algn="ctr" indent="0" marL="0">
+              <a:buNone/>
+            </a:pPr>
+            <a:r>
+              <a:rPr lang="en-US" sz="1600" b="1" dirty="0">
+                <a:solidFill>
+                  <a:srgbClr val="FFFFFF"/>
+                </a:solidFill>
+                <a:latin typeface="Cambria" pitchFamily="34" charset="0"/>
+                <a:ea typeface="Cambria" pitchFamily="34" charset="-122"/>
+                <a:cs typeface="Cambria" pitchFamily="34" charset="-120"/>
+              </a:rPr>
+              <a:t>3</a:t>
+            </a:r>
+            <a:endParaRPr lang="en-US" sz="1600" dirty="0"/>
+          </a:p>
+        </p:txBody>
+      </p:sp>
+      <p:sp>
+        <p:nvSpPr>
+          <p:cNvPr id="17" name="Text 15"/>
+          <p:cNvSpPr txBox="1"/>
+          <p:nvPr/>
+        </p:nvSpPr>
+        <p:spPr>
+          <a:xfrm>
+            <a:off x="6461608" y="2788920"/>
+            <a:ext cx="2087804" cy="457200"/>
+          </a:xfrm>
+          <a:prstGeom prst="rect">
+            <a:avLst/>
+          </a:prstGeom>
+          <a:noFill/>
+          <a:ln/>
+        </p:spPr>
+        <p:txBody>
+          <a:bodyPr wrap="square" lIns="0" tIns="0" rIns="0" bIns="0" rtlCol="0" anchor="ctr"/>
+          <a:lstStyle/>
+          <a:p>
+            <a:pPr algn="l" indent="0" marL="0">
+              <a:buNone/>
+            </a:pPr>
+            <a:r>
+              <a:rPr lang="en-US" sz="1400" b="1" dirty="0">
+                <a:solidFill>
+                  <a:srgbClr val="1C5A73"/>
+                </a:solidFill>
+                <a:latin typeface="Cambria" pitchFamily="34" charset="0"/>
+                <a:ea typeface="Cambria" pitchFamily="34" charset="-122"/>
+                <a:cs typeface="Cambria" pitchFamily="34" charset="-120"/>
+              </a:rPr>
+              <a:t>Measurement</a:t>
+            </a:r>
+            <a:endParaRPr lang="en-US" sz="1400" dirty="0"/>
+          </a:p>
+        </p:txBody>
+      </p:sp>
+      <p:sp>
+        <p:nvSpPr>
+          <p:cNvPr id="18" name="Text 16"/>
+          <p:cNvSpPr txBox="1"/>
+          <p:nvPr/>
+        </p:nvSpPr>
+        <p:spPr>
+          <a:xfrm>
+            <a:off x="6461608" y="3291840"/>
+            <a:ext cx="2087804" cy="1234440"/>
+          </a:xfrm>
+          <a:prstGeom prst="rect">
+            <a:avLst/>
+          </a:prstGeom>
+          <a:noFill/>
+          <a:ln/>
+        </p:spPr>
+        <p:txBody>
+          <a:bodyPr wrap="square" lIns="0" tIns="0" rIns="0" bIns="0" rtlCol="0" anchor="t"/>
+          <a:lstStyle/>
+          <a:p>
+            <a:pPr algn="l" indent="0" marL="0">
+              <a:lnSpc>
+                <a:spcPct val="120000"/>
+              </a:lnSpc>
+              <a:buNone/>
+            </a:pPr>
+            <a:r>
+              <a:rPr lang="en-US" sz="1200" dirty="0">
+                <a:solidFill>
+                  <a:srgbClr val="31424A"/>
+                </a:solidFill>
+                <a:latin typeface="Calibri" pitchFamily="34" charset="0"/>
+                <a:ea typeface="Calibri" pitchFamily="34" charset="-122"/>
+                <a:cs typeface="Calibri" pitchFamily="34" charset="-120"/>
+              </a:rPr>
+              <a:t>Emergence, water use and yield recorded over a full season.</a:t>
+            </a:r>
+            <a:endParaRPr lang="en-US" sz="1200" dirty="0"/>
+          </a:p>
+        </p:txBody>
+      </p:sp>
+      <p:sp>
+        <p:nvSpPr>
+          <p:cNvPr id="19" name="Shape 17"/>
+          <p:cNvSpPr/>
+          <p:nvPr/>
+        </p:nvSpPr>
+        <p:spPr>
+          <a:xfrm>
+            <a:off x="9052331" y="1874520"/>
+            <a:ext cx="2545004" cy="2834640"/>
+          </a:xfrm>
+          <a:prstGeom prst="roundRect">
+            <a:avLst>
+              <a:gd name="adj" fmla="val 3593"/>
+            </a:avLst>
+          </a:prstGeom>
+          <a:solidFill>
+            <a:srgbClr val="EDF3F5"/>
+          </a:solidFill>
+          <a:ln w="9525">
+            <a:solidFill>
+              <a:srgbClr val="D6E2E7"/>
+            </a:solidFill>
+            <a:prstDash val="solid"/>
+          </a:ln>
+        </p:spPr>
+      </p:sp>
+      <p:sp>
+        <p:nvSpPr>
+          <p:cNvPr id="20" name="Shape 18"/>
+          <p:cNvSpPr/>
+          <p:nvPr/>
+        </p:nvSpPr>
+        <p:spPr>
+          <a:xfrm>
+            <a:off x="9280931" y="2103120"/>
+            <a:ext cx="566928" cy="566928"/>
+          </a:xfrm>
+          <a:prstGeom prst="ellipse">
+            <a:avLst/>
+          </a:prstGeom>
+          <a:solidFill>
+            <a:srgbClr val="1C5A73"/>
+          </a:solidFill>
+          <a:ln/>
+        </p:spPr>
+      </p:sp>
+      <p:sp>
+        <p:nvSpPr>
+          <p:cNvPr id="21" name="Text 19"/>
+          <p:cNvSpPr txBox="1"/>
+          <p:nvPr/>
+        </p:nvSpPr>
+        <p:spPr>
+          <a:xfrm>
+            <a:off x="9280931" y="2103120"/>
+            <a:ext cx="566928" cy="566928"/>
+          </a:xfrm>
+          <a:prstGeom prst="rect">
+            <a:avLst/>
+          </a:prstGeom>
+          <a:noFill/>
+          <a:ln/>
+        </p:spPr>
+        <p:txBody>
+          <a:bodyPr wrap="square" lIns="0" tIns="0" rIns="0" bIns="0" rtlCol="0" anchor="ctr"/>
+          <a:lstStyle/>
+          <a:p>
+            <a:pPr algn="ctr" indent="0" marL="0">
+              <a:buNone/>
+            </a:pPr>
+            <a:r>
+              <a:rPr lang="en-US" sz="1600" b="1" dirty="0">
+                <a:solidFill>
+                  <a:srgbClr val="FFFFFF"/>
+                </a:solidFill>
+                <a:latin typeface="Cambria" pitchFamily="34" charset="0"/>
+                <a:ea typeface="Cambria" pitchFamily="34" charset="-122"/>
+                <a:cs typeface="Cambria" pitchFamily="34" charset="-120"/>
+              </a:rPr>
+              <a:t>4</a:t>
+            </a:r>
+            <a:endParaRPr lang="en-US" sz="1600" dirty="0"/>
+          </a:p>
+        </p:txBody>
+      </p:sp>
+      <p:sp>
+        <p:nvSpPr>
+          <p:cNvPr id="22" name="Text 20"/>
+          <p:cNvSpPr txBox="1"/>
+          <p:nvPr/>
+        </p:nvSpPr>
+        <p:spPr>
+          <a:xfrm>
+            <a:off x="9280931" y="2788920"/>
+            <a:ext cx="2087804" cy="457200"/>
+          </a:xfrm>
+          <a:prstGeom prst="rect">
+            <a:avLst/>
+          </a:prstGeom>
+          <a:noFill/>
+          <a:ln/>
+        </p:spPr>
+        <p:txBody>
+          <a:bodyPr wrap="square" lIns="0" tIns="0" rIns="0" bIns="0" rtlCol="0" anchor="ctr"/>
+          <a:lstStyle/>
+          <a:p>
+            <a:pPr algn="l" indent="0" marL="0">
+              <a:buNone/>
+            </a:pPr>
+            <a:r>
+              <a:rPr lang="en-US" sz="1400" b="1" dirty="0">
+                <a:solidFill>
+                  <a:srgbClr val="1C5A73"/>
+                </a:solidFill>
+                <a:latin typeface="Cambria" pitchFamily="34" charset="0"/>
+                <a:ea typeface="Cambria" pitchFamily="34" charset="-122"/>
+                <a:cs typeface="Cambria" pitchFamily="34" charset="-120"/>
+              </a:rPr>
+              <a:t>Extension</a:t>
+            </a:r>
+            <a:endParaRPr lang="en-US" sz="1400" dirty="0"/>
+          </a:p>
+        </p:txBody>
+      </p:sp>
+      <p:sp>
+        <p:nvSpPr>
+          <p:cNvPr id="23" name="Text 21"/>
+          <p:cNvSpPr txBox="1"/>
+          <p:nvPr/>
+        </p:nvSpPr>
+        <p:spPr>
+          <a:xfrm>
+            <a:off x="9280931" y="3291840"/>
+            <a:ext cx="2087804" cy="1234440"/>
+          </a:xfrm>
+          <a:prstGeom prst="rect">
+            <a:avLst/>
+          </a:prstGeom>
+          <a:noFill/>
+          <a:ln/>
+        </p:spPr>
+        <p:txBody>
+          <a:bodyPr wrap="square" lIns="0" tIns="0" rIns="0" bIns="0" rtlCol="0" anchor="t"/>
+          <a:lstStyle/>
+          <a:p>
+            <a:pPr algn="l" indent="0" marL="0">
+              <a:lnSpc>
+                <a:spcPct val="120000"/>
+              </a:lnSpc>
+              <a:buNone/>
+            </a:pPr>
+            <a:r>
+              <a:rPr lang="en-US" sz="1200" dirty="0">
+                <a:solidFill>
+                  <a:srgbClr val="31424A"/>
+                </a:solidFill>
+                <a:latin typeface="Calibri" pitchFamily="34" charset="0"/>
+                <a:ea typeface="Calibri" pitchFamily="34" charset="-122"/>
+                <a:cs typeface="Calibri" pitchFamily="34" charset="-120"/>
+              </a:rPr>
+              <a:t>Gradual rollout to other plots and sites, on the basis of what was measured.</a:t>
+            </a:r>
+            <a:endParaRPr lang="en-US" sz="1200" dirty="0"/>
+          </a:p>
+        </p:txBody>
+      </p:sp>
+      <p:sp>
+        <p:nvSpPr>
+          <p:cNvPr id="24" name="Text 22"/>
+          <p:cNvSpPr txBox="1"/>
+          <p:nvPr/>
+        </p:nvSpPr>
+        <p:spPr>
+          <a:xfrm>
+            <a:off x="594360" y="4983480"/>
+            <a:ext cx="11002975" cy="822960"/>
+          </a:xfrm>
+          <a:prstGeom prst="rect">
+            <a:avLst/>
+          </a:prstGeom>
+          <a:noFill/>
+          <a:ln/>
+        </p:spPr>
+        <p:txBody>
+          <a:bodyPr wrap="square" lIns="0" tIns="0" rIns="0" bIns="0" rtlCol="0" anchor="t"/>
+          <a:lstStyle/>
+          <a:p>
+            <a:pPr algn="l" indent="0" marL="0">
+              <a:lnSpc>
+                <a:spcPct val="125000"/>
+              </a:lnSpc>
+              <a:buNone/>
+            </a:pPr>
+            <a:r>
+              <a:rPr lang="en-US" sz="1250" i="1" dirty="0">
                 <a:solidFill>
                   <a:srgbClr val="6C8089"/>
                 </a:solidFill>
@@ -5922,15 +6359,15 @@
                 <a:ea typeface="Calibri" pitchFamily="34" charset="-122"/>
                 <a:cs typeface="Calibri" pitchFamily="34" charset="-120"/>
               </a:rPr>
-              <a:t>Acrylamide analysis (Polymex laboratory, ISO 9001, content below 3.0 µg/g) and REACH / SVHC screening (SGS) are available on request, together with the SOHISCERT certificate valid until 4 September 2027.</a:t>
-            </a:r>
-            <a:endParaRPr lang="en-US" sz="1100" dirty="0"/>
-          </a:p>
-        </p:txBody>
-      </p:sp>
-      <p:sp>
-        <p:nvSpPr>
-          <p:cNvPr id="10" name="Text 8"/>
+              <a:t>The dosing rule is the same everywhere: 3 grams per litre of useful soil. What changes from one site to the next is the volume of soil the roots actually explore.</a:t>
+            </a:r>
+            <a:endParaRPr lang="en-US" sz="1250" dirty="0"/>
+          </a:p>
+        </p:txBody>
+      </p:sp>
+      <p:sp>
+        <p:nvSpPr>
+          <p:cNvPr id="25" name="Text 23"/>
           <p:cNvSpPr txBox="1"/>
           <p:nvPr/>
         </p:nvSpPr>
@@ -5971,7 +6408,7 @@
       </p:sp>
       <p:sp>
         <p:nvSpPr>
-          <p:cNvPr id="11" name="Text 9"/>
+          <p:cNvPr id="26" name="Text 24"/>
           <p:cNvSpPr txBox="1"/>
           <p:nvPr/>
         </p:nvSpPr>
@@ -6021,6 +6458,1108 @@
 <file path=ppt/slides/slide14.xml><?xml version="1.0" encoding="utf-8"?>
 <p:sld xmlns:a="http://schemas.openxmlformats.org/drawingml/2006/main" xmlns:r="http://schemas.openxmlformats.org/officeDocument/2006/relationships" xmlns:p="http://schemas.openxmlformats.org/presentationml/2006/main">
   <p:cSld name="Slide 14">
+    <p:bg>
+      <p:bgPr>
+        <a:solidFill>
+          <a:srgbClr val="FAFBFB"/>
+        </a:solidFill>
+      </p:bgPr>
+    </p:bg>
+    <p:spTree>
+      <p:nvGrpSpPr>
+        <p:cNvPr id="1" name=""/>
+        <p:cNvGrpSpPr/>
+        <p:nvPr/>
+      </p:nvGrpSpPr>
+      <p:grpSpPr>
+        <a:xfrm>
+          <a:off x="0" y="0"/>
+          <a:ext cx="0" cy="0"/>
+          <a:chOff x="0" y="0"/>
+          <a:chExt cx="0" cy="0"/>
+        </a:xfrm>
+      </p:grpSpPr>
+      <p:sp>
+        <p:nvSpPr>
+          <p:cNvPr id="2" name="Text 0"/>
+          <p:cNvSpPr txBox="1"/>
+          <p:nvPr/>
+        </p:nvSpPr>
+        <p:spPr>
+          <a:xfrm>
+            <a:off x="594360" y="411480"/>
+            <a:ext cx="10515600" cy="274320"/>
+          </a:xfrm>
+          <a:prstGeom prst="rect">
+            <a:avLst/>
+          </a:prstGeom>
+          <a:noFill/>
+          <a:ln/>
+        </p:spPr>
+        <p:txBody>
+          <a:bodyPr wrap="square" lIns="0" tIns="0" rIns="0" bIns="0" rtlCol="0" anchor="ctr"/>
+          <a:lstStyle/>
+          <a:p>
+            <a:pPr algn="l" indent="0" marL="0">
+              <a:buNone/>
+            </a:pPr>
+            <a:r>
+              <a:rPr lang="en-US" sz="1150" b="1" spc="200" kern="0" dirty="0">
+                <a:solidFill>
+                  <a:srgbClr val="E0A33E"/>
+                </a:solidFill>
+                <a:latin typeface="Calibri" pitchFamily="34" charset="0"/>
+                <a:ea typeface="Calibri" pitchFamily="34" charset="-122"/>
+                <a:cs typeface="Calibri" pitchFamily="34" charset="-120"/>
+              </a:rPr>
+              <a:t>WHAT TO ANTICIPATE</a:t>
+            </a:r>
+            <a:endParaRPr lang="en-US" sz="1150" dirty="0"/>
+          </a:p>
+        </p:txBody>
+      </p:sp>
+      <p:sp>
+        <p:nvSpPr>
+          <p:cNvPr id="3" name="Text 1"/>
+          <p:cNvSpPr txBox="1"/>
+          <p:nvPr/>
+        </p:nvSpPr>
+        <p:spPr>
+          <a:xfrm>
+            <a:off x="594360" y="731520"/>
+            <a:ext cx="10881360" cy="731520"/>
+          </a:xfrm>
+          <a:prstGeom prst="rect">
+            <a:avLst/>
+          </a:prstGeom>
+          <a:noFill/>
+          <a:ln/>
+        </p:spPr>
+        <p:txBody>
+          <a:bodyPr wrap="square" lIns="0" tIns="0" rIns="0" bIns="0" rtlCol="0" anchor="ctr"/>
+          <a:lstStyle/>
+          <a:p>
+            <a:pPr algn="l" indent="0" marL="0">
+              <a:buNone/>
+            </a:pPr>
+            <a:r>
+              <a:rPr lang="en-US" sz="3000" b="1" dirty="0">
+                <a:solidFill>
+                  <a:srgbClr val="0E3546"/>
+                </a:solidFill>
+                <a:latin typeface="Cambria" pitchFamily="34" charset="0"/>
+                <a:ea typeface="Cambria" pitchFamily="34" charset="-122"/>
+                <a:cs typeface="Cambria" pitchFamily="34" charset="-120"/>
+              </a:rPr>
+              <a:t>Identified risks and our answers</a:t>
+            </a:r>
+            <a:endParaRPr lang="en-US" sz="3000" dirty="0"/>
+          </a:p>
+        </p:txBody>
+      </p:sp>
+      <p:sp>
+        <p:nvSpPr>
+          <p:cNvPr id="4" name="Text 2"/>
+          <p:cNvSpPr txBox="1"/>
+          <p:nvPr/>
+        </p:nvSpPr>
+        <p:spPr>
+          <a:xfrm>
+            <a:off x="594360" y="1783080"/>
+            <a:ext cx="5227168" cy="411480"/>
+          </a:xfrm>
+          <a:prstGeom prst="rect">
+            <a:avLst/>
+          </a:prstGeom>
+          <a:noFill/>
+          <a:ln/>
+        </p:spPr>
+        <p:txBody>
+          <a:bodyPr wrap="square" lIns="0" tIns="0" rIns="0" bIns="0" rtlCol="0" anchor="ctr"/>
+          <a:lstStyle/>
+          <a:p>
+            <a:pPr algn="l" indent="0" marL="0">
+              <a:buNone/>
+            </a:pPr>
+            <a:r>
+              <a:rPr lang="en-US" sz="1600" b="1" dirty="0">
+                <a:solidFill>
+                  <a:srgbClr val="1C5A73"/>
+                </a:solidFill>
+                <a:latin typeface="Cambria" pitchFamily="34" charset="0"/>
+                <a:ea typeface="Cambria" pitchFamily="34" charset="-122"/>
+                <a:cs typeface="Cambria" pitchFamily="34" charset="-120"/>
+              </a:rPr>
+              <a:t>Risks</a:t>
+            </a:r>
+            <a:endParaRPr lang="en-US" sz="1600" dirty="0"/>
+          </a:p>
+        </p:txBody>
+      </p:sp>
+      <p:sp>
+        <p:nvSpPr>
+          <p:cNvPr id="5" name="Text 3"/>
+          <p:cNvSpPr txBox="1"/>
+          <p:nvPr/>
+        </p:nvSpPr>
+        <p:spPr>
+          <a:xfrm>
+            <a:off x="594360" y="2286000"/>
+            <a:ext cx="5227168" cy="2468880"/>
+          </a:xfrm>
+          <a:prstGeom prst="rect">
+            <a:avLst/>
+          </a:prstGeom>
+          <a:noFill/>
+          <a:ln/>
+        </p:spPr>
+        <p:txBody>
+          <a:bodyPr wrap="square" lIns="0" tIns="0" rIns="0" bIns="0" rtlCol="0" anchor="t"/>
+          <a:lstStyle/>
+          <a:p>
+            <a:pPr algn="l" marL="342900" indent="-342900">
+              <a:lnSpc>
+                <a:spcPct val="122000"/>
+              </a:lnSpc>
+              <a:spcAft>
+                <a:spcPts val="1000"/>
+              </a:spcAft>
+              <a:buSzPct val="100000"/>
+              <a:buChar char="•"/>
+            </a:pPr>
+            <a:r>
+              <a:rPr lang="en-US" sz="1350" dirty="0">
+                <a:solidFill>
+                  <a:srgbClr val="31424A"/>
+                </a:solidFill>
+                <a:latin typeface="Calibri" pitchFamily="34" charset="0"/>
+                <a:ea typeface="Calibri" pitchFamily="34" charset="-122"/>
+                <a:cs typeface="Calibri" pitchFamily="34" charset="-120"/>
+              </a:rPr>
+              <a:t>Insecurity and poor roads, which limit access to trial sites and raise transport costs.</a:t>
+            </a:r>
+            <a:endParaRPr lang="en-US" sz="1350" dirty="0"/>
+          </a:p>
+          <a:p>
+            <a:pPr algn="l" marL="342900" indent="-342900">
+              <a:lnSpc>
+                <a:spcPct val="122000"/>
+              </a:lnSpc>
+              <a:spcAft>
+                <a:spcPts val="1000"/>
+              </a:spcAft>
+              <a:buSzPct val="100000"/>
+              <a:buChar char="•"/>
+            </a:pPr>
+            <a:r>
+              <a:rPr lang="en-US" sz="1350" dirty="0">
+                <a:solidFill>
+                  <a:srgbClr val="31424A"/>
+                </a:solidFill>
+                <a:latin typeface="Calibri" pitchFamily="34" charset="0"/>
+                <a:ea typeface="Calibri" pitchFamily="34" charset="-122"/>
+                <a:cs typeface="Calibri" pitchFamily="34" charset="-120"/>
+              </a:rPr>
+              <a:t>Flooding: waterlogged land gains nothing from water retention.</a:t>
+            </a:r>
+            <a:endParaRPr lang="en-US" sz="1350" dirty="0"/>
+          </a:p>
+          <a:p>
+            <a:pPr algn="l" marL="342900" indent="-342900">
+              <a:lnSpc>
+                <a:spcPct val="122000"/>
+              </a:lnSpc>
+              <a:spcAft>
+                <a:spcPts val="1000"/>
+              </a:spcAft>
+              <a:buSzPct val="100000"/>
+              <a:buChar char="•"/>
+            </a:pPr>
+            <a:r>
+              <a:rPr lang="en-US" sz="1350" dirty="0">
+                <a:solidFill>
+                  <a:srgbClr val="31424A"/>
+                </a:solidFill>
+                <a:latin typeface="Calibri" pitchFamily="34" charset="0"/>
+                <a:ea typeface="Calibri" pitchFamily="34" charset="-122"/>
+                <a:cs typeface="Calibri" pitchFamily="34" charset="-120"/>
+              </a:rPr>
+              <a:t>Very little cash among smallholders, and dependence on donor-funded programmes.</a:t>
+            </a:r>
+            <a:endParaRPr lang="en-US" sz="1350" dirty="0"/>
+          </a:p>
+          <a:p>
+            <a:pPr algn="l" marL="342900" indent="-342900">
+              <a:lnSpc>
+                <a:spcPct val="122000"/>
+              </a:lnSpc>
+              <a:spcAft>
+                <a:spcPts val="1000"/>
+              </a:spcAft>
+              <a:buSzPct val="100000"/>
+              <a:buChar char="•"/>
+            </a:pPr>
+            <a:r>
+              <a:rPr lang="en-US" sz="1350" dirty="0">
+                <a:solidFill>
+                  <a:srgbClr val="31424A"/>
+                </a:solidFill>
+                <a:latin typeface="Calibri" pitchFamily="34" charset="0"/>
+                <a:ea typeface="Calibri" pitchFamily="34" charset="-122"/>
+                <a:cs typeface="Calibri" pitchFamily="34" charset="-120"/>
+              </a:rPr>
+              <a:t>Import logistics through Uganda or Kenya, with long lead times.</a:t>
+            </a:r>
+            <a:endParaRPr lang="en-US" sz="1350" dirty="0"/>
+          </a:p>
+        </p:txBody>
+      </p:sp>
+      <p:sp>
+        <p:nvSpPr>
+          <p:cNvPr id="6" name="Text 4"/>
+          <p:cNvSpPr txBox="1"/>
+          <p:nvPr/>
+        </p:nvSpPr>
+        <p:spPr>
+          <a:xfrm>
+            <a:off x="6370168" y="1783080"/>
+            <a:ext cx="5227168" cy="411480"/>
+          </a:xfrm>
+          <a:prstGeom prst="rect">
+            <a:avLst/>
+          </a:prstGeom>
+          <a:noFill/>
+          <a:ln/>
+        </p:spPr>
+        <p:txBody>
+          <a:bodyPr wrap="square" lIns="0" tIns="0" rIns="0" bIns="0" rtlCol="0" anchor="ctr"/>
+          <a:lstStyle/>
+          <a:p>
+            <a:pPr algn="l" indent="0" marL="0">
+              <a:buNone/>
+            </a:pPr>
+            <a:r>
+              <a:rPr lang="en-US" sz="1600" b="1" dirty="0">
+                <a:solidFill>
+                  <a:srgbClr val="1C5A73"/>
+                </a:solidFill>
+                <a:latin typeface="Cambria" pitchFamily="34" charset="0"/>
+                <a:ea typeface="Cambria" pitchFamily="34" charset="-122"/>
+                <a:cs typeface="Cambria" pitchFamily="34" charset="-120"/>
+              </a:rPr>
+              <a:t>Our answers</a:t>
+            </a:r>
+            <a:endParaRPr lang="en-US" sz="1600" dirty="0"/>
+          </a:p>
+        </p:txBody>
+      </p:sp>
+      <p:sp>
+        <p:nvSpPr>
+          <p:cNvPr id="7" name="Text 5"/>
+          <p:cNvSpPr txBox="1"/>
+          <p:nvPr/>
+        </p:nvSpPr>
+        <p:spPr>
+          <a:xfrm>
+            <a:off x="6370168" y="2286000"/>
+            <a:ext cx="5227168" cy="2468880"/>
+          </a:xfrm>
+          <a:prstGeom prst="rect">
+            <a:avLst/>
+          </a:prstGeom>
+          <a:noFill/>
+          <a:ln/>
+        </p:spPr>
+        <p:txBody>
+          <a:bodyPr wrap="square" lIns="0" tIns="0" rIns="0" bIns="0" rtlCol="0" anchor="t"/>
+          <a:lstStyle/>
+          <a:p>
+            <a:pPr algn="l" marL="342900" indent="-342900">
+              <a:lnSpc>
+                <a:spcPct val="122000"/>
+              </a:lnSpc>
+              <a:spcAft>
+                <a:spcPts val="1000"/>
+              </a:spcAft>
+              <a:buSzPct val="100000"/>
+              <a:buChar char="•"/>
+            </a:pPr>
+            <a:r>
+              <a:rPr lang="en-US" sz="1350" dirty="0">
+                <a:solidFill>
+                  <a:srgbClr val="31424A"/>
+                </a:solidFill>
+                <a:latin typeface="Calibri" pitchFamily="34" charset="0"/>
+                <a:ea typeface="Calibri" pitchFamily="34" charset="-122"/>
+                <a:cs typeface="Calibri" pitchFamily="34" charset="-120"/>
+              </a:rPr>
+              <a:t>Start with accessible, secure pilot sites around Juba and in Western Equatoria.</a:t>
+            </a:r>
+            <a:endParaRPr lang="en-US" sz="1350" dirty="0"/>
+          </a:p>
+          <a:p>
+            <a:pPr algn="l" marL="342900" indent="-342900">
+              <a:lnSpc>
+                <a:spcPct val="122000"/>
+              </a:lnSpc>
+              <a:spcAft>
+                <a:spcPts val="1000"/>
+              </a:spcAft>
+              <a:buSzPct val="100000"/>
+              <a:buChar char="•"/>
+            </a:pPr>
+            <a:r>
+              <a:rPr lang="en-US" sz="1350" dirty="0">
+                <a:solidFill>
+                  <a:srgbClr val="31424A"/>
+                </a:solidFill>
+                <a:latin typeface="Calibri" pitchFamily="34" charset="0"/>
+                <a:ea typeface="Calibri" pitchFamily="34" charset="-122"/>
+                <a:cs typeface="Calibri" pitchFamily="34" charset="-120"/>
+              </a:rPr>
+              <a:t>Select only drained, drought-exposed plots, after a site assessment.</a:t>
+            </a:r>
+            <a:endParaRPr lang="en-US" sz="1350" dirty="0"/>
+          </a:p>
+          <a:p>
+            <a:pPr algn="l" marL="342900" indent="-342900">
+              <a:lnSpc>
+                <a:spcPct val="122000"/>
+              </a:lnSpc>
+              <a:spcAft>
+                <a:spcPts val="1000"/>
+              </a:spcAft>
+              <a:buSzPct val="100000"/>
+              <a:buChar char="•"/>
+            </a:pPr>
+            <a:r>
+              <a:rPr lang="en-US" sz="1350" dirty="0">
+                <a:solidFill>
+                  <a:srgbClr val="31424A"/>
+                </a:solidFill>
+                <a:latin typeface="Calibri" pitchFamily="34" charset="0"/>
+                <a:ea typeface="Calibri" pitchFamily="34" charset="-122"/>
+                <a:cs typeface="Calibri" pitchFamily="34" charset="-120"/>
+              </a:rPr>
+              <a:t>Work through FAO, NGOs and donor programmes that already supply inputs to farmers.</a:t>
+            </a:r>
+            <a:endParaRPr lang="en-US" sz="1350" dirty="0"/>
+          </a:p>
+          <a:p>
+            <a:pPr algn="l" marL="342900" indent="-342900">
+              <a:lnSpc>
+                <a:spcPct val="122000"/>
+              </a:lnSpc>
+              <a:spcAft>
+                <a:spcPts val="1000"/>
+              </a:spcAft>
+              <a:buSzPct val="100000"/>
+              <a:buChar char="•"/>
+            </a:pPr>
+            <a:r>
+              <a:rPr lang="en-US" sz="1350" dirty="0">
+                <a:solidFill>
+                  <a:srgbClr val="31424A"/>
+                </a:solidFill>
+                <a:latin typeface="Calibri" pitchFamily="34" charset="0"/>
+                <a:ea typeface="Calibri" pitchFamily="34" charset="-122"/>
+                <a:cs typeface="Calibri" pitchFamily="34" charset="-120"/>
+              </a:rPr>
+              <a:t>Group orders and hold a buffer stock in Juba before the planting season.</a:t>
+            </a:r>
+            <a:endParaRPr lang="en-US" sz="1350" dirty="0"/>
+          </a:p>
+        </p:txBody>
+      </p:sp>
+      <p:sp>
+        <p:nvSpPr>
+          <p:cNvPr id="8" name="Shape 6"/>
+          <p:cNvSpPr/>
+          <p:nvPr/>
+        </p:nvSpPr>
+        <p:spPr>
+          <a:xfrm>
+            <a:off x="594360" y="4846320"/>
+            <a:ext cx="11002975" cy="960120"/>
+          </a:xfrm>
+          <a:prstGeom prst="roundRect">
+            <a:avLst>
+              <a:gd name="adj" fmla="val 7619"/>
+            </a:avLst>
+          </a:prstGeom>
+          <a:solidFill>
+            <a:srgbClr val="EDF3F5"/>
+          </a:solidFill>
+          <a:ln w="9525">
+            <a:solidFill>
+              <a:srgbClr val="D6E2E7"/>
+            </a:solidFill>
+            <a:prstDash val="solid"/>
+          </a:ln>
+        </p:spPr>
+      </p:sp>
+      <p:sp>
+        <p:nvSpPr>
+          <p:cNvPr id="9" name="Text 7"/>
+          <p:cNvSpPr txBox="1"/>
+          <p:nvPr/>
+        </p:nvSpPr>
+        <p:spPr>
+          <a:xfrm>
+            <a:off x="822960" y="4983480"/>
+            <a:ext cx="10545775" cy="713232"/>
+          </a:xfrm>
+          <a:prstGeom prst="rect">
+            <a:avLst/>
+          </a:prstGeom>
+          <a:noFill/>
+          <a:ln/>
+        </p:spPr>
+        <p:txBody>
+          <a:bodyPr wrap="square" lIns="0" tIns="0" rIns="0" bIns="0" rtlCol="0" anchor="t"/>
+          <a:lstStyle/>
+          <a:p>
+            <a:pPr algn="l" indent="0" marL="0">
+              <a:lnSpc>
+                <a:spcPct val="118000"/>
+              </a:lnSpc>
+              <a:buNone/>
+            </a:pPr>
+            <a:r>
+              <a:rPr lang="en-US" sz="1100" dirty="0">
+                <a:solidFill>
+                  <a:srgbClr val="6C8089"/>
+                </a:solidFill>
+                <a:latin typeface="Calibri" pitchFamily="34" charset="0"/>
+                <a:ea typeface="Calibri" pitchFamily="34" charset="-122"/>
+                <a:cs typeface="Calibri" pitchFamily="34" charset="-120"/>
+              </a:rPr>
+              <a:t>Acrylamide analysis (Polymex laboratory, ISO 9001, content below 3.0 µg/g) and REACH / SVHC screening (SGS) are available on request, together with the SOHISCERT certificate valid until 4 September 2027.</a:t>
+            </a:r>
+            <a:endParaRPr lang="en-US" sz="1100" dirty="0"/>
+          </a:p>
+        </p:txBody>
+      </p:sp>
+      <p:sp>
+        <p:nvSpPr>
+          <p:cNvPr id="10" name="Text 8"/>
+          <p:cNvSpPr txBox="1"/>
+          <p:nvPr/>
+        </p:nvSpPr>
+        <p:spPr>
+          <a:xfrm>
+            <a:off x="502920" y="6382512"/>
+            <a:ext cx="8229600" cy="274320"/>
+          </a:xfrm>
+          <a:prstGeom prst="rect">
+            <a:avLst/>
+          </a:prstGeom>
+          <a:noFill/>
+          <a:ln/>
+        </p:spPr>
+        <p:txBody>
+          <a:bodyPr wrap="square" lIns="0" tIns="0" rIns="0" bIns="0" rtlCol="0" anchor="ctr"/>
+          <a:lstStyle/>
+          <a:p>
+            <a:pPr algn="l" indent="0" marL="0">
+              <a:buNone/>
+            </a:pPr>
+            <a:r>
+              <a:rPr lang="en-US" sz="950" dirty="0">
+                <a:solidFill>
+                  <a:srgbClr val="6C8089">
+                    <a:alpha val="80000"/>
+                  </a:srgbClr>
+                </a:solidFill>
+                <a:latin typeface="Calibri" pitchFamily="34" charset="0"/>
+                <a:ea typeface="Calibri" pitchFamily="34" charset="-122"/>
+                <a:cs typeface="Calibri" pitchFamily="34" charset="-120"/>
+              </a:rPr>
+              <a:t>Green Solutions · South Sudan market dossier</a:t>
+            </a:r>
+            <a:endParaRPr lang="en-US" sz="950" dirty="0"/>
+          </a:p>
+        </p:txBody>
+      </p:sp>
+      <p:sp>
+        <p:nvSpPr>
+          <p:cNvPr id="11" name="Text 9"/>
+          <p:cNvSpPr txBox="1"/>
+          <p:nvPr/>
+        </p:nvSpPr>
+        <p:spPr>
+          <a:xfrm>
+            <a:off x="11140135" y="6382512"/>
+            <a:ext cx="548640" cy="274320"/>
+          </a:xfrm>
+          <a:prstGeom prst="rect">
+            <a:avLst/>
+          </a:prstGeom>
+          <a:noFill/>
+          <a:ln/>
+        </p:spPr>
+        <p:txBody>
+          <a:bodyPr wrap="square" lIns="0" tIns="0" rIns="0" bIns="0" rtlCol="0" anchor="ctr"/>
+          <a:lstStyle/>
+          <a:p>
+            <a:pPr algn="r" indent="0" marL="0">
+              <a:buNone/>
+            </a:pPr>
+            <a:r>
+              <a:rPr lang="en-US" sz="950" dirty="0">
+                <a:solidFill>
+                  <a:srgbClr val="6C8089">
+                    <a:alpha val="80000"/>
+                  </a:srgbClr>
+                </a:solidFill>
+                <a:latin typeface="Calibri" pitchFamily="34" charset="0"/>
+                <a:ea typeface="Calibri" pitchFamily="34" charset="-122"/>
+                <a:cs typeface="Calibri" pitchFamily="34" charset="-120"/>
+              </a:rPr>
+              <a:t>13</a:t>
+            </a:r>
+            <a:endParaRPr lang="en-US" sz="950" dirty="0"/>
+          </a:p>
+        </p:txBody>
+      </p:sp>
+    </p:spTree>
+  </p:cSld>
+  <p:clrMapOvr>
+    <a:masterClrMapping/>
+  </p:clrMapOvr>
+</p:sld>
+</file>
+
+<file path=ppt/slides/slide15.xml><?xml version="1.0" encoding="utf-8"?>
+<p:sld xmlns:a="http://schemas.openxmlformats.org/drawingml/2006/main" xmlns:r="http://schemas.openxmlformats.org/officeDocument/2006/relationships" xmlns:p="http://schemas.openxmlformats.org/presentationml/2006/main">
+  <p:cSld name="Slide 15">
+    <p:bg>
+      <p:bgPr>
+        <a:solidFill>
+          <a:srgbClr val="FAFBFB"/>
+        </a:solidFill>
+      </p:bgPr>
+    </p:bg>
+    <p:spTree>
+      <p:nvGrpSpPr>
+        <p:cNvPr id="1" name=""/>
+        <p:cNvGrpSpPr/>
+        <p:nvPr/>
+      </p:nvGrpSpPr>
+      <p:grpSpPr>
+        <a:xfrm>
+          <a:off x="0" y="0"/>
+          <a:ext cx="0" cy="0"/>
+          <a:chOff x="0" y="0"/>
+          <a:chExt cx="0" cy="0"/>
+        </a:xfrm>
+      </p:grpSpPr>
+      <p:sp>
+        <p:nvSpPr>
+          <p:cNvPr id="2" name="Text 0"/>
+          <p:cNvSpPr txBox="1"/>
+          <p:nvPr/>
+        </p:nvSpPr>
+        <p:spPr>
+          <a:xfrm>
+            <a:off x="594360" y="411480"/>
+            <a:ext cx="10515600" cy="274320"/>
+          </a:xfrm>
+          <a:prstGeom prst="rect">
+            <a:avLst/>
+          </a:prstGeom>
+          <a:noFill/>
+          <a:ln/>
+        </p:spPr>
+        <p:txBody>
+          <a:bodyPr wrap="square" lIns="0" tIns="0" rIns="0" bIns="0" rtlCol="0" anchor="ctr"/>
+          <a:lstStyle/>
+          <a:p>
+            <a:pPr algn="l" indent="0" marL="0">
+              <a:buNone/>
+            </a:pPr>
+            <a:r>
+              <a:rPr lang="en-US" sz="1150" b="1" spc="200" kern="0" dirty="0">
+                <a:solidFill>
+                  <a:srgbClr val="E0A33E"/>
+                </a:solidFill>
+                <a:latin typeface="Calibri" pitchFamily="34" charset="0"/>
+                <a:ea typeface="Calibri" pitchFamily="34" charset="-122"/>
+                <a:cs typeface="Calibri" pitchFamily="34" charset="-120"/>
+              </a:rPr>
+              <a:t>Sources</a:t>
+            </a:r>
+            <a:endParaRPr lang="en-US" sz="1150" dirty="0"/>
+          </a:p>
+        </p:txBody>
+      </p:sp>
+      <p:sp>
+        <p:nvSpPr>
+          <p:cNvPr id="3" name="Text 1"/>
+          <p:cNvSpPr txBox="1"/>
+          <p:nvPr/>
+        </p:nvSpPr>
+        <p:spPr>
+          <a:xfrm>
+            <a:off x="594360" y="731520"/>
+            <a:ext cx="10881360" cy="731520"/>
+          </a:xfrm>
+          <a:prstGeom prst="rect">
+            <a:avLst/>
+          </a:prstGeom>
+          <a:noFill/>
+          <a:ln/>
+        </p:spPr>
+        <p:txBody>
+          <a:bodyPr wrap="square" lIns="0" tIns="0" rIns="0" bIns="0" rtlCol="0" anchor="ctr"/>
+          <a:lstStyle/>
+          <a:p>
+            <a:pPr algn="l" indent="0" marL="0">
+              <a:buNone/>
+            </a:pPr>
+            <a:r>
+              <a:rPr lang="en-US" sz="3000" b="1" dirty="0">
+                <a:solidFill>
+                  <a:srgbClr val="0E3546"/>
+                </a:solidFill>
+                <a:latin typeface="Cambria" pitchFamily="34" charset="0"/>
+                <a:ea typeface="Cambria" pitchFamily="34" charset="-122"/>
+                <a:cs typeface="Cambria" pitchFamily="34" charset="-120"/>
+              </a:rPr>
+              <a:t>Sources and working assumptions</a:t>
+            </a:r>
+            <a:endParaRPr lang="en-US" sz="3000" dirty="0"/>
+          </a:p>
+        </p:txBody>
+      </p:sp>
+      <p:sp>
+        <p:nvSpPr>
+          <p:cNvPr id="4" name="Text 2"/>
+          <p:cNvSpPr txBox="1"/>
+          <p:nvPr/>
+        </p:nvSpPr>
+        <p:spPr>
+          <a:xfrm>
+            <a:off x="594360" y="1783080"/>
+            <a:ext cx="5227168" cy="411480"/>
+          </a:xfrm>
+          <a:prstGeom prst="rect">
+            <a:avLst/>
+          </a:prstGeom>
+          <a:noFill/>
+          <a:ln/>
+        </p:spPr>
+        <p:txBody>
+          <a:bodyPr wrap="square" lIns="0" tIns="0" rIns="0" bIns="0" rtlCol="0" anchor="ctr"/>
+          <a:lstStyle/>
+          <a:p>
+            <a:pPr algn="l" indent="0" marL="0">
+              <a:buNone/>
+            </a:pPr>
+            <a:r>
+              <a:rPr lang="en-US" sz="1600" b="1" dirty="0">
+                <a:solidFill>
+                  <a:srgbClr val="1C5A73"/>
+                </a:solidFill>
+                <a:latin typeface="Cambria" pitchFamily="34" charset="0"/>
+                <a:ea typeface="Cambria" pitchFamily="34" charset="-122"/>
+                <a:cs typeface="Cambria" pitchFamily="34" charset="-120"/>
+              </a:rPr>
+              <a:t>Main sources</a:t>
+            </a:r>
+            <a:endParaRPr lang="en-US" sz="1600" dirty="0"/>
+          </a:p>
+        </p:txBody>
+      </p:sp>
+      <p:sp>
+        <p:nvSpPr>
+          <p:cNvPr id="5" name="Text 3"/>
+          <p:cNvSpPr txBox="1"/>
+          <p:nvPr/>
+        </p:nvSpPr>
+        <p:spPr>
+          <a:xfrm>
+            <a:off x="594360" y="2286000"/>
+            <a:ext cx="5227168" cy="2468880"/>
+          </a:xfrm>
+          <a:prstGeom prst="rect">
+            <a:avLst/>
+          </a:prstGeom>
+          <a:noFill/>
+          <a:ln/>
+        </p:spPr>
+        <p:txBody>
+          <a:bodyPr wrap="square" lIns="0" tIns="0" rIns="0" bIns="0" rtlCol="0" anchor="t"/>
+          <a:lstStyle/>
+          <a:p>
+            <a:pPr algn="l" marL="342900" indent="-342900">
+              <a:lnSpc>
+                <a:spcPct val="122000"/>
+              </a:lnSpc>
+              <a:spcAft>
+                <a:spcPts val="1000"/>
+              </a:spcAft>
+              <a:buSzPct val="100000"/>
+              <a:buChar char="•"/>
+            </a:pPr>
+            <a:r>
+              <a:rPr lang="en-US" sz="1350" dirty="0">
+                <a:solidFill>
+                  <a:srgbClr val="31424A"/>
+                </a:solidFill>
+                <a:latin typeface="Calibri" pitchFamily="34" charset="0"/>
+                <a:ea typeface="Calibri" pitchFamily="34" charset="-122"/>
+                <a:cs typeface="Calibri" pitchFamily="34" charset="-120"/>
+              </a:rPr>
+              <a:t>UNCCD, Drought in Numbers 2022: number and duration of droughts, +29% since 2000 versus 1980–1999.</a:t>
+            </a:r>
+            <a:endParaRPr lang="en-US" sz="1350" dirty="0"/>
+          </a:p>
+          <a:p>
+            <a:pPr algn="l" marL="342900" indent="-342900">
+              <a:lnSpc>
+                <a:spcPct val="122000"/>
+              </a:lnSpc>
+              <a:spcAft>
+                <a:spcPts val="1000"/>
+              </a:spcAft>
+              <a:buSzPct val="100000"/>
+              <a:buChar char="•"/>
+            </a:pPr>
+            <a:r>
+              <a:rPr lang="en-US" sz="1350" dirty="0">
+                <a:solidFill>
+                  <a:srgbClr val="31424A"/>
+                </a:solidFill>
+                <a:latin typeface="Calibri" pitchFamily="34" charset="0"/>
+                <a:ea typeface="Calibri" pitchFamily="34" charset="-122"/>
+                <a:cs typeface="Calibri" pitchFamily="34" charset="-120"/>
+              </a:rPr>
+              <a:t>UN-Water / FAO AQUASTAT, SDG indicator 6.4.2: definition and thresholds of water stress.</a:t>
+            </a:r>
+            <a:endParaRPr lang="en-US" sz="1350" dirty="0"/>
+          </a:p>
+          <a:p>
+            <a:pPr algn="l" marL="342900" indent="-342900">
+              <a:lnSpc>
+                <a:spcPct val="122000"/>
+              </a:lnSpc>
+              <a:spcAft>
+                <a:spcPts val="1000"/>
+              </a:spcAft>
+              <a:buSzPct val="100000"/>
+              <a:buChar char="•"/>
+            </a:pPr>
+            <a:r>
+              <a:rPr lang="en-US" sz="1350" dirty="0">
+                <a:solidFill>
+                  <a:srgbClr val="31424A"/>
+                </a:solidFill>
+                <a:latin typeface="Calibri" pitchFamily="34" charset="0"/>
+                <a:ea typeface="Calibri" pitchFamily="34" charset="-122"/>
+                <a:cs typeface="Calibri" pitchFamily="34" charset="-120"/>
+              </a:rPr>
+              <a:t>Photographs: Vetiverman (CC BY-SA 4.0), Lomoraronald (CC BY-SA 4.0), Kabang Bladina Gideon (CC BY-SA 4.0), Oxfam East Africa (CC BY 2.0) — via Wikimedia Commons.</a:t>
+            </a:r>
+            <a:endParaRPr lang="en-US" sz="1350" dirty="0"/>
+          </a:p>
+        </p:txBody>
+      </p:sp>
+      <p:sp>
+        <p:nvSpPr>
+          <p:cNvPr id="6" name="Text 4"/>
+          <p:cNvSpPr txBox="1"/>
+          <p:nvPr/>
+        </p:nvSpPr>
+        <p:spPr>
+          <a:xfrm>
+            <a:off x="6370168" y="1783080"/>
+            <a:ext cx="5227168" cy="411480"/>
+          </a:xfrm>
+          <a:prstGeom prst="rect">
+            <a:avLst/>
+          </a:prstGeom>
+          <a:noFill/>
+          <a:ln/>
+        </p:spPr>
+        <p:txBody>
+          <a:bodyPr wrap="square" lIns="0" tIns="0" rIns="0" bIns="0" rtlCol="0" anchor="ctr"/>
+          <a:lstStyle/>
+          <a:p>
+            <a:pPr algn="l" indent="0" marL="0">
+              <a:buNone/>
+            </a:pPr>
+            <a:r>
+              <a:rPr lang="en-US" sz="1600" b="1" dirty="0">
+                <a:solidFill>
+                  <a:srgbClr val="1C5A73"/>
+                </a:solidFill>
+                <a:latin typeface="Cambria" pitchFamily="34" charset="0"/>
+                <a:ea typeface="Cambria" pitchFamily="34" charset="-122"/>
+                <a:cs typeface="Cambria" pitchFamily="34" charset="-120"/>
+              </a:rPr>
+              <a:t>Working assumptions</a:t>
+            </a:r>
+            <a:endParaRPr lang="en-US" sz="1600" dirty="0"/>
+          </a:p>
+        </p:txBody>
+      </p:sp>
+      <p:sp>
+        <p:nvSpPr>
+          <p:cNvPr id="7" name="Text 5"/>
+          <p:cNvSpPr txBox="1"/>
+          <p:nvPr/>
+        </p:nvSpPr>
+        <p:spPr>
+          <a:xfrm>
+            <a:off x="6370168" y="2286000"/>
+            <a:ext cx="5227168" cy="2468880"/>
+          </a:xfrm>
+          <a:prstGeom prst="rect">
+            <a:avLst/>
+          </a:prstGeom>
+          <a:noFill/>
+          <a:ln/>
+        </p:spPr>
+        <p:txBody>
+          <a:bodyPr wrap="square" lIns="0" tIns="0" rIns="0" bIns="0" rtlCol="0" anchor="t"/>
+          <a:lstStyle/>
+          <a:p>
+            <a:pPr algn="l" marL="342900" indent="-342900">
+              <a:lnSpc>
+                <a:spcPct val="122000"/>
+              </a:lnSpc>
+              <a:spcAft>
+                <a:spcPts val="1000"/>
+              </a:spcAft>
+              <a:buSzPct val="100000"/>
+              <a:buChar char="•"/>
+            </a:pPr>
+            <a:r>
+              <a:rPr lang="en-US" sz="1350" dirty="0">
+                <a:solidFill>
+                  <a:srgbClr val="31424A"/>
+                </a:solidFill>
+                <a:latin typeface="Calibri" pitchFamily="34" charset="0"/>
+                <a:ea typeface="Calibri" pitchFamily="34" charset="-122"/>
+                <a:cs typeface="Calibri" pitchFamily="34" charset="-120"/>
+              </a:rPr>
+              <a:t>Figures are rounded orders of magnitude, taken from the latest public data available.</a:t>
+            </a:r>
+            <a:endParaRPr lang="en-US" sz="1350" dirty="0"/>
+          </a:p>
+          <a:p>
+            <a:pPr algn="l" marL="342900" indent="-342900">
+              <a:lnSpc>
+                <a:spcPct val="122000"/>
+              </a:lnSpc>
+              <a:spcAft>
+                <a:spcPts val="1000"/>
+              </a:spcAft>
+              <a:buSzPct val="100000"/>
+              <a:buChar char="•"/>
+            </a:pPr>
+            <a:r>
+              <a:rPr lang="en-US" sz="1350" dirty="0">
+                <a:solidFill>
+                  <a:srgbClr val="31424A"/>
+                </a:solidFill>
+                <a:latin typeface="Calibri" pitchFamily="34" charset="0"/>
+                <a:ea typeface="Calibri" pitchFamily="34" charset="-122"/>
+                <a:cs typeface="Calibri" pitchFamily="34" charset="-120"/>
+              </a:rPr>
+              <a:t>Water and yield gains are indicative and vary with soil, climate and crop.</a:t>
+            </a:r>
+            <a:endParaRPr lang="en-US" sz="1350" dirty="0"/>
+          </a:p>
+          <a:p>
+            <a:pPr algn="l" marL="342900" indent="-342900">
+              <a:lnSpc>
+                <a:spcPct val="122000"/>
+              </a:lnSpc>
+              <a:spcAft>
+                <a:spcPts val="1000"/>
+              </a:spcAft>
+              <a:buSzPct val="100000"/>
+              <a:buChar char="•"/>
+            </a:pPr>
+            <a:r>
+              <a:rPr lang="en-US" sz="1350" dirty="0">
+                <a:solidFill>
+                  <a:srgbClr val="31424A"/>
+                </a:solidFill>
+                <a:latin typeface="Calibri" pitchFamily="34" charset="0"/>
+                <a:ea typeface="Calibri" pitchFamily="34" charset="-122"/>
+                <a:cs typeface="Calibri" pitchFamily="34" charset="-120"/>
+              </a:rPr>
+              <a:t>Commercial working document: figures to be refreshed before any official submission.</a:t>
+            </a:r>
+            <a:endParaRPr lang="en-US" sz="1350" dirty="0"/>
+          </a:p>
+        </p:txBody>
+      </p:sp>
+      <p:sp>
+        <p:nvSpPr>
+          <p:cNvPr id="8" name="Shape 6"/>
+          <p:cNvSpPr/>
+          <p:nvPr/>
+        </p:nvSpPr>
+        <p:spPr>
+          <a:xfrm>
+            <a:off x="594360" y="4846320"/>
+            <a:ext cx="11002975" cy="960120"/>
+          </a:xfrm>
+          <a:prstGeom prst="roundRect">
+            <a:avLst>
+              <a:gd name="adj" fmla="val 7619"/>
+            </a:avLst>
+          </a:prstGeom>
+          <a:solidFill>
+            <a:srgbClr val="EDF3F5"/>
+          </a:solidFill>
+          <a:ln w="9525">
+            <a:solidFill>
+              <a:srgbClr val="D6E2E7"/>
+            </a:solidFill>
+            <a:prstDash val="solid"/>
+          </a:ln>
+        </p:spPr>
+      </p:sp>
+      <p:sp>
+        <p:nvSpPr>
+          <p:cNvPr id="9" name="Text 7"/>
+          <p:cNvSpPr txBox="1"/>
+          <p:nvPr/>
+        </p:nvSpPr>
+        <p:spPr>
+          <a:xfrm>
+            <a:off x="822960" y="4983480"/>
+            <a:ext cx="10545775" cy="713232"/>
+          </a:xfrm>
+          <a:prstGeom prst="rect">
+            <a:avLst/>
+          </a:prstGeom>
+          <a:noFill/>
+          <a:ln/>
+        </p:spPr>
+        <p:txBody>
+          <a:bodyPr wrap="square" lIns="0" tIns="0" rIns="0" bIns="0" rtlCol="0" anchor="t"/>
+          <a:lstStyle/>
+          <a:p>
+            <a:pPr algn="l" indent="0" marL="0">
+              <a:lnSpc>
+                <a:spcPct val="118000"/>
+              </a:lnSpc>
+              <a:buNone/>
+            </a:pPr>
+            <a:r>
+              <a:rPr lang="en-US" sz="1100" dirty="0">
+                <a:solidFill>
+                  <a:srgbClr val="6C8089"/>
+                </a:solidFill>
+                <a:latin typeface="Calibri" pitchFamily="34" charset="0"/>
+                <a:ea typeface="Calibri" pitchFamily="34" charset="-122"/>
+                <a:cs typeface="Calibri" pitchFamily="34" charset="-120"/>
+              </a:rPr>
+              <a:t>Trial reports, certificates (SOHISCERT, Polymex and SGS analyses) and technical sheets: available on request.</a:t>
+            </a:r>
+            <a:endParaRPr lang="en-US" sz="1100" dirty="0"/>
+          </a:p>
+        </p:txBody>
+      </p:sp>
+      <p:sp>
+        <p:nvSpPr>
+          <p:cNvPr id="10" name="Text 8"/>
+          <p:cNvSpPr txBox="1"/>
+          <p:nvPr/>
+        </p:nvSpPr>
+        <p:spPr>
+          <a:xfrm>
+            <a:off x="502920" y="6382512"/>
+            <a:ext cx="8229600" cy="274320"/>
+          </a:xfrm>
+          <a:prstGeom prst="rect">
+            <a:avLst/>
+          </a:prstGeom>
+          <a:noFill/>
+          <a:ln/>
+        </p:spPr>
+        <p:txBody>
+          <a:bodyPr wrap="square" lIns="0" tIns="0" rIns="0" bIns="0" rtlCol="0" anchor="ctr"/>
+          <a:lstStyle/>
+          <a:p>
+            <a:pPr algn="l" indent="0" marL="0">
+              <a:buNone/>
+            </a:pPr>
+            <a:r>
+              <a:rPr lang="en-US" sz="950" dirty="0">
+                <a:solidFill>
+                  <a:srgbClr val="6C8089">
+                    <a:alpha val="80000"/>
+                  </a:srgbClr>
+                </a:solidFill>
+                <a:latin typeface="Calibri" pitchFamily="34" charset="0"/>
+                <a:ea typeface="Calibri" pitchFamily="34" charset="-122"/>
+                <a:cs typeface="Calibri" pitchFamily="34" charset="-120"/>
+              </a:rPr>
+              <a:t>Green Solutions · South Sudan market dossier</a:t>
+            </a:r>
+            <a:endParaRPr lang="en-US" sz="950" dirty="0"/>
+          </a:p>
+        </p:txBody>
+      </p:sp>
+      <p:sp>
+        <p:nvSpPr>
+          <p:cNvPr id="11" name="Text 9"/>
+          <p:cNvSpPr txBox="1"/>
+          <p:nvPr/>
+        </p:nvSpPr>
+        <p:spPr>
+          <a:xfrm>
+            <a:off x="11140135" y="6382512"/>
+            <a:ext cx="548640" cy="274320"/>
+          </a:xfrm>
+          <a:prstGeom prst="rect">
+            <a:avLst/>
+          </a:prstGeom>
+          <a:noFill/>
+          <a:ln/>
+        </p:spPr>
+        <p:txBody>
+          <a:bodyPr wrap="square" lIns="0" tIns="0" rIns="0" bIns="0" rtlCol="0" anchor="ctr"/>
+          <a:lstStyle/>
+          <a:p>
+            <a:pPr algn="r" indent="0" marL="0">
+              <a:buNone/>
+            </a:pPr>
+            <a:r>
+              <a:rPr lang="en-US" sz="950" dirty="0">
+                <a:solidFill>
+                  <a:srgbClr val="6C8089">
+                    <a:alpha val="80000"/>
+                  </a:srgbClr>
+                </a:solidFill>
+                <a:latin typeface="Calibri" pitchFamily="34" charset="0"/>
+                <a:ea typeface="Calibri" pitchFamily="34" charset="-122"/>
+                <a:cs typeface="Calibri" pitchFamily="34" charset="-120"/>
+              </a:rPr>
+              <a:t>14</a:t>
+            </a:r>
+            <a:endParaRPr lang="en-US" sz="950" dirty="0"/>
+          </a:p>
+        </p:txBody>
+      </p:sp>
+    </p:spTree>
+  </p:cSld>
+  <p:clrMapOvr>
+    <a:masterClrMapping/>
+  </p:clrMapOvr>
+</p:sld>
+</file>
+
+<file path=ppt/slides/slide16.xml><?xml version="1.0" encoding="utf-8"?>
+<p:sld xmlns:a="http://schemas.openxmlformats.org/drawingml/2006/main" xmlns:r="http://schemas.openxmlformats.org/officeDocument/2006/relationships" xmlns:p="http://schemas.openxmlformats.org/presentationml/2006/main">
+  <p:cSld name="Slide 16">
     <p:spTree>
       <p:nvGrpSpPr>
         <p:cNvPr id="1" name=""/>
@@ -6214,7 +7753,7 @@
       </p:sp>
       <p:pic>
         <p:nvPicPr>
-          <p:cNvPr id="6" name="Image 1" descr="C:\Users\Utilisateur\dev\green-solutions-web\scripts\dossiers\sceau-aim-clair.png">    </p:cNvPr>
+          <p:cNvPr id="6" name="Image 1" descr="/workspace/scratch/50eb4f7d8e13/green-solutions-web/scripts/dossiers/sceau-aim-clair.png">    </p:cNvPr>
           <p:cNvPicPr>
             <a:picLocks noChangeAspect="1"/>
           </p:cNvPicPr>
@@ -6314,7 +7853,7 @@
                 <a:ea typeface="Calibri" pitchFamily="34" charset="-122"/>
                 <a:cs typeface="Calibri" pitchFamily="34" charset="-120"/>
               </a:rPr>
-              <a:t>13</a:t>
+              <a:t>15</a:t>
             </a:r>
             <a:endParaRPr lang="en-US" sz="950" dirty="0"/>
           </a:p>
@@ -7409,7 +8948,7 @@
                 <a:ea typeface="Calibri" pitchFamily="34" charset="-122"/>
                 <a:cs typeface="Calibri" pitchFamily="34" charset="-120"/>
               </a:rPr>
-              <a:t>THE FOOD BALANCE</a:t>
+              <a:t>DROUGHT AND WATER STRESS</a:t>
             </a:r>
             <a:endParaRPr lang="en-US" sz="1150" dirty="0"/>
           </a:p>
@@ -7448,7 +8987,7 @@
                 <a:ea typeface="Cambria" pitchFamily="34" charset="-122"/>
                 <a:cs typeface="Cambria" pitchFamily="34" charset="-120"/>
               </a:rPr>
-              <a:t>Local cereal output covers about three quarters of needs</a:t>
+              <a:t>Pressure is rising, but risk remains local</a:t>
             </a:r>
             <a:endParaRPr lang="en-US" sz="3000" dirty="0"/>
           </a:p>
@@ -7530,7 +9069,7 @@
                 <a:ea typeface="Cambria" pitchFamily="34" charset="-122"/>
                 <a:cs typeface="Cambria" pitchFamily="34" charset="-120"/>
               </a:rPr>
-              <a:t>What this implies</a:t>
+              <a:t>Two indicators, not a shortcut</a:t>
             </a:r>
             <a:endParaRPr lang="en-US" sz="1300" dirty="0"/>
           </a:p>
@@ -7572,7 +9111,7 @@
                 <a:ea typeface="Calibri" pitchFamily="34" charset="-122"/>
                 <a:cs typeface="Calibri" pitchFamily="34" charset="-120"/>
               </a:rPr>
-              <a:t>The gap of roughly 25 % is filled by imports from neighbouring countries and by food assistance.</a:t>
+              <a:t>Worldwide, the number and duration of droughts have risen by 29% since 2000 compared with the two previous decades.</a:t>
             </a:r>
             <a:endParaRPr lang="en-US" sz="1200" dirty="0"/>
           </a:p>
@@ -7601,7 +9140,7 @@
                 <a:ea typeface="Calibri" pitchFamily="34" charset="-122"/>
                 <a:cs typeface="Calibri" pitchFamily="34" charset="-120"/>
               </a:rPr>
-              <a:t>Every tonne produced locally on a reliable basis replaces a trucked-in tonne whose price rises with fuel costs and insecurity.</a:t>
+              <a:t>Water stress measures something different: withdrawals as a share of renewable resources available after environmental needs. This global signal is therefore not a country forecast; it must be read alongside local rainfall, aquifers, seasons and uses.</a:t>
             </a:r>
             <a:endParaRPr lang="en-US" sz="1200" dirty="0"/>
           </a:p>
@@ -7754,7 +9293,7 @@
                 <a:ea typeface="Calibri" pitchFamily="34" charset="-122"/>
                 <a:cs typeface="Calibri" pitchFamily="34" charset="-120"/>
               </a:rPr>
-              <a:t>ECONOMY AND FOOD SECURITY</a:t>
+              <a:t>THE FOOD BALANCE</a:t>
             </a:r>
             <a:endParaRPr lang="en-US" sz="1150" dirty="0"/>
           </a:p>
@@ -7793,26 +9332,42 @@
                 <a:ea typeface="Cambria" pitchFamily="34" charset="-122"/>
                 <a:cs typeface="Cambria" pitchFamily="34" charset="-120"/>
               </a:rPr>
-              <a:t>An oil economy where most people live from the land</a:t>
+              <a:t>Local cereal output covers about three quarters of needs</a:t>
             </a:r>
             <a:endParaRPr lang="en-US" sz="3000" dirty="0"/>
           </a:p>
         </p:txBody>
       </p:sp>
-      <p:sp>
-        <p:nvSpPr>
-          <p:cNvPr id="4" name="Shape 2"/>
+      <p:graphicFrame>
+        <p:nvGraphicFramePr>
+          <p:cNvPr id="4" name="Chart 0" descr=""/>
+          <p:cNvGraphicFramePr/>
+          <p:nvPr/>
+        </p:nvGraphicFramePr>
+        <p:xfrm>
+          <a:off x="594360" y="1783080"/>
+          <a:ext cx="7360920" cy="3977640"/>
+        </p:xfrm>
+        <a:graphic xmlns:a="http://schemas.openxmlformats.org/drawingml/2006/main">
+          <a:graphicData uri="http://schemas.openxmlformats.org/drawingml/2006/chart">
+            <c:chart xmlns:c="http://schemas.openxmlformats.org/drawingml/2006/chart" r:id="rId1"/>
+          </a:graphicData>
+        </a:graphic>
+      </p:graphicFrame>
+      <p:sp>
+        <p:nvSpPr>
+          <p:cNvPr id="5" name="Shape 2"/>
           <p:cNvSpPr/>
           <p:nvPr/>
         </p:nvSpPr>
         <p:spPr>
           <a:xfrm>
-            <a:off x="594360" y="1874520"/>
-            <a:ext cx="3484778" cy="2514600"/>
+            <a:off x="8275320" y="1783080"/>
+            <a:ext cx="3291840" cy="3977640"/>
           </a:xfrm>
           <a:prstGeom prst="roundRect">
             <a:avLst>
-              <a:gd name="adj" fmla="val 3636"/>
+              <a:gd name="adj" fmla="val 2778"/>
             </a:avLst>
           </a:prstGeom>
           <a:solidFill>
@@ -7828,14 +9383,14 @@
       </p:sp>
       <p:sp>
         <p:nvSpPr>
-          <p:cNvPr id="5" name="Text 3"/>
-          <p:cNvSpPr txBox="1"/>
-          <p:nvPr/>
-        </p:nvSpPr>
-        <p:spPr>
-          <a:xfrm>
-            <a:off x="777240" y="2148840"/>
-            <a:ext cx="3119018" cy="960120"/>
+          <p:cNvPr id="6" name="Text 3"/>
+          <p:cNvSpPr txBox="1"/>
+          <p:nvPr/>
+        </p:nvSpPr>
+        <p:spPr>
+          <a:xfrm>
+            <a:off x="8503920" y="2011680"/>
+            <a:ext cx="2834640" cy="457200"/>
           </a:xfrm>
           <a:prstGeom prst="rect">
             <a:avLst/>
@@ -7847,11 +9402,11 @@
           <a:bodyPr wrap="square" lIns="0" tIns="0" rIns="0" bIns="0" rtlCol="0" anchor="ctr"/>
           <a:lstStyle/>
           <a:p>
-            <a:pPr algn="ctr" indent="0" marL="0">
-              <a:buNone/>
-            </a:pPr>
-            <a:r>
-              <a:rPr lang="en-US" sz="3800" b="1" dirty="0">
+            <a:pPr algn="l" indent="0" marL="0">
+              <a:buNone/>
+            </a:pPr>
+            <a:r>
+              <a:rPr lang="en-US" sz="1300" b="1" dirty="0">
                 <a:solidFill>
                   <a:srgbClr val="1C5A73"/>
                 </a:solidFill>
@@ -7859,280 +9414,22 @@
                 <a:ea typeface="Cambria" pitchFamily="34" charset="-122"/>
                 <a:cs typeface="Cambria" pitchFamily="34" charset="-120"/>
               </a:rPr>
-              <a:t>≈ 90 %</a:t>
-            </a:r>
-            <a:endParaRPr lang="en-US" sz="3800" dirty="0"/>
-          </a:p>
-        </p:txBody>
-      </p:sp>
-      <p:sp>
-        <p:nvSpPr>
-          <p:cNvPr id="6" name="Text 4"/>
-          <p:cNvSpPr txBox="1"/>
-          <p:nvPr/>
-        </p:nvSpPr>
-        <p:spPr>
-          <a:xfrm>
-            <a:off x="795528" y="3154680"/>
-            <a:ext cx="3082442" cy="1051560"/>
-          </a:xfrm>
-          <a:prstGeom prst="rect">
-            <a:avLst/>
-          </a:prstGeom>
-          <a:noFill/>
-          <a:ln/>
-        </p:spPr>
-        <p:txBody>
-          <a:bodyPr wrap="square" lIns="0" tIns="0" rIns="0" bIns="0" rtlCol="0" anchor="t"/>
-          <a:lstStyle/>
-          <a:p>
-            <a:pPr algn="ctr" indent="0" marL="0">
-              <a:lnSpc>
-                <a:spcPct val="118000"/>
-              </a:lnSpc>
-              <a:buNone/>
-            </a:pPr>
-            <a:r>
-              <a:rPr lang="en-US" sz="1250" dirty="0">
-                <a:solidFill>
-                  <a:srgbClr val="31424A"/>
-                </a:solidFill>
-                <a:latin typeface="Calibri" pitchFamily="34" charset="0"/>
-                <a:ea typeface="Calibri" pitchFamily="34" charset="-122"/>
-                <a:cs typeface="Calibri" pitchFamily="34" charset="-120"/>
-              </a:rPr>
-              <a:t>of export earnings come from oil</a:t>
-            </a:r>
-            <a:endParaRPr lang="en-US" sz="1250" dirty="0"/>
-          </a:p>
-        </p:txBody>
-      </p:sp>
-      <p:sp>
-        <p:nvSpPr>
-          <p:cNvPr id="7" name="Shape 5"/>
-          <p:cNvSpPr/>
-          <p:nvPr/>
-        </p:nvSpPr>
-        <p:spPr>
-          <a:xfrm>
-            <a:off x="4353458" y="1874520"/>
-            <a:ext cx="3484778" cy="2514600"/>
-          </a:xfrm>
-          <a:prstGeom prst="roundRect">
-            <a:avLst>
-              <a:gd name="adj" fmla="val 3636"/>
-            </a:avLst>
-          </a:prstGeom>
-          <a:solidFill>
-            <a:srgbClr val="EDF3F5"/>
-          </a:solidFill>
-          <a:ln w="9525">
-            <a:solidFill>
-              <a:srgbClr val="D6E2E7"/>
-            </a:solidFill>
-            <a:prstDash val="solid"/>
-          </a:ln>
-        </p:spPr>
-      </p:sp>
-      <p:sp>
-        <p:nvSpPr>
-          <p:cNvPr id="8" name="Text 6"/>
-          <p:cNvSpPr txBox="1"/>
-          <p:nvPr/>
-        </p:nvSpPr>
-        <p:spPr>
-          <a:xfrm>
-            <a:off x="4536338" y="2148840"/>
-            <a:ext cx="3119018" cy="960120"/>
-          </a:xfrm>
-          <a:prstGeom prst="rect">
-            <a:avLst/>
-          </a:prstGeom>
-          <a:noFill/>
-          <a:ln/>
-        </p:spPr>
-        <p:txBody>
-          <a:bodyPr wrap="square" lIns="0" tIns="0" rIns="0" bIns="0" rtlCol="0" anchor="ctr"/>
-          <a:lstStyle/>
-          <a:p>
-            <a:pPr algn="ctr" indent="0" marL="0">
-              <a:buNone/>
-            </a:pPr>
-            <a:r>
-              <a:rPr lang="en-US" sz="3800" b="1" dirty="0">
-                <a:solidFill>
-                  <a:srgbClr val="1C5A73"/>
-                </a:solidFill>
-                <a:latin typeface="Cambria" pitchFamily="34" charset="0"/>
-                <a:ea typeface="Cambria" pitchFamily="34" charset="-122"/>
-                <a:cs typeface="Cambria" pitchFamily="34" charset="-120"/>
-              </a:rPr>
-              <a:t>≈ 12 M</a:t>
-            </a:r>
-            <a:endParaRPr lang="en-US" sz="3800" dirty="0"/>
-          </a:p>
-        </p:txBody>
-      </p:sp>
-      <p:sp>
-        <p:nvSpPr>
-          <p:cNvPr id="9" name="Text 7"/>
-          <p:cNvSpPr txBox="1"/>
-          <p:nvPr/>
-        </p:nvSpPr>
-        <p:spPr>
-          <a:xfrm>
-            <a:off x="4554626" y="3154680"/>
-            <a:ext cx="3082442" cy="1051560"/>
-          </a:xfrm>
-          <a:prstGeom prst="rect">
-            <a:avLst/>
-          </a:prstGeom>
-          <a:noFill/>
-          <a:ln/>
-        </p:spPr>
-        <p:txBody>
-          <a:bodyPr wrap="square" lIns="0" tIns="0" rIns="0" bIns="0" rtlCol="0" anchor="t"/>
-          <a:lstStyle/>
-          <a:p>
-            <a:pPr algn="ctr" indent="0" marL="0">
-              <a:lnSpc>
-                <a:spcPct val="118000"/>
-              </a:lnSpc>
-              <a:buNone/>
-            </a:pPr>
-            <a:r>
-              <a:rPr lang="en-US" sz="1250" dirty="0">
-                <a:solidFill>
-                  <a:srgbClr val="31424A"/>
-                </a:solidFill>
-                <a:latin typeface="Calibri" pitchFamily="34" charset="0"/>
-                <a:ea typeface="Calibri" pitchFamily="34" charset="-122"/>
-                <a:cs typeface="Calibri" pitchFamily="34" charset="-120"/>
-              </a:rPr>
-              <a:t>inhabitants, most of them in rural areas</a:t>
-            </a:r>
-            <a:endParaRPr lang="en-US" sz="1250" dirty="0"/>
-          </a:p>
-        </p:txBody>
-      </p:sp>
-      <p:sp>
-        <p:nvSpPr>
-          <p:cNvPr id="10" name="Shape 8"/>
-          <p:cNvSpPr/>
-          <p:nvPr/>
-        </p:nvSpPr>
-        <p:spPr>
-          <a:xfrm>
-            <a:off x="8112557" y="1874520"/>
-            <a:ext cx="3484778" cy="2514600"/>
-          </a:xfrm>
-          <a:prstGeom prst="roundRect">
-            <a:avLst>
-              <a:gd name="adj" fmla="val 3636"/>
-            </a:avLst>
-          </a:prstGeom>
-          <a:solidFill>
-            <a:srgbClr val="EDF3F5"/>
-          </a:solidFill>
-          <a:ln w="9525">
-            <a:solidFill>
-              <a:srgbClr val="D6E2E7"/>
-            </a:solidFill>
-            <a:prstDash val="solid"/>
-          </a:ln>
-        </p:spPr>
-      </p:sp>
-      <p:sp>
-        <p:nvSpPr>
-          <p:cNvPr id="11" name="Text 9"/>
-          <p:cNvSpPr txBox="1"/>
-          <p:nvPr/>
-        </p:nvSpPr>
-        <p:spPr>
-          <a:xfrm>
-            <a:off x="8295437" y="2148840"/>
-            <a:ext cx="3119018" cy="960120"/>
-          </a:xfrm>
-          <a:prstGeom prst="rect">
-            <a:avLst/>
-          </a:prstGeom>
-          <a:noFill/>
-          <a:ln/>
-        </p:spPr>
-        <p:txBody>
-          <a:bodyPr wrap="square" lIns="0" tIns="0" rIns="0" bIns="0" rtlCol="0" anchor="ctr"/>
-          <a:lstStyle/>
-          <a:p>
-            <a:pPr algn="ctr" indent="0" marL="0">
-              <a:buNone/>
-            </a:pPr>
-            <a:r>
-              <a:rPr lang="en-US" sz="3800" b="1" dirty="0">
-                <a:solidFill>
-                  <a:srgbClr val="1C5A73"/>
-                </a:solidFill>
-                <a:latin typeface="Cambria" pitchFamily="34" charset="0"/>
-                <a:ea typeface="Cambria" pitchFamily="34" charset="-122"/>
-                <a:cs typeface="Cambria" pitchFamily="34" charset="-120"/>
-              </a:rPr>
-              <a:t>2011</a:t>
-            </a:r>
-            <a:endParaRPr lang="en-US" sz="3800" dirty="0"/>
-          </a:p>
-        </p:txBody>
-      </p:sp>
-      <p:sp>
-        <p:nvSpPr>
-          <p:cNvPr id="12" name="Text 10"/>
-          <p:cNvSpPr txBox="1"/>
-          <p:nvPr/>
-        </p:nvSpPr>
-        <p:spPr>
-          <a:xfrm>
-            <a:off x="8313725" y="3154680"/>
-            <a:ext cx="3082442" cy="1051560"/>
-          </a:xfrm>
-          <a:prstGeom prst="rect">
-            <a:avLst/>
-          </a:prstGeom>
-          <a:noFill/>
-          <a:ln/>
-        </p:spPr>
-        <p:txBody>
-          <a:bodyPr wrap="square" lIns="0" tIns="0" rIns="0" bIns="0" rtlCol="0" anchor="t"/>
-          <a:lstStyle/>
-          <a:p>
-            <a:pPr algn="ctr" indent="0" marL="0">
-              <a:lnSpc>
-                <a:spcPct val="118000"/>
-              </a:lnSpc>
-              <a:buNone/>
-            </a:pPr>
-            <a:r>
-              <a:rPr lang="en-US" sz="1250" dirty="0">
-                <a:solidFill>
-                  <a:srgbClr val="31424A"/>
-                </a:solidFill>
-                <a:latin typeface="Calibri" pitchFamily="34" charset="0"/>
-                <a:ea typeface="Calibri" pitchFamily="34" charset="-122"/>
-                <a:cs typeface="Calibri" pitchFamily="34" charset="-120"/>
-              </a:rPr>
-              <a:t>independence, with agriculture named a priority for diversification</a:t>
-            </a:r>
-            <a:endParaRPr lang="en-US" sz="1250" dirty="0"/>
-          </a:p>
-        </p:txBody>
-      </p:sp>
-      <p:sp>
-        <p:nvSpPr>
-          <p:cNvPr id="13" name="Text 11"/>
-          <p:cNvSpPr txBox="1"/>
-          <p:nvPr/>
-        </p:nvSpPr>
-        <p:spPr>
-          <a:xfrm>
-            <a:off x="594360" y="4709160"/>
-            <a:ext cx="11002975" cy="1097280"/>
+              <a:t>What this implies</a:t>
+            </a:r>
+            <a:endParaRPr lang="en-US" sz="1300" dirty="0"/>
+          </a:p>
+        </p:txBody>
+      </p:sp>
+      <p:sp>
+        <p:nvSpPr>
+          <p:cNvPr id="7" name="Text 4"/>
+          <p:cNvSpPr txBox="1"/>
+          <p:nvPr/>
+        </p:nvSpPr>
+        <p:spPr>
+          <a:xfrm>
+            <a:off x="8503920" y="2560320"/>
+            <a:ext cx="2834640" cy="3017520"/>
           </a:xfrm>
           <a:prstGeom prst="rect">
             <a:avLst/>
@@ -8146,12 +9443,12 @@
           <a:p>
             <a:pPr algn="l" indent="0" marL="0">
               <a:lnSpc>
-                <a:spcPct val="130000"/>
+                <a:spcPct val="125000"/>
               </a:lnSpc>
               <a:buNone/>
             </a:pPr>
             <a:r>
-              <a:rPr lang="en-US" sz="1350" dirty="0">
+              <a:rPr lang="en-US" sz="1200" dirty="0">
                 <a:solidFill>
                   <a:srgbClr val="31424A"/>
                 </a:solidFill>
@@ -8159,15 +9456,44 @@
                 <a:ea typeface="Calibri" pitchFamily="34" charset="-122"/>
                 <a:cs typeface="Calibri" pitchFamily="34" charset="-120"/>
               </a:rPr>
-              <a:t>Imports, humanitarian assistance and trade with Uganda, Kenya and Sudan fill much of the gap between local output and needs. Every stable gain in local production, storage and transport reduces exposure to price shocks and supply interruptions.</a:t>
-            </a:r>
-            <a:endParaRPr lang="en-US" sz="1350" dirty="0"/>
-          </a:p>
-        </p:txBody>
-      </p:sp>
-      <p:sp>
-        <p:nvSpPr>
-          <p:cNvPr id="14" name="Text 12"/>
+              <a:t>The gap of roughly 25 % is filled by imports from neighbouring countries and by food assistance.</a:t>
+            </a:r>
+            <a:endParaRPr lang="en-US" sz="1200" dirty="0"/>
+          </a:p>
+          <a:p>
+            <a:pPr algn="l" indent="0" marL="0">
+              <a:lnSpc>
+                <a:spcPct val="125000"/>
+              </a:lnSpc>
+              <a:buNone/>
+            </a:pPr>
+            <a:endParaRPr lang="en-US" sz="1200" dirty="0"/>
+          </a:p>
+          <a:p>
+            <a:pPr algn="l" indent="0" marL="0">
+              <a:lnSpc>
+                <a:spcPct val="125000"/>
+              </a:lnSpc>
+              <a:buNone/>
+            </a:pPr>
+            <a:r>
+              <a:rPr lang="en-US" sz="1200" dirty="0">
+                <a:solidFill>
+                  <a:srgbClr val="31424A"/>
+                </a:solidFill>
+                <a:latin typeface="Calibri" pitchFamily="34" charset="0"/>
+                <a:ea typeface="Calibri" pitchFamily="34" charset="-122"/>
+                <a:cs typeface="Calibri" pitchFamily="34" charset="-120"/>
+              </a:rPr>
+              <a:t>Every tonne produced locally on a reliable basis replaces a trucked-in tonne whose price rises with fuel costs and insecurity.</a:t>
+            </a:r>
+            <a:endParaRPr lang="en-US" sz="1200" dirty="0"/>
+          </a:p>
+        </p:txBody>
+      </p:sp>
+      <p:sp>
+        <p:nvSpPr>
+          <p:cNvPr id="8" name="Text 5"/>
           <p:cNvSpPr txBox="1"/>
           <p:nvPr/>
         </p:nvSpPr>
@@ -8208,7 +9534,7 @@
       </p:sp>
       <p:sp>
         <p:nvSpPr>
-          <p:cNvPr id="15" name="Text 13"/>
+          <p:cNvPr id="9" name="Text 6"/>
           <p:cNvSpPr txBox="1"/>
           <p:nvPr/>
         </p:nvSpPr>
@@ -8312,7 +9638,7 @@
                 <a:ea typeface="Calibri" pitchFamily="34" charset="-122"/>
                 <a:cs typeface="Calibri" pitchFamily="34" charset="-120"/>
               </a:rPr>
-              <a:t>THE MAIN CROPS</a:t>
+              <a:t>ECONOMY AND FOOD SECURITY</a:t>
             </a:r>
             <a:endParaRPr lang="en-US" sz="1150" dirty="0"/>
           </a:p>
@@ -8351,42 +9677,26 @@
                 <a:ea typeface="Cambria" pitchFamily="34" charset="-122"/>
                 <a:cs typeface="Cambria" pitchFamily="34" charset="-120"/>
               </a:rPr>
-              <a:t>Sorghum dominates the cereal area</a:t>
+              <a:t>An oil economy where most people live from the land</a:t>
             </a:r>
             <a:endParaRPr lang="en-US" sz="3000" dirty="0"/>
           </a:p>
         </p:txBody>
       </p:sp>
-      <p:graphicFrame>
-        <p:nvGraphicFramePr>
-          <p:cNvPr id="4" name="Chart 0" descr=""/>
-          <p:cNvGraphicFramePr/>
-          <p:nvPr/>
-        </p:nvGraphicFramePr>
-        <p:xfrm>
-          <a:off x="594360" y="1783080"/>
-          <a:ext cx="7360920" cy="3977640"/>
-        </p:xfrm>
-        <a:graphic xmlns:a="http://schemas.openxmlformats.org/drawingml/2006/main">
-          <a:graphicData uri="http://schemas.openxmlformats.org/drawingml/2006/chart">
-            <c:chart xmlns:c="http://schemas.openxmlformats.org/drawingml/2006/chart" r:id="rId1"/>
-          </a:graphicData>
-        </a:graphic>
-      </p:graphicFrame>
-      <p:sp>
-        <p:nvSpPr>
-          <p:cNvPr id="5" name="Shape 2"/>
+      <p:sp>
+        <p:nvSpPr>
+          <p:cNvPr id="4" name="Shape 2"/>
           <p:cNvSpPr/>
           <p:nvPr/>
         </p:nvSpPr>
         <p:spPr>
           <a:xfrm>
-            <a:off x="8275320" y="1783080"/>
-            <a:ext cx="3291840" cy="3977640"/>
+            <a:off x="594360" y="1874520"/>
+            <a:ext cx="3484778" cy="2514600"/>
           </a:xfrm>
           <a:prstGeom prst="roundRect">
             <a:avLst>
-              <a:gd name="adj" fmla="val 2778"/>
+              <a:gd name="adj" fmla="val 3636"/>
             </a:avLst>
           </a:prstGeom>
           <a:solidFill>
@@ -8402,14 +9712,14 @@
       </p:sp>
       <p:sp>
         <p:nvSpPr>
-          <p:cNvPr id="6" name="Text 3"/>
-          <p:cNvSpPr txBox="1"/>
-          <p:nvPr/>
-        </p:nvSpPr>
-        <p:spPr>
-          <a:xfrm>
-            <a:off x="8503920" y="2011680"/>
-            <a:ext cx="2834640" cy="457200"/>
+          <p:cNvPr id="5" name="Text 3"/>
+          <p:cNvSpPr txBox="1"/>
+          <p:nvPr/>
+        </p:nvSpPr>
+        <p:spPr>
+          <a:xfrm>
+            <a:off x="777240" y="2148840"/>
+            <a:ext cx="3119018" cy="960120"/>
           </a:xfrm>
           <a:prstGeom prst="rect">
             <a:avLst/>
@@ -8421,11 +9731,11 @@
           <a:bodyPr wrap="square" lIns="0" tIns="0" rIns="0" bIns="0" rtlCol="0" anchor="ctr"/>
           <a:lstStyle/>
           <a:p>
-            <a:pPr algn="l" indent="0" marL="0">
-              <a:buNone/>
-            </a:pPr>
-            <a:r>
-              <a:rPr lang="en-US" sz="1300" b="1" dirty="0">
+            <a:pPr algn="ctr" indent="0" marL="0">
+              <a:buNone/>
+            </a:pPr>
+            <a:r>
+              <a:rPr lang="en-US" sz="3800" b="1" dirty="0">
                 <a:solidFill>
                   <a:srgbClr val="1C5A73"/>
                 </a:solidFill>
@@ -8433,22 +9743,280 @@
                 <a:ea typeface="Cambria" pitchFamily="34" charset="-122"/>
                 <a:cs typeface="Cambria" pitchFamily="34" charset="-120"/>
               </a:rPr>
-              <a:t>Reading</a:t>
-            </a:r>
-            <a:endParaRPr lang="en-US" sz="1300" dirty="0"/>
-          </a:p>
-        </p:txBody>
-      </p:sp>
-      <p:sp>
-        <p:nvSpPr>
-          <p:cNvPr id="7" name="Text 4"/>
-          <p:cNvSpPr txBox="1"/>
-          <p:nvPr/>
-        </p:nvSpPr>
-        <p:spPr>
-          <a:xfrm>
-            <a:off x="8503920" y="2560320"/>
-            <a:ext cx="2834640" cy="3017520"/>
+              <a:t>≈ 90 %</a:t>
+            </a:r>
+            <a:endParaRPr lang="en-US" sz="3800" dirty="0"/>
+          </a:p>
+        </p:txBody>
+      </p:sp>
+      <p:sp>
+        <p:nvSpPr>
+          <p:cNvPr id="6" name="Text 4"/>
+          <p:cNvSpPr txBox="1"/>
+          <p:nvPr/>
+        </p:nvSpPr>
+        <p:spPr>
+          <a:xfrm>
+            <a:off x="795528" y="3154680"/>
+            <a:ext cx="3082442" cy="1051560"/>
+          </a:xfrm>
+          <a:prstGeom prst="rect">
+            <a:avLst/>
+          </a:prstGeom>
+          <a:noFill/>
+          <a:ln/>
+        </p:spPr>
+        <p:txBody>
+          <a:bodyPr wrap="square" lIns="0" tIns="0" rIns="0" bIns="0" rtlCol="0" anchor="t"/>
+          <a:lstStyle/>
+          <a:p>
+            <a:pPr algn="ctr" indent="0" marL="0">
+              <a:lnSpc>
+                <a:spcPct val="118000"/>
+              </a:lnSpc>
+              <a:buNone/>
+            </a:pPr>
+            <a:r>
+              <a:rPr lang="en-US" sz="1250" dirty="0">
+                <a:solidFill>
+                  <a:srgbClr val="31424A"/>
+                </a:solidFill>
+                <a:latin typeface="Calibri" pitchFamily="34" charset="0"/>
+                <a:ea typeface="Calibri" pitchFamily="34" charset="-122"/>
+                <a:cs typeface="Calibri" pitchFamily="34" charset="-120"/>
+              </a:rPr>
+              <a:t>of export earnings come from oil</a:t>
+            </a:r>
+            <a:endParaRPr lang="en-US" sz="1250" dirty="0"/>
+          </a:p>
+        </p:txBody>
+      </p:sp>
+      <p:sp>
+        <p:nvSpPr>
+          <p:cNvPr id="7" name="Shape 5"/>
+          <p:cNvSpPr/>
+          <p:nvPr/>
+        </p:nvSpPr>
+        <p:spPr>
+          <a:xfrm>
+            <a:off x="4353458" y="1874520"/>
+            <a:ext cx="3484778" cy="2514600"/>
+          </a:xfrm>
+          <a:prstGeom prst="roundRect">
+            <a:avLst>
+              <a:gd name="adj" fmla="val 3636"/>
+            </a:avLst>
+          </a:prstGeom>
+          <a:solidFill>
+            <a:srgbClr val="EDF3F5"/>
+          </a:solidFill>
+          <a:ln w="9525">
+            <a:solidFill>
+              <a:srgbClr val="D6E2E7"/>
+            </a:solidFill>
+            <a:prstDash val="solid"/>
+          </a:ln>
+        </p:spPr>
+      </p:sp>
+      <p:sp>
+        <p:nvSpPr>
+          <p:cNvPr id="8" name="Text 6"/>
+          <p:cNvSpPr txBox="1"/>
+          <p:nvPr/>
+        </p:nvSpPr>
+        <p:spPr>
+          <a:xfrm>
+            <a:off x="4536338" y="2148840"/>
+            <a:ext cx="3119018" cy="960120"/>
+          </a:xfrm>
+          <a:prstGeom prst="rect">
+            <a:avLst/>
+          </a:prstGeom>
+          <a:noFill/>
+          <a:ln/>
+        </p:spPr>
+        <p:txBody>
+          <a:bodyPr wrap="square" lIns="0" tIns="0" rIns="0" bIns="0" rtlCol="0" anchor="ctr"/>
+          <a:lstStyle/>
+          <a:p>
+            <a:pPr algn="ctr" indent="0" marL="0">
+              <a:buNone/>
+            </a:pPr>
+            <a:r>
+              <a:rPr lang="en-US" sz="3800" b="1" dirty="0">
+                <a:solidFill>
+                  <a:srgbClr val="1C5A73"/>
+                </a:solidFill>
+                <a:latin typeface="Cambria" pitchFamily="34" charset="0"/>
+                <a:ea typeface="Cambria" pitchFamily="34" charset="-122"/>
+                <a:cs typeface="Cambria" pitchFamily="34" charset="-120"/>
+              </a:rPr>
+              <a:t>≈ 12 M</a:t>
+            </a:r>
+            <a:endParaRPr lang="en-US" sz="3800" dirty="0"/>
+          </a:p>
+        </p:txBody>
+      </p:sp>
+      <p:sp>
+        <p:nvSpPr>
+          <p:cNvPr id="9" name="Text 7"/>
+          <p:cNvSpPr txBox="1"/>
+          <p:nvPr/>
+        </p:nvSpPr>
+        <p:spPr>
+          <a:xfrm>
+            <a:off x="4554626" y="3154680"/>
+            <a:ext cx="3082442" cy="1051560"/>
+          </a:xfrm>
+          <a:prstGeom prst="rect">
+            <a:avLst/>
+          </a:prstGeom>
+          <a:noFill/>
+          <a:ln/>
+        </p:spPr>
+        <p:txBody>
+          <a:bodyPr wrap="square" lIns="0" tIns="0" rIns="0" bIns="0" rtlCol="0" anchor="t"/>
+          <a:lstStyle/>
+          <a:p>
+            <a:pPr algn="ctr" indent="0" marL="0">
+              <a:lnSpc>
+                <a:spcPct val="118000"/>
+              </a:lnSpc>
+              <a:buNone/>
+            </a:pPr>
+            <a:r>
+              <a:rPr lang="en-US" sz="1250" dirty="0">
+                <a:solidFill>
+                  <a:srgbClr val="31424A"/>
+                </a:solidFill>
+                <a:latin typeface="Calibri" pitchFamily="34" charset="0"/>
+                <a:ea typeface="Calibri" pitchFamily="34" charset="-122"/>
+                <a:cs typeface="Calibri" pitchFamily="34" charset="-120"/>
+              </a:rPr>
+              <a:t>inhabitants, most of them in rural areas</a:t>
+            </a:r>
+            <a:endParaRPr lang="en-US" sz="1250" dirty="0"/>
+          </a:p>
+        </p:txBody>
+      </p:sp>
+      <p:sp>
+        <p:nvSpPr>
+          <p:cNvPr id="10" name="Shape 8"/>
+          <p:cNvSpPr/>
+          <p:nvPr/>
+        </p:nvSpPr>
+        <p:spPr>
+          <a:xfrm>
+            <a:off x="8112557" y="1874520"/>
+            <a:ext cx="3484778" cy="2514600"/>
+          </a:xfrm>
+          <a:prstGeom prst="roundRect">
+            <a:avLst>
+              <a:gd name="adj" fmla="val 3636"/>
+            </a:avLst>
+          </a:prstGeom>
+          <a:solidFill>
+            <a:srgbClr val="EDF3F5"/>
+          </a:solidFill>
+          <a:ln w="9525">
+            <a:solidFill>
+              <a:srgbClr val="D6E2E7"/>
+            </a:solidFill>
+            <a:prstDash val="solid"/>
+          </a:ln>
+        </p:spPr>
+      </p:sp>
+      <p:sp>
+        <p:nvSpPr>
+          <p:cNvPr id="11" name="Text 9"/>
+          <p:cNvSpPr txBox="1"/>
+          <p:nvPr/>
+        </p:nvSpPr>
+        <p:spPr>
+          <a:xfrm>
+            <a:off x="8295437" y="2148840"/>
+            <a:ext cx="3119018" cy="960120"/>
+          </a:xfrm>
+          <a:prstGeom prst="rect">
+            <a:avLst/>
+          </a:prstGeom>
+          <a:noFill/>
+          <a:ln/>
+        </p:spPr>
+        <p:txBody>
+          <a:bodyPr wrap="square" lIns="0" tIns="0" rIns="0" bIns="0" rtlCol="0" anchor="ctr"/>
+          <a:lstStyle/>
+          <a:p>
+            <a:pPr algn="ctr" indent="0" marL="0">
+              <a:buNone/>
+            </a:pPr>
+            <a:r>
+              <a:rPr lang="en-US" sz="3800" b="1" dirty="0">
+                <a:solidFill>
+                  <a:srgbClr val="1C5A73"/>
+                </a:solidFill>
+                <a:latin typeface="Cambria" pitchFamily="34" charset="0"/>
+                <a:ea typeface="Cambria" pitchFamily="34" charset="-122"/>
+                <a:cs typeface="Cambria" pitchFamily="34" charset="-120"/>
+              </a:rPr>
+              <a:t>2011</a:t>
+            </a:r>
+            <a:endParaRPr lang="en-US" sz="3800" dirty="0"/>
+          </a:p>
+        </p:txBody>
+      </p:sp>
+      <p:sp>
+        <p:nvSpPr>
+          <p:cNvPr id="12" name="Text 10"/>
+          <p:cNvSpPr txBox="1"/>
+          <p:nvPr/>
+        </p:nvSpPr>
+        <p:spPr>
+          <a:xfrm>
+            <a:off x="8313725" y="3154680"/>
+            <a:ext cx="3082442" cy="1051560"/>
+          </a:xfrm>
+          <a:prstGeom prst="rect">
+            <a:avLst/>
+          </a:prstGeom>
+          <a:noFill/>
+          <a:ln/>
+        </p:spPr>
+        <p:txBody>
+          <a:bodyPr wrap="square" lIns="0" tIns="0" rIns="0" bIns="0" rtlCol="0" anchor="t"/>
+          <a:lstStyle/>
+          <a:p>
+            <a:pPr algn="ctr" indent="0" marL="0">
+              <a:lnSpc>
+                <a:spcPct val="118000"/>
+              </a:lnSpc>
+              <a:buNone/>
+            </a:pPr>
+            <a:r>
+              <a:rPr lang="en-US" sz="1250" dirty="0">
+                <a:solidFill>
+                  <a:srgbClr val="31424A"/>
+                </a:solidFill>
+                <a:latin typeface="Calibri" pitchFamily="34" charset="0"/>
+                <a:ea typeface="Calibri" pitchFamily="34" charset="-122"/>
+                <a:cs typeface="Calibri" pitchFamily="34" charset="-120"/>
+              </a:rPr>
+              <a:t>independence, with agriculture named a priority for diversification</a:t>
+            </a:r>
+            <a:endParaRPr lang="en-US" sz="1250" dirty="0"/>
+          </a:p>
+        </p:txBody>
+      </p:sp>
+      <p:sp>
+        <p:nvSpPr>
+          <p:cNvPr id="13" name="Text 11"/>
+          <p:cNvSpPr txBox="1"/>
+          <p:nvPr/>
+        </p:nvSpPr>
+        <p:spPr>
+          <a:xfrm>
+            <a:off x="594360" y="4709160"/>
+            <a:ext cx="11002975" cy="1097280"/>
           </a:xfrm>
           <a:prstGeom prst="rect">
             <a:avLst/>
@@ -8462,12 +10030,12 @@
           <a:p>
             <a:pPr algn="l" indent="0" marL="0">
               <a:lnSpc>
-                <a:spcPct val="125000"/>
+                <a:spcPct val="130000"/>
               </a:lnSpc>
               <a:buNone/>
             </a:pPr>
             <a:r>
-              <a:rPr lang="en-US" sz="1200" dirty="0">
+              <a:rPr lang="en-US" sz="1350" dirty="0">
                 <a:solidFill>
                   <a:srgbClr val="31424A"/>
                 </a:solidFill>
@@ -8475,44 +10043,15 @@
                 <a:ea typeface="Calibri" pitchFamily="34" charset="-122"/>
                 <a:cs typeface="Calibri" pitchFamily="34" charset="-120"/>
               </a:rPr>
-              <a:t>Sorghum is grown almost everywhere and underpins household food security.</a:t>
-            </a:r>
-            <a:endParaRPr lang="en-US" sz="1200" dirty="0"/>
-          </a:p>
-          <a:p>
-            <a:pPr algn="l" indent="0" marL="0">
-              <a:lnSpc>
-                <a:spcPct val="125000"/>
-              </a:lnSpc>
-              <a:buNone/>
-            </a:pPr>
-            <a:endParaRPr lang="en-US" sz="1200" dirty="0"/>
-          </a:p>
-          <a:p>
-            <a:pPr algn="l" indent="0" marL="0">
-              <a:lnSpc>
-                <a:spcPct val="125000"/>
-              </a:lnSpc>
-              <a:buNone/>
-            </a:pPr>
-            <a:r>
-              <a:rPr lang="en-US" sz="1200" dirty="0">
-                <a:solidFill>
-                  <a:srgbClr val="31424A"/>
-                </a:solidFill>
-                <a:latin typeface="Calibri" pitchFamily="34" charset="0"/>
-                <a:ea typeface="Calibri" pitchFamily="34" charset="-122"/>
-                <a:cs typeface="Calibri" pitchFamily="34" charset="-120"/>
-              </a:rPr>
-              <a:t>Maize and cassava lead in the Greenbelt of Western Equatoria, where rainfall and soils respond best to improved practices. Shares are rounded orders of magnitude.</a:t>
-            </a:r>
-            <a:endParaRPr lang="en-US" sz="1200" dirty="0"/>
-          </a:p>
-        </p:txBody>
-      </p:sp>
-      <p:sp>
-        <p:nvSpPr>
-          <p:cNvPr id="8" name="Text 5"/>
+              <a:t>Imports, humanitarian assistance and trade with Uganda, Kenya and Sudan fill much of the gap between local output and needs. Every stable gain in local production, storage and transport reduces exposure to price shocks and supply interruptions.</a:t>
+            </a:r>
+            <a:endParaRPr lang="en-US" sz="1350" dirty="0"/>
+          </a:p>
+        </p:txBody>
+      </p:sp>
+      <p:sp>
+        <p:nvSpPr>
+          <p:cNvPr id="14" name="Text 12"/>
           <p:cNvSpPr txBox="1"/>
           <p:nvPr/>
         </p:nvSpPr>
@@ -8553,7 +10092,7 @@
       </p:sp>
       <p:sp>
         <p:nvSpPr>
-          <p:cNvPr id="9" name="Text 6"/>
+          <p:cNvPr id="15" name="Text 13"/>
           <p:cNvSpPr txBox="1"/>
           <p:nvPr/>
         </p:nvSpPr>
@@ -8657,7 +10196,7 @@
                 <a:ea typeface="Calibri" pitchFamily="34" charset="-122"/>
                 <a:cs typeface="Calibri" pitchFamily="34" charset="-120"/>
               </a:rPr>
-              <a:t>LEADING SECTOR</a:t>
+              <a:t>THE MAIN CROPS</a:t>
             </a:r>
             <a:endParaRPr lang="en-US" sz="1150" dirty="0"/>
           </a:p>
@@ -8696,46 +10235,104 @@
                 <a:ea typeface="Cambria" pitchFamily="34" charset="-122"/>
                 <a:cs typeface="Cambria" pitchFamily="34" charset="-120"/>
               </a:rPr>
-              <a:t>Maize and cassava: the Greenbelt opportunity</a:t>
+              <a:t>Sorghum dominates the cereal area</a:t>
             </a:r>
             <a:endParaRPr lang="en-US" sz="3000" dirty="0"/>
           </a:p>
         </p:txBody>
       </p:sp>
-      <p:pic>
-        <p:nvPicPr>
-          <p:cNvPr id="4" name="Image 0" descr="preencoded.png">    </p:cNvPr>
-          <p:cNvPicPr>
-            <a:picLocks noChangeAspect="1"/>
-          </p:cNvPicPr>
-          <p:nvPr/>
-        </p:nvPicPr>
-        <p:blipFill>
-          <a:blip r:embed="rId1"/>
-          <a:stretch>
-            <a:fillRect/>
-          </a:stretch>
-        </p:blipFill>
-        <p:spPr>
-          <a:xfrm>
-            <a:off x="6522415" y="1783080"/>
-            <a:ext cx="5074920" cy="3794760"/>
-          </a:xfrm>
-          <a:prstGeom prst="rect">
-            <a:avLst/>
-          </a:prstGeom>
-        </p:spPr>
-      </p:pic>
-      <p:sp>
-        <p:nvSpPr>
-          <p:cNvPr id="5" name="Text 2"/>
-          <p:cNvSpPr txBox="1"/>
-          <p:nvPr/>
-        </p:nvSpPr>
-        <p:spPr>
-          <a:xfrm>
-            <a:off x="594360" y="1783080"/>
-            <a:ext cx="5379415" cy="4251960"/>
+      <p:graphicFrame>
+        <p:nvGraphicFramePr>
+          <p:cNvPr id="4" name="Chart 0" descr=""/>
+          <p:cNvGraphicFramePr/>
+          <p:nvPr/>
+        </p:nvGraphicFramePr>
+        <p:xfrm>
+          <a:off x="594360" y="1783080"/>
+          <a:ext cx="7360920" cy="3977640"/>
+        </p:xfrm>
+        <a:graphic xmlns:a="http://schemas.openxmlformats.org/drawingml/2006/main">
+          <a:graphicData uri="http://schemas.openxmlformats.org/drawingml/2006/chart">
+            <c:chart xmlns:c="http://schemas.openxmlformats.org/drawingml/2006/chart" r:id="rId1"/>
+          </a:graphicData>
+        </a:graphic>
+      </p:graphicFrame>
+      <p:sp>
+        <p:nvSpPr>
+          <p:cNvPr id="5" name="Shape 2"/>
+          <p:cNvSpPr/>
+          <p:nvPr/>
+        </p:nvSpPr>
+        <p:spPr>
+          <a:xfrm>
+            <a:off x="8275320" y="1783080"/>
+            <a:ext cx="3291840" cy="3977640"/>
+          </a:xfrm>
+          <a:prstGeom prst="roundRect">
+            <a:avLst>
+              <a:gd name="adj" fmla="val 2778"/>
+            </a:avLst>
+          </a:prstGeom>
+          <a:solidFill>
+            <a:srgbClr val="EDF3F5"/>
+          </a:solidFill>
+          <a:ln w="9525">
+            <a:solidFill>
+              <a:srgbClr val="D6E2E7"/>
+            </a:solidFill>
+            <a:prstDash val="solid"/>
+          </a:ln>
+        </p:spPr>
+      </p:sp>
+      <p:sp>
+        <p:nvSpPr>
+          <p:cNvPr id="6" name="Text 3"/>
+          <p:cNvSpPr txBox="1"/>
+          <p:nvPr/>
+        </p:nvSpPr>
+        <p:spPr>
+          <a:xfrm>
+            <a:off x="8503920" y="2011680"/>
+            <a:ext cx="2834640" cy="457200"/>
+          </a:xfrm>
+          <a:prstGeom prst="rect">
+            <a:avLst/>
+          </a:prstGeom>
+          <a:noFill/>
+          <a:ln/>
+        </p:spPr>
+        <p:txBody>
+          <a:bodyPr wrap="square" lIns="0" tIns="0" rIns="0" bIns="0" rtlCol="0" anchor="ctr"/>
+          <a:lstStyle/>
+          <a:p>
+            <a:pPr algn="l" indent="0" marL="0">
+              <a:buNone/>
+            </a:pPr>
+            <a:r>
+              <a:rPr lang="en-US" sz="1300" b="1" dirty="0">
+                <a:solidFill>
+                  <a:srgbClr val="1C5A73"/>
+                </a:solidFill>
+                <a:latin typeface="Cambria" pitchFamily="34" charset="0"/>
+                <a:ea typeface="Cambria" pitchFamily="34" charset="-122"/>
+                <a:cs typeface="Cambria" pitchFamily="34" charset="-120"/>
+              </a:rPr>
+              <a:t>Reading</a:t>
+            </a:r>
+            <a:endParaRPr lang="en-US" sz="1300" dirty="0"/>
+          </a:p>
+        </p:txBody>
+      </p:sp>
+      <p:sp>
+        <p:nvSpPr>
+          <p:cNvPr id="7" name="Text 4"/>
+          <p:cNvSpPr txBox="1"/>
+          <p:nvPr/>
+        </p:nvSpPr>
+        <p:spPr>
+          <a:xfrm>
+            <a:off x="8503920" y="2560320"/>
+            <a:ext cx="2834640" cy="3017520"/>
           </a:xfrm>
           <a:prstGeom prst="rect">
             <a:avLst/>
@@ -8747,18 +10344,14 @@
           <a:bodyPr wrap="square" lIns="0" tIns="0" rIns="0" bIns="0" rtlCol="0" anchor="t"/>
           <a:lstStyle/>
           <a:p>
-            <a:pPr algn="l" marL="342900" indent="-342900">
+            <a:pPr algn="l" indent="0" marL="0">
               <a:lnSpc>
-                <a:spcPct val="122000"/>
+                <a:spcPct val="125000"/>
               </a:lnSpc>
-              <a:spcAft>
-                <a:spcPts val="1100"/>
-              </a:spcAft>
-              <a:buSzPct val="100000"/>
-              <a:buChar char="•"/>
-            </a:pPr>
-            <a:r>
-              <a:rPr lang="en-US" sz="1400" dirty="0">
+              <a:buNone/>
+            </a:pPr>
+            <a:r>
+              <a:rPr lang="en-US" sz="1200" dirty="0">
                 <a:solidFill>
                   <a:srgbClr val="31424A"/>
                 </a:solidFill>
@@ -8766,23 +10359,28 @@
                 <a:ea typeface="Calibri" pitchFamily="34" charset="-122"/>
                 <a:cs typeface="Calibri" pitchFamily="34" charset="-120"/>
               </a:rPr>
-              <a:t>Western Equatoria has the rainfall, soils and season length to supply Juba and regional markets.</a:t>
-            </a:r>
-            <a:endParaRPr lang="en-US" sz="1400" dirty="0"/>
-          </a:p>
-          <a:p>
-            <a:pPr algn="l" marL="342900" indent="-342900">
+              <a:t>Sorghum is grown almost everywhere and underpins household food security.</a:t>
+            </a:r>
+            <a:endParaRPr lang="en-US" sz="1200" dirty="0"/>
+          </a:p>
+          <a:p>
+            <a:pPr algn="l" indent="0" marL="0">
               <a:lnSpc>
-                <a:spcPct val="122000"/>
+                <a:spcPct val="125000"/>
               </a:lnSpc>
-              <a:spcAft>
-                <a:spcPts val="1100"/>
-              </a:spcAft>
-              <a:buSzPct val="100000"/>
-              <a:buChar char="•"/>
-            </a:pPr>
-            <a:r>
-              <a:rPr lang="en-US" sz="1400" dirty="0">
+              <a:buNone/>
+            </a:pPr>
+            <a:endParaRPr lang="en-US" sz="1200" dirty="0"/>
+          </a:p>
+          <a:p>
+            <a:pPr algn="l" indent="0" marL="0">
+              <a:lnSpc>
+                <a:spcPct val="125000"/>
+              </a:lnSpc>
+              <a:buNone/>
+            </a:pPr>
+            <a:r>
+              <a:rPr lang="en-US" sz="1200" dirty="0">
                 <a:solidFill>
                   <a:srgbClr val="31424A"/>
                 </a:solidFill>
@@ -8790,87 +10388,15 @@
                 <a:ea typeface="Calibri" pitchFamily="34" charset="-122"/>
                 <a:cs typeface="Calibri" pitchFamily="34" charset="-120"/>
               </a:rPr>
-              <a:t>Controlled trials near Yambio and Nzara reached 4.7 t/ha of maize with nitrogen and phosphorus, against 2.9 t/ha on control plots.</a:t>
-            </a:r>
-            <a:endParaRPr lang="en-US" sz="1400" dirty="0"/>
-          </a:p>
-          <a:p>
-            <a:pPr algn="l" marL="342900" indent="-342900">
-              <a:lnSpc>
-                <a:spcPct val="122000"/>
-              </a:lnSpc>
-              <a:spcAft>
-                <a:spcPts val="1100"/>
-              </a:spcAft>
-              <a:buSzPct val="100000"/>
-              <a:buChar char="•"/>
-            </a:pPr>
-            <a:r>
-              <a:rPr lang="en-US" sz="1400" dirty="0">
-                <a:solidFill>
-                  <a:srgbClr val="31424A"/>
-                </a:solidFill>
-                <a:latin typeface="Calibri" pitchFamily="34" charset="0"/>
-                <a:ea typeface="Calibri" pitchFamily="34" charset="-122"/>
-                <a:cs typeface="Calibri" pitchFamily="34" charset="-120"/>
-              </a:rPr>
-              <a:t>Cassava is the resilience crop: it stays in the ground through bad years and feeds households between harvests.</a:t>
-            </a:r>
-            <a:endParaRPr lang="en-US" sz="1400" dirty="0"/>
-          </a:p>
-          <a:p>
-            <a:pPr algn="l" marL="342900" indent="-342900">
-              <a:lnSpc>
-                <a:spcPct val="122000"/>
-              </a:lnSpc>
-              <a:spcAft>
-                <a:spcPts val="1100"/>
-              </a:spcAft>
-              <a:buSzPct val="100000"/>
-              <a:buChar char="•"/>
-            </a:pPr>
-            <a:r>
-              <a:rPr lang="en-US" sz="1400" dirty="0">
-                <a:solidFill>
-                  <a:srgbClr val="31424A"/>
-                </a:solidFill>
-                <a:latin typeface="Calibri" pitchFamily="34" charset="0"/>
-                <a:ea typeface="Calibri" pitchFamily="34" charset="-122"/>
-                <a:cs typeface="Calibri" pitchFamily="34" charset="-120"/>
-              </a:rPr>
-              <a:t>Roads, storage and processing, more than rainfall, decide whether a surplus reaches a market.</a:t>
-            </a:r>
-            <a:endParaRPr lang="en-US" sz="1400" dirty="0"/>
-          </a:p>
-          <a:p>
-            <a:pPr algn="l" marL="342900" indent="-342900">
-              <a:lnSpc>
-                <a:spcPct val="122000"/>
-              </a:lnSpc>
-              <a:spcAft>
-                <a:spcPts val="1100"/>
-              </a:spcAft>
-              <a:buSzPct val="100000"/>
-              <a:buChar char="•"/>
-            </a:pPr>
-            <a:r>
-              <a:rPr lang="en-US" sz="1400" dirty="0">
-                <a:solidFill>
-                  <a:srgbClr val="31424A"/>
-                </a:solidFill>
-                <a:latin typeface="Calibri" pitchFamily="34" charset="0"/>
-                <a:ea typeface="Calibri" pitchFamily="34" charset="-122"/>
-                <a:cs typeface="Calibri" pitchFamily="34" charset="-120"/>
-              </a:rPr>
-              <a:t>EVERGREEN® and ECOFERT® are to be trialled on drained plots exposed to dry spells, against an untreated control.</a:t>
-            </a:r>
-            <a:endParaRPr lang="en-US" sz="1400" dirty="0"/>
-          </a:p>
-        </p:txBody>
-      </p:sp>
-      <p:sp>
-        <p:nvSpPr>
-          <p:cNvPr id="6" name="Text 3"/>
+              <a:t>Maize and cassava lead in the Greenbelt of Western Equatoria, where rainfall and soils respond best to improved practices. Shares are rounded orders of magnitude.</a:t>
+            </a:r>
+            <a:endParaRPr lang="en-US" sz="1200" dirty="0"/>
+          </a:p>
+        </p:txBody>
+      </p:sp>
+      <p:sp>
+        <p:nvSpPr>
+          <p:cNvPr id="8" name="Text 5"/>
           <p:cNvSpPr txBox="1"/>
           <p:nvPr/>
         </p:nvSpPr>
@@ -8911,7 +10437,7 @@
       </p:sp>
       <p:sp>
         <p:nvSpPr>
-          <p:cNvPr id="7" name="Text 4"/>
+          <p:cNvPr id="9" name="Text 6"/>
           <p:cNvSpPr txBox="1"/>
           <p:nvPr/>
         </p:nvSpPr>
@@ -9015,7 +10541,7 @@
                 <a:ea typeface="Calibri" pitchFamily="34" charset="-122"/>
                 <a:cs typeface="Calibri" pitchFamily="34" charset="-120"/>
               </a:rPr>
-              <a:t>OUR RESPONSE</a:t>
+              <a:t>LEADING SECTOR</a:t>
             </a:r>
             <a:endParaRPr lang="en-US" sz="1150" dirty="0"/>
           </a:p>
@@ -9054,61 +10580,46 @@
                 <a:ea typeface="Cambria" pitchFamily="34" charset="-122"/>
                 <a:cs typeface="Cambria" pitchFamily="34" charset="-120"/>
               </a:rPr>
-              <a:t>Two technologies, for drained land under dry spells</a:t>
+              <a:t>Maize and cassava: the Greenbelt opportunity</a:t>
             </a:r>
             <a:endParaRPr lang="en-US" sz="3000" dirty="0"/>
           </a:p>
         </p:txBody>
       </p:sp>
-      <p:sp>
-        <p:nvSpPr>
-          <p:cNvPr id="4" name="Text 2"/>
+      <p:pic>
+        <p:nvPicPr>
+          <p:cNvPr id="4" name="Image 0" descr="preencoded.png">    </p:cNvPr>
+          <p:cNvPicPr>
+            <a:picLocks noChangeAspect="1"/>
+          </p:cNvPicPr>
+          <p:nvPr/>
+        </p:nvPicPr>
+        <p:blipFill>
+          <a:blip r:embed="rId1"/>
+          <a:stretch>
+            <a:fillRect/>
+          </a:stretch>
+        </p:blipFill>
+        <p:spPr>
+          <a:xfrm>
+            <a:off x="6522415" y="1783080"/>
+            <a:ext cx="5074920" cy="3794760"/>
+          </a:xfrm>
+          <a:prstGeom prst="rect">
+            <a:avLst/>
+          </a:prstGeom>
+        </p:spPr>
+      </p:pic>
+      <p:sp>
+        <p:nvSpPr>
+          <p:cNvPr id="5" name="Text 2"/>
           <p:cNvSpPr txBox="1"/>
           <p:nvPr/>
         </p:nvSpPr>
         <p:spPr>
           <a:xfrm>
             <a:off x="594360" y="1783080"/>
-            <a:ext cx="5227168" cy="411480"/>
-          </a:xfrm>
-          <a:prstGeom prst="rect">
-            <a:avLst/>
-          </a:prstGeom>
-          <a:noFill/>
-          <a:ln/>
-        </p:spPr>
-        <p:txBody>
-          <a:bodyPr wrap="square" lIns="0" tIns="0" rIns="0" bIns="0" rtlCol="0" anchor="ctr"/>
-          <a:lstStyle/>
-          <a:p>
-            <a:pPr algn="l" indent="0" marL="0">
-              <a:buNone/>
-            </a:pPr>
-            <a:r>
-              <a:rPr lang="en-US" sz="1600" b="1" dirty="0">
-                <a:solidFill>
-                  <a:srgbClr val="1C5A73"/>
-                </a:solidFill>
-                <a:latin typeface="Cambria" pitchFamily="34" charset="0"/>
-                <a:ea typeface="Cambria" pitchFamily="34" charset="-122"/>
-                <a:cs typeface="Cambria" pitchFamily="34" charset="-120"/>
-              </a:rPr>
-              <a:t>EVERGREEN® — holding the water</a:t>
-            </a:r>
-            <a:endParaRPr lang="en-US" sz="1600" dirty="0"/>
-          </a:p>
-        </p:txBody>
-      </p:sp>
-      <p:sp>
-        <p:nvSpPr>
-          <p:cNvPr id="5" name="Text 3"/>
-          <p:cNvSpPr txBox="1"/>
-          <p:nvPr/>
-        </p:nvSpPr>
-        <p:spPr>
-          <a:xfrm>
-            <a:off x="594360" y="2286000"/>
-            <a:ext cx="5227168" cy="2468880"/>
+            <a:ext cx="5379415" cy="4251960"/>
           </a:xfrm>
           <a:prstGeom prst="rect">
             <a:avLst/>
@@ -9125,13 +10636,13 @@
                 <a:spcPct val="122000"/>
               </a:lnSpc>
               <a:spcAft>
-                <a:spcPts val="1000"/>
+                <a:spcPts val="1100"/>
               </a:spcAft>
               <a:buSzPct val="100000"/>
               <a:buChar char="•"/>
             </a:pPr>
             <a:r>
-              <a:rPr lang="en-US" sz="1350" dirty="0">
+              <a:rPr lang="en-US" sz="1400" dirty="0">
                 <a:solidFill>
                   <a:srgbClr val="31424A"/>
                 </a:solidFill>
@@ -9139,9 +10650,9 @@
                 <a:ea typeface="Calibri" pitchFamily="34" charset="-122"/>
                 <a:cs typeface="Calibri" pitchFamily="34" charset="-120"/>
               </a:rPr>
-              <a:t>A potassium-based hydro-retainer placed in the root zone of drained, drought-exposed plots.</a:t>
-            </a:r>
-            <a:endParaRPr lang="en-US" sz="1350" dirty="0"/>
+              <a:t>Western Equatoria has the rainfall, soils and season length to supply Juba and regional markets.</a:t>
+            </a:r>
+            <a:endParaRPr lang="en-US" sz="1400" dirty="0"/>
           </a:p>
           <a:p>
             <a:pPr algn="l" marL="342900" indent="-342900">
@@ -9149,13 +10660,13 @@
                 <a:spcPct val="122000"/>
               </a:lnSpc>
               <a:spcAft>
-                <a:spcPts val="1000"/>
+                <a:spcPts val="1100"/>
               </a:spcAft>
               <a:buSzPct val="100000"/>
               <a:buChar char="•"/>
             </a:pPr>
             <a:r>
-              <a:rPr lang="en-US" sz="1350" dirty="0">
+              <a:rPr lang="en-US" sz="1400" dirty="0">
                 <a:solidFill>
                   <a:srgbClr val="31424A"/>
                 </a:solidFill>
@@ -9163,9 +10674,9 @@
                 <a:ea typeface="Calibri" pitchFamily="34" charset="-122"/>
                 <a:cs typeface="Calibri" pitchFamily="34" charset="-120"/>
               </a:rPr>
-              <a:t>It captures rain and releases it back to the plant gradually, bridging dry spells at emergence and flowering.</a:t>
-            </a:r>
-            <a:endParaRPr lang="en-US" sz="1350" dirty="0"/>
+              <a:t>Controlled trials near Yambio and Nzara reached 4.7 t/ha of maize with nitrogen and phosphorus, against 2.9 t/ha on control plots.</a:t>
+            </a:r>
+            <a:endParaRPr lang="en-US" sz="1400" dirty="0"/>
           </a:p>
           <a:p>
             <a:pPr algn="l" marL="342900" indent="-342900">
@@ -9173,13 +10684,13 @@
                 <a:spcPct val="122000"/>
               </a:lnSpc>
               <a:spcAft>
-                <a:spcPts val="1000"/>
+                <a:spcPts val="1100"/>
               </a:spcAft>
               <a:buSzPct val="100000"/>
               <a:buChar char="•"/>
             </a:pPr>
             <a:r>
-              <a:rPr lang="en-US" sz="1350" dirty="0">
+              <a:rPr lang="en-US" sz="1400" dirty="0">
                 <a:solidFill>
                   <a:srgbClr val="31424A"/>
                 </a:solidFill>
@@ -9187,9 +10698,9 @@
                 <a:ea typeface="Calibri" pitchFamily="34" charset="-122"/>
                 <a:cs typeface="Calibri" pitchFamily="34" charset="-120"/>
               </a:rPr>
-              <a:t>Absorbs on the order of 300 times its own weight; useful effect of 3 to 4 years in the soil.</a:t>
-            </a:r>
-            <a:endParaRPr lang="en-US" sz="1350" dirty="0"/>
+              <a:t>Cassava is the resilience crop: it stays in the ground through bad years and feeds households between harvests.</a:t>
+            </a:r>
+            <a:endParaRPr lang="en-US" sz="1400" dirty="0"/>
           </a:p>
           <a:p>
             <a:pPr algn="l" marL="342900" indent="-342900">
@@ -9197,13 +10708,13 @@
                 <a:spcPct val="122000"/>
               </a:lnSpc>
               <a:spcAft>
-                <a:spcPts val="1000"/>
+                <a:spcPts val="1100"/>
               </a:spcAft>
               <a:buSzPct val="100000"/>
               <a:buChar char="•"/>
             </a:pPr>
             <a:r>
-              <a:rPr lang="en-US" sz="1350" dirty="0">
+              <a:rPr lang="en-US" sz="1400" dirty="0">
                 <a:solidFill>
                   <a:srgbClr val="31424A"/>
                 </a:solidFill>
@@ -9211,84 +10722,23 @@
                 <a:ea typeface="Calibri" pitchFamily="34" charset="-122"/>
                 <a:cs typeface="Calibri" pitchFamily="34" charset="-120"/>
               </a:rPr>
-              <a:t>Breaks down by 20 to 25 % a year, with no build-up and no risk of overdosing.</a:t>
-            </a:r>
-            <a:endParaRPr lang="en-US" sz="1350" dirty="0"/>
-          </a:p>
-        </p:txBody>
-      </p:sp>
-      <p:sp>
-        <p:nvSpPr>
-          <p:cNvPr id="6" name="Text 4"/>
-          <p:cNvSpPr txBox="1"/>
-          <p:nvPr/>
-        </p:nvSpPr>
-        <p:spPr>
-          <a:xfrm>
-            <a:off x="6370168" y="1783080"/>
-            <a:ext cx="5227168" cy="411480"/>
-          </a:xfrm>
-          <a:prstGeom prst="rect">
-            <a:avLst/>
-          </a:prstGeom>
-          <a:noFill/>
-          <a:ln/>
-        </p:spPr>
-        <p:txBody>
-          <a:bodyPr wrap="square" lIns="0" tIns="0" rIns="0" bIns="0" rtlCol="0" anchor="ctr"/>
-          <a:lstStyle/>
-          <a:p>
-            <a:pPr algn="l" indent="0" marL="0">
-              <a:buNone/>
-            </a:pPr>
-            <a:r>
-              <a:rPr lang="en-US" sz="1600" b="1" dirty="0">
-                <a:solidFill>
-                  <a:srgbClr val="1C5A73"/>
-                </a:solidFill>
-                <a:latin typeface="Cambria" pitchFamily="34" charset="0"/>
-                <a:ea typeface="Cambria" pitchFamily="34" charset="-122"/>
-                <a:cs typeface="Cambria" pitchFamily="34" charset="-120"/>
-              </a:rPr>
-              <a:t>ECOFERT® — feeding without depleting</a:t>
-            </a:r>
-            <a:endParaRPr lang="en-US" sz="1600" dirty="0"/>
-          </a:p>
-        </p:txBody>
-      </p:sp>
-      <p:sp>
-        <p:nvSpPr>
-          <p:cNvPr id="7" name="Text 5"/>
-          <p:cNvSpPr txBox="1"/>
-          <p:nvPr/>
-        </p:nvSpPr>
-        <p:spPr>
-          <a:xfrm>
-            <a:off x="6370168" y="2286000"/>
-            <a:ext cx="5227168" cy="2468880"/>
-          </a:xfrm>
-          <a:prstGeom prst="rect">
-            <a:avLst/>
-          </a:prstGeom>
-          <a:noFill/>
-          <a:ln/>
-        </p:spPr>
-        <p:txBody>
-          <a:bodyPr wrap="square" lIns="0" tIns="0" rIns="0" bIns="0" rtlCol="0" anchor="t"/>
-          <a:lstStyle/>
+              <a:t>Roads, storage and processing, more than rainfall, decide whether a surplus reaches a market.</a:t>
+            </a:r>
+            <a:endParaRPr lang="en-US" sz="1400" dirty="0"/>
+          </a:p>
           <a:p>
             <a:pPr algn="l" marL="342900" indent="-342900">
               <a:lnSpc>
                 <a:spcPct val="122000"/>
               </a:lnSpc>
               <a:spcAft>
-                <a:spcPts val="1000"/>
+                <a:spcPts val="1100"/>
               </a:spcAft>
               <a:buSzPct val="100000"/>
               <a:buChar char="•"/>
             </a:pPr>
             <a:r>
-              <a:rPr lang="en-US" sz="1350" dirty="0">
+              <a:rPr lang="en-US" sz="1400" dirty="0">
                 <a:solidFill>
                   <a:srgbClr val="31424A"/>
                 </a:solidFill>
@@ -9296,156 +10746,15 @@
                 <a:ea typeface="Calibri" pitchFamily="34" charset="-122"/>
                 <a:cs typeface="Calibri" pitchFamily="34" charset="-120"/>
               </a:rPr>
-              <a:t>A micro-dose fertiliser of amino acids, nitrogen, phosphorus and potassium, made from renewable resources.</a:t>
-            </a:r>
-            <a:endParaRPr lang="en-US" sz="1350" dirty="0"/>
-          </a:p>
-          <a:p>
-            <a:pPr algn="l" marL="342900" indent="-342900">
-              <a:lnSpc>
-                <a:spcPct val="122000"/>
-              </a:lnSpc>
-              <a:spcAft>
-                <a:spcPts val="1000"/>
-              </a:spcAft>
-              <a:buSzPct val="100000"/>
-              <a:buChar char="•"/>
-            </a:pPr>
-            <a:r>
-              <a:rPr lang="en-US" sz="1350" dirty="0">
-                <a:solidFill>
-                  <a:srgbClr val="31424A"/>
-                </a:solidFill>
-                <a:latin typeface="Calibri" pitchFamily="34" charset="0"/>
-                <a:ea typeface="Calibri" pitchFamily="34" charset="-122"/>
-                <a:cs typeface="Calibri" pitchFamily="34" charset="-120"/>
-              </a:rPr>
-              <a:t>Non-chelating: it does not strip the clay-humus complex of soils that are often low in organic matter.</a:t>
-            </a:r>
-            <a:endParaRPr lang="en-US" sz="1350" dirty="0"/>
-          </a:p>
-          <a:p>
-            <a:pPr algn="l" marL="342900" indent="-342900">
-              <a:lnSpc>
-                <a:spcPct val="122000"/>
-              </a:lnSpc>
-              <a:spcAft>
-                <a:spcPts val="1000"/>
-              </a:spcAft>
-              <a:buSzPct val="100000"/>
-              <a:buChar char="•"/>
-            </a:pPr>
-            <a:r>
-              <a:rPr lang="en-US" sz="1350" dirty="0">
-                <a:solidFill>
-                  <a:srgbClr val="31424A"/>
-                </a:solidFill>
-                <a:latin typeface="Calibri" pitchFamily="34" charset="0"/>
-                <a:ea typeface="Calibri" pitchFamily="34" charset="-122"/>
-                <a:cs typeface="Calibri" pitchFamily="34" charset="-120"/>
-              </a:rPr>
-              <a:t>Certified SOHISCERT and EU Bio, in use in 60 countries.</a:t>
-            </a:r>
-            <a:endParaRPr lang="en-US" sz="1350" dirty="0"/>
-          </a:p>
-          <a:p>
-            <a:pPr algn="l" marL="342900" indent="-342900">
-              <a:lnSpc>
-                <a:spcPct val="122000"/>
-              </a:lnSpc>
-              <a:spcAft>
-                <a:spcPts val="1000"/>
-              </a:spcAft>
-              <a:buSzPct val="100000"/>
-              <a:buChar char="•"/>
-            </a:pPr>
-            <a:r>
-              <a:rPr lang="en-US" sz="1350" dirty="0">
-                <a:solidFill>
-                  <a:srgbClr val="31424A"/>
-                </a:solidFill>
-                <a:latin typeface="Calibri" pitchFamily="34" charset="0"/>
-                <a:ea typeface="Calibri" pitchFamily="34" charset="-122"/>
-                <a:cs typeface="Calibri" pitchFamily="34" charset="-120"/>
-              </a:rPr>
-              <a:t>1 to 4 bottles of 140 ml per hectare, applied with a knapsack sprayer.</a:t>
-            </a:r>
-            <a:endParaRPr lang="en-US" sz="1350" dirty="0"/>
-          </a:p>
-        </p:txBody>
-      </p:sp>
-      <p:sp>
-        <p:nvSpPr>
-          <p:cNvPr id="8" name="Shape 6"/>
-          <p:cNvSpPr/>
-          <p:nvPr/>
-        </p:nvSpPr>
-        <p:spPr>
-          <a:xfrm>
-            <a:off x="594360" y="4846320"/>
-            <a:ext cx="11002975" cy="960120"/>
-          </a:xfrm>
-          <a:prstGeom prst="roundRect">
-            <a:avLst>
-              <a:gd name="adj" fmla="val 7619"/>
-            </a:avLst>
-          </a:prstGeom>
-          <a:solidFill>
-            <a:srgbClr val="EDF3F5"/>
-          </a:solidFill>
-          <a:ln w="9525">
-            <a:solidFill>
-              <a:srgbClr val="D6E2E7"/>
-            </a:solidFill>
-            <a:prstDash val="solid"/>
-          </a:ln>
-        </p:spPr>
-      </p:sp>
-      <p:sp>
-        <p:nvSpPr>
-          <p:cNvPr id="9" name="Text 7"/>
-          <p:cNvSpPr txBox="1"/>
-          <p:nvPr/>
-        </p:nvSpPr>
-        <p:spPr>
-          <a:xfrm>
-            <a:off x="822960" y="4983480"/>
-            <a:ext cx="10545775" cy="713232"/>
-          </a:xfrm>
-          <a:prstGeom prst="rect">
-            <a:avLst/>
-          </a:prstGeom>
-          <a:noFill/>
-          <a:ln/>
-        </p:spPr>
-        <p:txBody>
-          <a:bodyPr wrap="square" lIns="0" tIns="0" rIns="0" bIns="0" rtlCol="0" anchor="t"/>
-          <a:lstStyle/>
-          <a:p>
-            <a:pPr algn="l" indent="0" marL="0">
-              <a:lnSpc>
-                <a:spcPct val="118000"/>
-              </a:lnSpc>
-              <a:buNone/>
-            </a:pPr>
-            <a:r>
-              <a:rPr lang="en-US" sz="1100" dirty="0">
-                <a:solidFill>
-                  <a:srgbClr val="6C8089"/>
-                </a:solidFill>
-                <a:latin typeface="Calibri" pitchFamily="34" charset="0"/>
-                <a:ea typeface="Calibri" pitchFamily="34" charset="-122"/>
-                <a:cs typeface="Calibri" pitchFamily="34" charset="-120"/>
-              </a:rPr>
-              <a:t>Neither product replaces drainage, good seed or safe storage. They are trialled where water shortage, not waterlogging, limits the crop.</a:t>
-            </a:r>
-            <a:endParaRPr lang="en-US" sz="1100" dirty="0"/>
-          </a:p>
-        </p:txBody>
-      </p:sp>
-      <p:sp>
-        <p:nvSpPr>
-          <p:cNvPr id="10" name="Text 8"/>
+              <a:t>EVERGREEN® and ECOFERT® are to be trialled on drained plots exposed to dry spells, against an untreated control.</a:t>
+            </a:r>
+            <a:endParaRPr lang="en-US" sz="1400" dirty="0"/>
+          </a:p>
+        </p:txBody>
+      </p:sp>
+      <p:sp>
+        <p:nvSpPr>
+          <p:cNvPr id="6" name="Text 3"/>
           <p:cNvSpPr txBox="1"/>
           <p:nvPr/>
         </p:nvSpPr>
@@ -9486,7 +10795,7 @@
       </p:sp>
       <p:sp>
         <p:nvSpPr>
-          <p:cNvPr id="11" name="Text 9"/>
+          <p:cNvPr id="7" name="Text 4"/>
           <p:cNvSpPr txBox="1"/>
           <p:nvPr/>
         </p:nvSpPr>
@@ -9590,7 +10899,7 @@
                 <a:ea typeface="Calibri" pitchFamily="34" charset="-122"/>
                 <a:cs typeface="Calibri" pitchFamily="34" charset="-120"/>
               </a:rPr>
-              <a:t>The rest of the range</a:t>
+              <a:t>OUR RESPONSE</a:t>
             </a:r>
             <a:endParaRPr lang="en-US" sz="1150" dirty="0"/>
           </a:p>
@@ -9629,7 +10938,7 @@
                 <a:ea typeface="Cambria" pitchFamily="34" charset="-122"/>
                 <a:cs typeface="Cambria" pitchFamily="34" charset="-120"/>
               </a:rPr>
-              <a:t>Protecting crops, holding soils</a:t>
+              <a:t>Two technologies, for drained land under dry spells</a:t>
             </a:r>
             <a:endParaRPr lang="en-US" sz="3000" dirty="0"/>
           </a:p>
@@ -9668,7 +10977,7 @@
                 <a:ea typeface="Cambria" pitchFamily="34" charset="-122"/>
                 <a:cs typeface="Cambria" pitchFamily="34" charset="-120"/>
               </a:rPr>
-              <a:t>NAPEMA® — protection without residue</a:t>
+              <a:t>EVERGREEN® — holding the water</a:t>
             </a:r>
             <a:endParaRPr lang="en-US" sz="1600" dirty="0"/>
           </a:p>
@@ -9714,7 +11023,7 @@
                 <a:ea typeface="Calibri" pitchFamily="34" charset="-122"/>
                 <a:cs typeface="Calibri" pitchFamily="34" charset="-120"/>
               </a:rPr>
-              <a:t>Controls diseases, parasites, fungi and pests, with no synthetic molecule.</a:t>
+              <a:t>A potassium-based hydro-retainer placed in the root zone of drained, drought-exposed plots.</a:t>
             </a:r>
             <a:endParaRPr lang="en-US" sz="1350" dirty="0"/>
           </a:p>
@@ -9738,7 +11047,7 @@
                 <a:ea typeface="Calibri" pitchFamily="34" charset="-122"/>
                 <a:cs typeface="Calibri" pitchFamily="34" charset="-120"/>
               </a:rPr>
-              <a:t>Foliar and root spraying, working both preventively and curatively.</a:t>
+              <a:t>It captures rain and releases it back to the plant gradually, bridging dry spells at emergence and flowering.</a:t>
             </a:r>
             <a:endParaRPr lang="en-US" sz="1350" dirty="0"/>
           </a:p>
@@ -9762,7 +11071,7 @@
                 <a:ea typeface="Calibri" pitchFamily="34" charset="-122"/>
                 <a:cs typeface="Calibri" pitchFamily="34" charset="-120"/>
               </a:rPr>
-              <a:t>No residue in soil, plant or air: pollinators and beneficial insects are spared.</a:t>
+              <a:t>Absorbs on the order of 300 times its own weight; useful effect of 3 to 4 years in the soil.</a:t>
             </a:r>
             <a:endParaRPr lang="en-US" sz="1350" dirty="0"/>
           </a:p>
@@ -9786,7 +11095,7 @@
                 <a:ea typeface="Calibri" pitchFamily="34" charset="-122"/>
                 <a:cs typeface="Calibri" pitchFamily="34" charset="-120"/>
               </a:rPr>
-              <a:t>Formulated for one precise problem: mealybug, citrus greening (HLB), nematodes.</a:t>
+              <a:t>Breaks down by 20 to 25 % a year, with no build-up and no risk of overdosing.</a:t>
             </a:r>
             <a:endParaRPr lang="en-US" sz="1350" dirty="0"/>
           </a:p>
@@ -9825,7 +11134,7 @@
                 <a:ea typeface="Cambria" pitchFamily="34" charset="-122"/>
                 <a:cs typeface="Cambria" pitchFamily="34" charset="-120"/>
               </a:rPr>
-              <a:t>Paulownia ALTIFOLIA® — the tree for hot regions</a:t>
+              <a:t>ECOFERT® — feeding without depleting</a:t>
             </a:r>
             <a:endParaRPr lang="en-US" sz="1600" dirty="0"/>
           </a:p>
@@ -9871,7 +11180,7 @@
                 <a:ea typeface="Calibri" pitchFamily="34" charset="-122"/>
                 <a:cs typeface="Calibri" pitchFamily="34" charset="-120"/>
               </a:rPr>
-              <a:t>13 to 15 m in six to eight years, with a wide trunk.</a:t>
+              <a:t>A micro-dose fertiliser of amino acids, nitrogen, phosphorus and potassium, made from renewable resources.</a:t>
             </a:r>
             <a:endParaRPr lang="en-US" sz="1350" dirty="0"/>
           </a:p>
@@ -9895,7 +11204,7 @@
                 <a:ea typeface="Calibri" pitchFamily="34" charset="-122"/>
                 <a:cs typeface="Calibri" pitchFamily="34" charset="-120"/>
               </a:rPr>
-              <a:t>Combined with 100 g of EVERGREEN® per plant, irrigation needs drop by 50%.</a:t>
+              <a:t>Non-chelating: it does not strip the clay-humus complex of soils that are often low in organic matter.</a:t>
             </a:r>
             <a:endParaRPr lang="en-US" sz="1350" dirty="0"/>
           </a:p>
@@ -9919,7 +11228,7 @@
                 <a:ea typeface="Calibri" pitchFamily="34" charset="-122"/>
                 <a:cs typeface="Calibri" pitchFamily="34" charset="-120"/>
               </a:rPr>
-              <a:t>Withstands −25 °C to +45 °C; the wood only ignites above 426 °C.</a:t>
+              <a:t>Certified SOHISCERT and EU Bio, in use in 60 countries.</a:t>
             </a:r>
             <a:endParaRPr lang="en-US" sz="1350" dirty="0"/>
           </a:p>
@@ -9943,7 +11252,7 @@
                 <a:ea typeface="Calibri" pitchFamily="34" charset="-122"/>
                 <a:cs typeface="Calibri" pitchFamily="34" charset="-120"/>
               </a:rPr>
-              <a:t>Windbreak, protection against soil erosion, 400 to 700 kg of honey per hectare.</a:t>
+              <a:t>1 to 4 bottles of 140 ml per hectare, applied with a knapsack sprayer.</a:t>
             </a:r>
             <a:endParaRPr lang="en-US" sz="1350" dirty="0"/>
           </a:p>
@@ -10012,7 +11321,7 @@
                 <a:ea typeface="Calibri" pitchFamily="34" charset="-122"/>
                 <a:cs typeface="Calibri" pitchFamily="34" charset="-120"/>
               </a:rPr>
-              <a:t>Plants delivered potted (25 to 30 cm), certified disease-free and replaced under warranty in case of loss. First harvest at the end of year six, with wood valued at around €400 to €450 per m³.</a:t>
+              <a:t>Neither product replaces drainage, good seed or safe storage. They are trialled where water shortage, not waterlogging, limits the crop.</a:t>
             </a:r>
             <a:endParaRPr lang="en-US" sz="1100" dirty="0"/>
           </a:p>

--- a/public/documents/countries/soudan-sud.pptx
+++ b/public/documents/countries/soudan-sud.pptx
@@ -122,7 +122,7 @@
 </p:presentation>
 </file>
 
-<file path=ppt/charts/chart84.xml><?xml version="1.0" encoding="utf-8"?>
+<file path=ppt/charts/chart88.xml><?xml version="1.0" encoding="utf-8"?>
 <c:chartSpace xmlns:c="http://schemas.openxmlformats.org/drawingml/2006/chart" xmlns:a="http://schemas.openxmlformats.org/drawingml/2006/main" xmlns:r="http://schemas.openxmlformats.org/officeDocument/2006/relationships">
   <c:date1904 val="0"/>
   <c:roundedCorners val="1"/>
@@ -381,7 +381,7 @@
 </c:chartSpace>
 </file>
 
-<file path=ppt/charts/chart85.xml><?xml version="1.0" encoding="utf-8"?>
+<file path=ppt/charts/chart89.xml><?xml version="1.0" encoding="utf-8"?>
 <c:chartSpace xmlns:c="http://schemas.openxmlformats.org/drawingml/2006/chart" xmlns:a="http://schemas.openxmlformats.org/drawingml/2006/main" xmlns:r="http://schemas.openxmlformats.org/officeDocument/2006/relationships">
   <c:date1904 val="0"/>
   <c:roundedCorners val="1"/>
@@ -638,7 +638,7 @@
 </c:chartSpace>
 </file>
 
-<file path=ppt/charts/chart86.xml><?xml version="1.0" encoding="utf-8"?>
+<file path=ppt/charts/chart90.xml><?xml version="1.0" encoding="utf-8"?>
 <c:chartSpace xmlns:c="http://schemas.openxmlformats.org/drawingml/2006/chart" xmlns:a="http://schemas.openxmlformats.org/drawingml/2006/main" xmlns:r="http://schemas.openxmlformats.org/officeDocument/2006/relationships">
   <c:date1904 val="0"/>
   <c:roundedCorners val="1"/>
@@ -929,7 +929,7 @@
 </c:chartSpace>
 </file>
 
-<file path=ppt/charts/chart87.xml><?xml version="1.0" encoding="utf-8"?>
+<file path=ppt/charts/chart91.xml><?xml version="1.0" encoding="utf-8"?>
 <c:chartSpace xmlns:c="http://schemas.openxmlformats.org/drawingml/2006/chart" xmlns:a="http://schemas.openxmlformats.org/drawingml/2006/main" xmlns:r="http://schemas.openxmlformats.org/officeDocument/2006/relationships">
   <c:date1904 val="0"/>
   <c:roundedCorners val="1"/>
@@ -3455,7 +3455,7 @@
       </p:sp>
       <p:pic>
         <p:nvPicPr>
-          <p:cNvPr id="5" name="Image 1" descr="/workspace/scratch/50eb4f7d8e13/green-solutions-web/public/images/logo-icon.png">    </p:cNvPr>
+          <p:cNvPr id="5" name="Image 1" descr="/home/claude/green-solutions-web/public/images/logo-icon.png">    </p:cNvPr>
           <p:cNvPicPr>
             <a:picLocks noChangeAspect="1"/>
           </p:cNvPicPr>
@@ -3479,7 +3479,7 @@
       </p:pic>
       <p:pic>
         <p:nvPicPr>
-          <p:cNvPr id="6" name="Image 2" descr="/workspace/scratch/50eb4f7d8e13/green-solutions-web/scripts/dossiers/drapeaux/soudan-sud.png">    </p:cNvPr>
+          <p:cNvPr id="6" name="Image 2" descr="/home/claude/green-solutions-web/scripts/dossiers/drapeaux/soudan-sud.png">    </p:cNvPr>
           <p:cNvPicPr>
             <a:picLocks noChangeAspect="1"/>
           </p:cNvPicPr>
@@ -7745,7 +7745,7 @@
                 <a:ea typeface="Calibri" pitchFamily="34" charset="-122"/>
                 <a:cs typeface="Calibri" pitchFamily="34" charset="-120"/>
               </a:rPr>
-              <a:t>contact@evergreen-ecosorb.com · Green Solutions Groupe AIM SA, 46, route de la Condémine, 1475 Forel, Switzerland</a:t>
+              <a:t>contact@green-solutions-group.com · Green Solutions Groupe AIM SA, 46, route de la Condémine, 1475 Forel, Switzerland</a:t>
             </a:r>
             <a:endParaRPr lang="en-US" sz="1400" dirty="0"/>
           </a:p>
@@ -7753,7 +7753,7 @@
       </p:sp>
       <p:pic>
         <p:nvPicPr>
-          <p:cNvPr id="6" name="Image 1" descr="/workspace/scratch/50eb4f7d8e13/green-solutions-web/scripts/dossiers/sceau-aim-clair.png">    </p:cNvPr>
+          <p:cNvPr id="6" name="Image 1" descr="/home/claude/green-solutions-web/scripts/dossiers/sceau-aim-clair.png">    </p:cNvPr>
           <p:cNvPicPr>
             <a:picLocks noChangeAspect="1"/>
           </p:cNvPicPr>
